--- a/transport_smg_presentation.pptx
+++ b/transport_smg_presentation.pptx
@@ -5,17 +5,22 @@
     <p:sldMasterId id="2147483648" r:id="rId1"/>
   </p:sldMasterIdLst>
   <p:notesMasterIdLst>
-    <p:notesMasterId r:id="rId10"/>
+    <p:notesMasterId r:id="rId15"/>
   </p:notesMasterIdLst>
   <p:sldIdLst>
     <p:sldId id="256" r:id="rId2"/>
     <p:sldId id="257" r:id="rId3"/>
     <p:sldId id="258" r:id="rId4"/>
-    <p:sldId id="259" r:id="rId5"/>
-    <p:sldId id="260" r:id="rId6"/>
-    <p:sldId id="261" r:id="rId7"/>
-    <p:sldId id="262" r:id="rId8"/>
-    <p:sldId id="263" r:id="rId9"/>
+    <p:sldId id="268" r:id="rId5"/>
+    <p:sldId id="259" r:id="rId6"/>
+    <p:sldId id="260" r:id="rId7"/>
+    <p:sldId id="261" r:id="rId8"/>
+    <p:sldId id="262" r:id="rId9"/>
+    <p:sldId id="263" r:id="rId10"/>
+    <p:sldId id="264" r:id="rId11"/>
+    <p:sldId id="265" r:id="rId12"/>
+    <p:sldId id="266" r:id="rId13"/>
+    <p:sldId id="267" r:id="rId14"/>
   </p:sldIdLst>
   <p:sldSz cx="9144000" cy="5143500" type="screen16x9"/>
   <p:notesSz cx="5143500" cy="9144000"/>
@@ -119,776 +124,6 @@
 </p:presentation>
 </file>
 
-<file path=ppt/revisionInfo.xml><?xml version="1.0" encoding="utf-8"?>
-<p1510:revInfo xmlns:a="http://schemas.openxmlformats.org/drawingml/2006/main" xmlns:r="http://schemas.openxmlformats.org/officeDocument/2006/relationships" xmlns:p1510="http://schemas.microsoft.com/office/powerpoint/2015/10/main">
-  <p1510:revLst>
-    <p1510:client id="{112378FF-8CBC-D4C7-DE3D-AD5570ACD183}" v="1" dt="2026-06-18T09:45:52.530"/>
-    <p1510:client id="{1F591BAA-57D5-E6EF-C282-B50F5FE5B34A}" v="103" dt="2026-06-17T21:07:54.156"/>
-    <p1510:client id="{C763B702-3A8E-CBD0-1911-3B73EF832574}" v="119" dt="2026-06-17T10:59:15.683"/>
-  </p1510:revLst>
-</p1510:revInfo>
-</file>
-
-<file path=ppt/charts/chart1.xml><?xml version="1.0" encoding="utf-8"?>
-<c:chartSpace xmlns:c="http://schemas.openxmlformats.org/drawingml/2006/chart" xmlns:a="http://schemas.openxmlformats.org/drawingml/2006/main" xmlns:r="http://schemas.openxmlformats.org/officeDocument/2006/relationships" xmlns:c16r2="http://schemas.microsoft.com/office/drawing/2015/06/chart">
-  <c:date1904 val="0"/>
-  <c:lang val="fr-FR"/>
-  <c:roundedCorners val="1"/>
-  <c:style val="2"/>
-  <c:chart>
-    <c:title>
-      <c:tx>
-        <c:rich>
-          <a:bodyPr/>
-          <a:lstStyle/>
-          <a:p>
-            <a:pPr>
-              <a:defRPr sz="1200" b="0" i="0" u="none" strike="noStrike">
-                <a:solidFill>
-                  <a:srgbClr val="1E293B"/>
-                </a:solidFill>
-                <a:latin typeface="Arial"/>
-              </a:defRPr>
-            </a:pPr>
-            <a:r>
-              <a:rPr lang="fr-FR" sz="1200" b="0" i="0" u="none" strike="noStrike">
-                <a:solidFill>
-                  <a:srgbClr val="1E293B"/>
-                </a:solidFill>
-                <a:latin typeface="Arial"/>
-              </a:rPr>
-              <a:t>Min. Expected Travel Time (min)</a:t>
-            </a:r>
-          </a:p>
-        </c:rich>
-      </c:tx>
-      <c:overlay val="0"/>
-    </c:title>
-    <c:autoTitleDeleted val="0"/>
-    <c:plotArea>
-      <c:layout/>
-      <c:barChart>
-        <c:barDir val="col"/>
-        <c:grouping val="clustered"/>
-        <c:varyColors val="0"/>
-        <c:ser>
-          <c:idx val="0"/>
-          <c:order val="0"/>
-          <c:tx>
-            <c:strRef>
-              <c:f>Sheet1!$B$1</c:f>
-              <c:strCache>
-                <c:ptCount val="1"/>
-                <c:pt idx="0">
-                  <c:v>Min. Expected Travel Time (min)</c:v>
-                </c:pt>
-              </c:strCache>
-            </c:strRef>
-          </c:tx>
-          <c:spPr>
-            <a:solidFill>
-              <a:srgbClr val="065A82"/>
-            </a:solidFill>
-            <a:effectLst/>
-          </c:spPr>
-          <c:invertIfNegative val="0"/>
-          <c:dPt>
-            <c:idx val="0"/>
-            <c:invertIfNegative val="0"/>
-            <c:bubble3D val="0"/>
-            <c:extLst>
-              <c:ext xmlns:c16="http://schemas.microsoft.com/office/drawing/2014/chart" uri="{C3380CC4-5D6E-409C-BE32-E72D297353CC}">
-                <c16:uniqueId val="{00000001-179C-42F3-B050-C62BE9BAA363}"/>
-              </c:ext>
-            </c:extLst>
-          </c:dPt>
-          <c:dPt>
-            <c:idx val="1"/>
-            <c:invertIfNegative val="0"/>
-            <c:bubble3D val="0"/>
-            <c:spPr>
-              <a:solidFill>
-                <a:srgbClr val="1C7293"/>
-              </a:solidFill>
-              <a:effectLst/>
-            </c:spPr>
-            <c:extLst>
-              <c:ext xmlns:c16="http://schemas.microsoft.com/office/drawing/2014/chart" uri="{C3380CC4-5D6E-409C-BE32-E72D297353CC}">
-                <c16:uniqueId val="{00000003-179C-42F3-B050-C62BE9BAA363}"/>
-              </c:ext>
-            </c:extLst>
-          </c:dPt>
-          <c:dPt>
-            <c:idx val="2"/>
-            <c:invertIfNegative val="0"/>
-            <c:bubble3D val="0"/>
-            <c:spPr>
-              <a:solidFill>
-                <a:srgbClr val="02C39A"/>
-              </a:solidFill>
-              <a:effectLst/>
-            </c:spPr>
-            <c:extLst>
-              <c:ext xmlns:c16="http://schemas.microsoft.com/office/drawing/2014/chart" uri="{C3380CC4-5D6E-409C-BE32-E72D297353CC}">
-                <c16:uniqueId val="{00000005-179C-42F3-B050-C62BE9BAA363}"/>
-              </c:ext>
-            </c:extLst>
-          </c:dPt>
-          <c:dPt>
-            <c:idx val="3"/>
-            <c:invertIfNegative val="0"/>
-            <c:bubble3D val="0"/>
-            <c:spPr>
-              <a:solidFill>
-                <a:srgbClr val="8B3A3A"/>
-              </a:solidFill>
-              <a:effectLst/>
-            </c:spPr>
-            <c:extLst>
-              <c:ext xmlns:c16="http://schemas.microsoft.com/office/drawing/2014/chart" uri="{C3380CC4-5D6E-409C-BE32-E72D297353CC}">
-                <c16:uniqueId val="{00000007-179C-42F3-B050-C62BE9BAA363}"/>
-              </c:ext>
-            </c:extLst>
-          </c:dPt>
-          <c:dPt>
-            <c:idx val="4"/>
-            <c:invertIfNegative val="0"/>
-            <c:bubble3D val="0"/>
-            <c:spPr>
-              <a:solidFill>
-                <a:srgbClr val="1C7293"/>
-              </a:solidFill>
-              <a:effectLst/>
-            </c:spPr>
-            <c:extLst>
-              <c:ext xmlns:c16="http://schemas.microsoft.com/office/drawing/2014/chart" uri="{C3380CC4-5D6E-409C-BE32-E72D297353CC}">
-                <c16:uniqueId val="{00000009-179C-42F3-B050-C62BE9BAA363}"/>
-              </c:ext>
-            </c:extLst>
-          </c:dPt>
-          <c:dPt>
-            <c:idx val="5"/>
-            <c:invertIfNegative val="0"/>
-            <c:bubble3D val="0"/>
-            <c:extLst>
-              <c:ext xmlns:c16="http://schemas.microsoft.com/office/drawing/2014/chart" uri="{C3380CC4-5D6E-409C-BE32-E72D297353CC}">
-                <c16:uniqueId val="{0000000B-179C-42F3-B050-C62BE9BAA363}"/>
-              </c:ext>
-            </c:extLst>
-          </c:dPt>
-          <c:dLbls>
-            <c:numFmt formatCode="#,##0" sourceLinked="0"/>
-            <c:spPr>
-              <a:noFill/>
-              <a:ln>
-                <a:noFill/>
-              </a:ln>
-              <a:effectLst/>
-            </c:spPr>
-            <c:txPr>
-              <a:bodyPr/>
-              <a:lstStyle/>
-              <a:p>
-                <a:pPr>
-                  <a:defRPr sz="1200" b="0" i="0" u="none" strike="noStrike">
-                    <a:solidFill>
-                      <a:srgbClr val="1E293B"/>
-                    </a:solidFill>
-                    <a:latin typeface="Arial"/>
-                  </a:defRPr>
-                </a:pPr>
-                <a:endParaRPr lang="fr-FR"/>
-              </a:p>
-            </c:txPr>
-            <c:showLegendKey val="0"/>
-            <c:showVal val="1"/>
-            <c:showCatName val="0"/>
-            <c:showSerName val="0"/>
-            <c:showPercent val="0"/>
-            <c:showBubbleSize val="0"/>
-            <c:showLeaderLines val="0"/>
-            <c:extLst>
-              <c:ext xmlns:c15="http://schemas.microsoft.com/office/drawing/2012/chart" uri="{CE6537A1-D6FC-4f65-9D91-7224C49458BB}">
-                <c15:showLeaderLines val="0"/>
-              </c:ext>
-            </c:extLst>
-          </c:dLbls>
-          <c:cat>
-            <c:strRef>
-              <c:f>Sheet1!$A$2:$A$7</c:f>
-              <c:strCache>
-                <c:ptCount val="6"/>
-                <c:pt idx="0">
-                  <c:v>Elderly
-(no car)</c:v>
-                </c:pt>
-                <c:pt idx="1">
-                  <c:v>Less
-Mobile</c:v>
-                </c:pt>
-                <c:pt idx="2">
-                  <c:v>Young Low
-Income</c:v>
-                </c:pt>
-                <c:pt idx="3">
-                  <c:v>Heavy Car
-User</c:v>
-                </c:pt>
-                <c:pt idx="4">
-                  <c:v>Urban
-Prof.</c:v>
-                </c:pt>
-                <c:pt idx="5">
-                  <c:v>Young
-Family</c:v>
-                </c:pt>
-              </c:strCache>
-            </c:strRef>
-          </c:cat>
-          <c:val>
-            <c:numRef>
-              <c:f>Sheet1!$B$2:$B$7</c:f>
-              <c:numCache>
-                <c:formatCode>General</c:formatCode>
-                <c:ptCount val="6"/>
-                <c:pt idx="0">
-                  <c:v>165</c:v>
-                </c:pt>
-                <c:pt idx="1">
-                  <c:v>32</c:v>
-                </c:pt>
-                <c:pt idx="2">
-                  <c:v>46</c:v>
-                </c:pt>
-                <c:pt idx="3">
-                  <c:v>30</c:v>
-                </c:pt>
-                <c:pt idx="4">
-                  <c:v>30</c:v>
-                </c:pt>
-                <c:pt idx="5">
-                  <c:v>34</c:v>
-                </c:pt>
-              </c:numCache>
-            </c:numRef>
-          </c:val>
-          <c:extLst>
-            <c:ext xmlns:c16="http://schemas.microsoft.com/office/drawing/2014/chart" uri="{C3380CC4-5D6E-409C-BE32-E72D297353CC}">
-              <c16:uniqueId val="{0000000C-179C-42F3-B050-C62BE9BAA363}"/>
-            </c:ext>
-          </c:extLst>
-        </c:ser>
-        <c:dLbls>
-          <c:showLegendKey val="0"/>
-          <c:showVal val="1"/>
-          <c:showCatName val="0"/>
-          <c:showSerName val="0"/>
-          <c:showPercent val="0"/>
-          <c:showBubbleSize val="0"/>
-        </c:dLbls>
-        <c:gapWidth val="150"/>
-        <c:axId val="2094734554"/>
-        <c:axId val="2094734552"/>
-      </c:barChart>
-      <c:catAx>
-        <c:axId val="2094734554"/>
-        <c:scaling>
-          <c:orientation val="minMax"/>
-        </c:scaling>
-        <c:delete val="0"/>
-        <c:axPos val="b"/>
-        <c:numFmt formatCode="General" sourceLinked="1"/>
-        <c:majorTickMark val="out"/>
-        <c:minorTickMark val="none"/>
-        <c:tickLblPos val="low"/>
-        <c:spPr>
-          <a:ln w="12700" cap="flat">
-            <a:solidFill>
-              <a:srgbClr val="888888"/>
-            </a:solidFill>
-            <a:prstDash val="solid"/>
-            <a:round/>
-          </a:ln>
-        </c:spPr>
-        <c:txPr>
-          <a:bodyPr/>
-          <a:lstStyle/>
-          <a:p>
-            <a:pPr>
-              <a:defRPr sz="1200" b="0" i="0" u="none" strike="noStrike">
-                <a:solidFill>
-                  <a:srgbClr val="64748B"/>
-                </a:solidFill>
-                <a:latin typeface="Arial"/>
-              </a:defRPr>
-            </a:pPr>
-            <a:endParaRPr lang="en-US"/>
-          </a:p>
-        </c:txPr>
-        <c:crossAx val="2094734552"/>
-        <c:crosses val="autoZero"/>
-        <c:auto val="1"/>
-        <c:lblAlgn val="ctr"/>
-        <c:lblOffset val="100"/>
-        <c:noMultiLvlLbl val="1"/>
-      </c:catAx>
-      <c:valAx>
-        <c:axId val="2094734552"/>
-        <c:scaling>
-          <c:orientation val="minMax"/>
-        </c:scaling>
-        <c:delete val="0"/>
-        <c:axPos val="l"/>
-        <c:majorGridlines>
-          <c:spPr>
-            <a:ln w="6350" cap="flat">
-              <a:solidFill>
-                <a:srgbClr val="E2E8F0"/>
-              </a:solidFill>
-              <a:prstDash val="solid"/>
-              <a:round/>
-            </a:ln>
-          </c:spPr>
-        </c:majorGridlines>
-        <c:numFmt formatCode="General" sourceLinked="0"/>
-        <c:majorTickMark val="out"/>
-        <c:minorTickMark val="none"/>
-        <c:tickLblPos val="nextTo"/>
-        <c:spPr>
-          <a:ln w="12700" cap="flat">
-            <a:solidFill>
-              <a:srgbClr val="888888"/>
-            </a:solidFill>
-            <a:prstDash val="solid"/>
-            <a:round/>
-          </a:ln>
-        </c:spPr>
-        <c:txPr>
-          <a:bodyPr/>
-          <a:lstStyle/>
-          <a:p>
-            <a:pPr>
-              <a:defRPr sz="1200" b="0" i="0" u="none" strike="noStrike">
-                <a:solidFill>
-                  <a:srgbClr val="64748B"/>
-                </a:solidFill>
-                <a:latin typeface="Arial"/>
-              </a:defRPr>
-            </a:pPr>
-            <a:endParaRPr lang="en-US"/>
-          </a:p>
-        </c:txPr>
-        <c:crossAx val="2094734554"/>
-        <c:crosses val="autoZero"/>
-        <c:crossBetween val="between"/>
-      </c:valAx>
-      <c:spPr>
-        <a:noFill/>
-        <a:ln>
-          <a:noFill/>
-        </a:ln>
-        <a:effectLst/>
-      </c:spPr>
-    </c:plotArea>
-    <c:plotVisOnly val="1"/>
-    <c:dispBlanksAs val="span"/>
-    <c:showDLblsOverMax val="1"/>
-  </c:chart>
-  <c:spPr>
-    <a:solidFill>
-      <a:srgbClr val="FFFFFF"/>
-    </a:solidFill>
-    <a:ln>
-      <a:noFill/>
-    </a:ln>
-    <a:effectLst/>
-  </c:spPr>
-  <c:externalData r:id="rId1">
-    <c:autoUpdate val="0"/>
-  </c:externalData>
-</c:chartSpace>
-</file>
-
-<file path=ppt/charts/chart2.xml><?xml version="1.0" encoding="utf-8"?>
-<c:chartSpace xmlns:c="http://schemas.openxmlformats.org/drawingml/2006/chart" xmlns:a="http://schemas.openxmlformats.org/drawingml/2006/main" xmlns:r="http://schemas.openxmlformats.org/officeDocument/2006/relationships" xmlns:c16r2="http://schemas.microsoft.com/office/drawing/2015/06/chart">
-  <c:date1904 val="0"/>
-  <c:lang val="fr-FR"/>
-  <c:roundedCorners val="1"/>
-  <c:style val="2"/>
-  <c:chart>
-    <c:title>
-      <c:tx>
-        <c:rich>
-          <a:bodyPr/>
-          <a:lstStyle/>
-          <a:p>
-            <a:pPr>
-              <a:defRPr sz="1200" b="0" i="0" u="none" strike="noStrike">
-                <a:solidFill>
-                  <a:srgbClr val="1E293B"/>
-                </a:solidFill>
-                <a:latin typeface="Arial"/>
-              </a:defRPr>
-            </a:pPr>
-            <a:r>
-              <a:rPr lang="fr-FR" sz="1200" b="0" i="0" u="none" strike="noStrike">
-                <a:solidFill>
-                  <a:srgbClr val="1E293B"/>
-                </a:solidFill>
-                <a:latin typeface="Arial"/>
-              </a:rPr>
-              <a:t>Min. Expected CO2e Emissions (g)</a:t>
-            </a:r>
-          </a:p>
-        </c:rich>
-      </c:tx>
-      <c:overlay val="0"/>
-    </c:title>
-    <c:autoTitleDeleted val="0"/>
-    <c:plotArea>
-      <c:layout/>
-      <c:barChart>
-        <c:barDir val="col"/>
-        <c:grouping val="clustered"/>
-        <c:varyColors val="0"/>
-        <c:ser>
-          <c:idx val="0"/>
-          <c:order val="0"/>
-          <c:tx>
-            <c:strRef>
-              <c:f>Sheet1!$B$1</c:f>
-              <c:strCache>
-                <c:ptCount val="1"/>
-                <c:pt idx="0">
-                  <c:v>Min. Expected CO2e (g)</c:v>
-                </c:pt>
-              </c:strCache>
-            </c:strRef>
-          </c:tx>
-          <c:spPr>
-            <a:solidFill>
-              <a:srgbClr val="065A82"/>
-            </a:solidFill>
-            <a:effectLst/>
-          </c:spPr>
-          <c:invertIfNegative val="0"/>
-          <c:dPt>
-            <c:idx val="0"/>
-            <c:invertIfNegative val="0"/>
-            <c:bubble3D val="0"/>
-            <c:extLst>
-              <c:ext xmlns:c16="http://schemas.microsoft.com/office/drawing/2014/chart" uri="{C3380CC4-5D6E-409C-BE32-E72D297353CC}">
-                <c16:uniqueId val="{00000001-FBFD-4348-BE37-35220F456456}"/>
-              </c:ext>
-            </c:extLst>
-          </c:dPt>
-          <c:dPt>
-            <c:idx val="1"/>
-            <c:invertIfNegative val="0"/>
-            <c:bubble3D val="0"/>
-            <c:spPr>
-              <a:solidFill>
-                <a:srgbClr val="1C7293"/>
-              </a:solidFill>
-              <a:effectLst/>
-            </c:spPr>
-            <c:extLst>
-              <c:ext xmlns:c16="http://schemas.microsoft.com/office/drawing/2014/chart" uri="{C3380CC4-5D6E-409C-BE32-E72D297353CC}">
-                <c16:uniqueId val="{00000003-FBFD-4348-BE37-35220F456456}"/>
-              </c:ext>
-            </c:extLst>
-          </c:dPt>
-          <c:dPt>
-            <c:idx val="2"/>
-            <c:invertIfNegative val="0"/>
-            <c:bubble3D val="0"/>
-            <c:spPr>
-              <a:solidFill>
-                <a:srgbClr val="02C39A"/>
-              </a:solidFill>
-              <a:effectLst/>
-            </c:spPr>
-            <c:extLst>
-              <c:ext xmlns:c16="http://schemas.microsoft.com/office/drawing/2014/chart" uri="{C3380CC4-5D6E-409C-BE32-E72D297353CC}">
-                <c16:uniqueId val="{00000005-FBFD-4348-BE37-35220F456456}"/>
-              </c:ext>
-            </c:extLst>
-          </c:dPt>
-          <c:dPt>
-            <c:idx val="3"/>
-            <c:invertIfNegative val="0"/>
-            <c:bubble3D val="0"/>
-            <c:spPr>
-              <a:solidFill>
-                <a:srgbClr val="8B3A3A"/>
-              </a:solidFill>
-              <a:effectLst/>
-            </c:spPr>
-            <c:extLst>
-              <c:ext xmlns:c16="http://schemas.microsoft.com/office/drawing/2014/chart" uri="{C3380CC4-5D6E-409C-BE32-E72D297353CC}">
-                <c16:uniqueId val="{00000007-FBFD-4348-BE37-35220F456456}"/>
-              </c:ext>
-            </c:extLst>
-          </c:dPt>
-          <c:dPt>
-            <c:idx val="4"/>
-            <c:invertIfNegative val="0"/>
-            <c:bubble3D val="0"/>
-            <c:spPr>
-              <a:solidFill>
-                <a:srgbClr val="1C7293"/>
-              </a:solidFill>
-              <a:effectLst/>
-            </c:spPr>
-            <c:extLst>
-              <c:ext xmlns:c16="http://schemas.microsoft.com/office/drawing/2014/chart" uri="{C3380CC4-5D6E-409C-BE32-E72D297353CC}">
-                <c16:uniqueId val="{00000009-FBFD-4348-BE37-35220F456456}"/>
-              </c:ext>
-            </c:extLst>
-          </c:dPt>
-          <c:dPt>
-            <c:idx val="5"/>
-            <c:invertIfNegative val="0"/>
-            <c:bubble3D val="0"/>
-            <c:extLst>
-              <c:ext xmlns:c16="http://schemas.microsoft.com/office/drawing/2014/chart" uri="{C3380CC4-5D6E-409C-BE32-E72D297353CC}">
-                <c16:uniqueId val="{0000000B-FBFD-4348-BE37-35220F456456}"/>
-              </c:ext>
-            </c:extLst>
-          </c:dPt>
-          <c:dLbls>
-            <c:numFmt formatCode="#,##0" sourceLinked="0"/>
-            <c:spPr>
-              <a:noFill/>
-              <a:ln>
-                <a:noFill/>
-              </a:ln>
-              <a:effectLst/>
-            </c:spPr>
-            <c:txPr>
-              <a:bodyPr/>
-              <a:lstStyle/>
-              <a:p>
-                <a:pPr>
-                  <a:defRPr sz="1200" b="0" i="0" u="none" strike="noStrike">
-                    <a:solidFill>
-                      <a:srgbClr val="1E293B"/>
-                    </a:solidFill>
-                    <a:latin typeface="Arial"/>
-                  </a:defRPr>
-                </a:pPr>
-                <a:endParaRPr lang="fr-FR"/>
-              </a:p>
-            </c:txPr>
-            <c:showLegendKey val="0"/>
-            <c:showVal val="1"/>
-            <c:showCatName val="0"/>
-            <c:showSerName val="0"/>
-            <c:showPercent val="0"/>
-            <c:showBubbleSize val="0"/>
-            <c:showLeaderLines val="0"/>
-            <c:extLst>
-              <c:ext xmlns:c15="http://schemas.microsoft.com/office/drawing/2012/chart" uri="{CE6537A1-D6FC-4f65-9D91-7224C49458BB}">
-                <c15:showLeaderLines val="0"/>
-              </c:ext>
-            </c:extLst>
-          </c:dLbls>
-          <c:cat>
-            <c:strRef>
-              <c:f>Sheet1!$A$2:$A$7</c:f>
-              <c:strCache>
-                <c:ptCount val="6"/>
-                <c:pt idx="0">
-                  <c:v>Elderly
-(no car)</c:v>
-                </c:pt>
-                <c:pt idx="1">
-                  <c:v>Less
-Mobile</c:v>
-                </c:pt>
-                <c:pt idx="2">
-                  <c:v>Young Low
-Income</c:v>
-                </c:pt>
-                <c:pt idx="3">
-                  <c:v>Heavy Car
-User</c:v>
-                </c:pt>
-                <c:pt idx="4">
-                  <c:v>Urban
-Prof.</c:v>
-                </c:pt>
-                <c:pt idx="5">
-                  <c:v>Young
-Family</c:v>
-                </c:pt>
-              </c:strCache>
-            </c:strRef>
-          </c:cat>
-          <c:val>
-            <c:numRef>
-              <c:f>Sheet1!$B$2:$B$7</c:f>
-              <c:numCache>
-                <c:formatCode>General</c:formatCode>
-                <c:ptCount val="6"/>
-                <c:pt idx="0">
-                  <c:v>597</c:v>
-                </c:pt>
-                <c:pt idx="1">
-                  <c:v>1189</c:v>
-                </c:pt>
-                <c:pt idx="2">
-                  <c:v>66</c:v>
-                </c:pt>
-                <c:pt idx="3">
-                  <c:v>540</c:v>
-                </c:pt>
-                <c:pt idx="4">
-                  <c:v>66</c:v>
-                </c:pt>
-                <c:pt idx="5">
-                  <c:v>540</c:v>
-                </c:pt>
-              </c:numCache>
-            </c:numRef>
-          </c:val>
-          <c:extLst>
-            <c:ext xmlns:c16="http://schemas.microsoft.com/office/drawing/2014/chart" uri="{C3380CC4-5D6E-409C-BE32-E72D297353CC}">
-              <c16:uniqueId val="{0000000C-FBFD-4348-BE37-35220F456456}"/>
-            </c:ext>
-          </c:extLst>
-        </c:ser>
-        <c:dLbls>
-          <c:showLegendKey val="0"/>
-          <c:showVal val="1"/>
-          <c:showCatName val="0"/>
-          <c:showSerName val="0"/>
-          <c:showPercent val="0"/>
-          <c:showBubbleSize val="0"/>
-        </c:dLbls>
-        <c:gapWidth val="150"/>
-        <c:axId val="2094734554"/>
-        <c:axId val="2094734552"/>
-      </c:barChart>
-      <c:catAx>
-        <c:axId val="2094734554"/>
-        <c:scaling>
-          <c:orientation val="minMax"/>
-        </c:scaling>
-        <c:delete val="0"/>
-        <c:axPos val="b"/>
-        <c:numFmt formatCode="General" sourceLinked="1"/>
-        <c:majorTickMark val="out"/>
-        <c:minorTickMark val="none"/>
-        <c:tickLblPos val="low"/>
-        <c:spPr>
-          <a:ln w="12700" cap="flat">
-            <a:solidFill>
-              <a:srgbClr val="888888"/>
-            </a:solidFill>
-            <a:prstDash val="solid"/>
-            <a:round/>
-          </a:ln>
-        </c:spPr>
-        <c:txPr>
-          <a:bodyPr/>
-          <a:lstStyle/>
-          <a:p>
-            <a:pPr>
-              <a:defRPr sz="1200" b="0" i="0" u="none" strike="noStrike">
-                <a:solidFill>
-                  <a:srgbClr val="64748B"/>
-                </a:solidFill>
-                <a:latin typeface="Arial"/>
-              </a:defRPr>
-            </a:pPr>
-            <a:endParaRPr lang="en-US"/>
-          </a:p>
-        </c:txPr>
-        <c:crossAx val="2094734552"/>
-        <c:crosses val="autoZero"/>
-        <c:auto val="1"/>
-        <c:lblAlgn val="ctr"/>
-        <c:lblOffset val="100"/>
-        <c:noMultiLvlLbl val="1"/>
-      </c:catAx>
-      <c:valAx>
-        <c:axId val="2094734552"/>
-        <c:scaling>
-          <c:orientation val="minMax"/>
-        </c:scaling>
-        <c:delete val="0"/>
-        <c:axPos val="l"/>
-        <c:majorGridlines>
-          <c:spPr>
-            <a:ln w="6350" cap="flat">
-              <a:solidFill>
-                <a:srgbClr val="E2E8F0"/>
-              </a:solidFill>
-              <a:prstDash val="solid"/>
-              <a:round/>
-            </a:ln>
-          </c:spPr>
-        </c:majorGridlines>
-        <c:numFmt formatCode="General" sourceLinked="0"/>
-        <c:majorTickMark val="out"/>
-        <c:minorTickMark val="none"/>
-        <c:tickLblPos val="nextTo"/>
-        <c:spPr>
-          <a:ln w="12700" cap="flat">
-            <a:solidFill>
-              <a:srgbClr val="888888"/>
-            </a:solidFill>
-            <a:prstDash val="solid"/>
-            <a:round/>
-          </a:ln>
-        </c:spPr>
-        <c:txPr>
-          <a:bodyPr/>
-          <a:lstStyle/>
-          <a:p>
-            <a:pPr>
-              <a:defRPr sz="1200" b="0" i="0" u="none" strike="noStrike">
-                <a:solidFill>
-                  <a:srgbClr val="64748B"/>
-                </a:solidFill>
-                <a:latin typeface="Arial"/>
-              </a:defRPr>
-            </a:pPr>
-            <a:endParaRPr lang="en-US"/>
-          </a:p>
-        </c:txPr>
-        <c:crossAx val="2094734554"/>
-        <c:crosses val="autoZero"/>
-        <c:crossBetween val="between"/>
-      </c:valAx>
-      <c:spPr>
-        <a:noFill/>
-        <a:ln>
-          <a:noFill/>
-        </a:ln>
-        <a:effectLst/>
-      </c:spPr>
-    </c:plotArea>
-    <c:plotVisOnly val="1"/>
-    <c:dispBlanksAs val="span"/>
-    <c:showDLblsOverMax val="1"/>
-  </c:chart>
-  <c:spPr>
-    <a:solidFill>
-      <a:srgbClr val="FFFFFF"/>
-    </a:solidFill>
-    <a:ln>
-      <a:noFill/>
-    </a:ln>
-    <a:effectLst/>
-  </c:spPr>
-  <c:externalData r:id="rId1">
-    <c:autoUpdate val="0"/>
-  </c:externalData>
-</c:chartSpace>
-</file>
-
 <file path=ppt/notesMasters/notesMaster1.xml><?xml version="1.0" encoding="utf-8"?>
 <p:notesMaster xmlns:a="http://schemas.openxmlformats.org/drawingml/2006/main" xmlns:r="http://schemas.openxmlformats.org/officeDocument/2006/relationships" xmlns:p="http://schemas.openxmlformats.org/presentationml/2006/main">
   <p:cSld>
@@ -911,232 +146,10 @@
           <a:chExt cx="0" cy="0"/>
         </a:xfrm>
       </p:grpSpPr>
-      <p:sp>
-        <p:nvSpPr>
-          <p:cNvPr id="2" name="Espace réservé de l'en-tête 1"/>
-          <p:cNvSpPr>
-            <a:spLocks noGrp="1"/>
-          </p:cNvSpPr>
-          <p:nvPr>
-            <p:ph type="hdr" sz="quarter"/>
-          </p:nvPr>
-        </p:nvSpPr>
-        <p:spPr>
-          <a:xfrm>
-            <a:off x="0" y="0"/>
-            <a:ext cx="2228850" cy="458788"/>
-          </a:xfrm>
-          <a:prstGeom prst="rect">
-            <a:avLst/>
-          </a:prstGeom>
-        </p:spPr>
-        <p:txBody>
-          <a:bodyPr vert="horz" lIns="91440" tIns="45720" rIns="91440" bIns="45720" rtlCol="0"/>
-          <a:lstStyle>
-            <a:lvl1pPr algn="l">
-              <a:defRPr sz="1200"/>
-            </a:lvl1pPr>
-          </a:lstStyle>
-          <a:p>
-            <a:endParaRPr lang="fr-FR"/>
-          </a:p>
-        </p:txBody>
-      </p:sp>
-      <p:sp>
-        <p:nvSpPr>
-          <p:cNvPr id="3" name="Espace réservé de la date 2"/>
-          <p:cNvSpPr>
-            <a:spLocks noGrp="1"/>
-          </p:cNvSpPr>
-          <p:nvPr>
-            <p:ph type="dt" idx="1"/>
-          </p:nvPr>
-        </p:nvSpPr>
-        <p:spPr>
-          <a:xfrm>
-            <a:off x="2913063" y="0"/>
-            <a:ext cx="2228850" cy="458788"/>
-          </a:xfrm>
-          <a:prstGeom prst="rect">
-            <a:avLst/>
-          </a:prstGeom>
-        </p:spPr>
-        <p:txBody>
-          <a:bodyPr vert="horz" lIns="91440" tIns="45720" rIns="91440" bIns="45720" rtlCol="0"/>
-          <a:lstStyle>
-            <a:lvl1pPr algn="r">
-              <a:defRPr sz="1200"/>
-            </a:lvl1pPr>
-          </a:lstStyle>
-          <a:p>
-            <a:fld id="{571FC465-2A48-4342-9E48-8B4080F5929E}" type="datetimeFigureOut">
-              <a:t>18/06/2026</a:t>
-            </a:fld>
-            <a:endParaRPr lang="fr-FR"/>
-          </a:p>
-        </p:txBody>
-      </p:sp>
-      <p:sp>
-        <p:nvSpPr>
-          <p:cNvPr id="4" name="Espace réservé de l'image des diapositives 3"/>
-          <p:cNvSpPr>
-            <a:spLocks noGrp="1" noRot="1" noChangeAspect="1"/>
-          </p:cNvSpPr>
-          <p:nvPr>
-            <p:ph type="sldImg" idx="2"/>
-          </p:nvPr>
-        </p:nvSpPr>
-        <p:spPr>
-          <a:xfrm>
-            <a:off x="-171450" y="1143000"/>
-            <a:ext cx="5486400" cy="3086100"/>
-          </a:xfrm>
-          <a:prstGeom prst="rect">
-            <a:avLst/>
-          </a:prstGeom>
-          <a:noFill/>
-          <a:ln w="12700">
-            <a:solidFill>
-              <a:prstClr val="black"/>
-            </a:solidFill>
-          </a:ln>
-        </p:spPr>
-        <p:txBody>
-          <a:bodyPr vert="horz" lIns="91440" tIns="45720" rIns="91440" bIns="45720" rtlCol="0" anchor="ctr"/>
-          <a:lstStyle/>
-          <a:p>
-            <a:endParaRPr lang="fr-FR"/>
-          </a:p>
-        </p:txBody>
-      </p:sp>
-      <p:sp>
-        <p:nvSpPr>
-          <p:cNvPr id="5" name="Espace réservé des notes 4"/>
-          <p:cNvSpPr>
-            <a:spLocks noGrp="1"/>
-          </p:cNvSpPr>
-          <p:nvPr>
-            <p:ph type="body" sz="quarter" idx="3"/>
-          </p:nvPr>
-        </p:nvSpPr>
-        <p:spPr>
-          <a:xfrm>
-            <a:off x="514350" y="4400550"/>
-            <a:ext cx="4114800" cy="3600450"/>
-          </a:xfrm>
-          <a:prstGeom prst="rect">
-            <a:avLst/>
-          </a:prstGeom>
-        </p:spPr>
-        <p:txBody>
-          <a:bodyPr vert="horz" lIns="91440" tIns="45720" rIns="91440" bIns="45720" rtlCol="0"/>
-          <a:lstStyle/>
-          <a:p>
-            <a:pPr lvl="0"/>
-            <a:r>
-              <a:rPr lang="fr-FR"/>
-              <a:t>Cliquez pour modifier les styles du texte du masque</a:t>
-            </a:r>
-          </a:p>
-          <a:p>
-            <a:pPr lvl="1"/>
-            <a:r>
-              <a:rPr lang="fr-FR"/>
-              <a:t>Deuxième niveau</a:t>
-            </a:r>
-          </a:p>
-          <a:p>
-            <a:pPr lvl="2"/>
-            <a:r>
-              <a:rPr lang="fr-FR"/>
-              <a:t>Troisième niveau</a:t>
-            </a:r>
-          </a:p>
-          <a:p>
-            <a:pPr lvl="3"/>
-            <a:r>
-              <a:rPr lang="fr-FR"/>
-              <a:t>Quatrième niveau</a:t>
-            </a:r>
-          </a:p>
-          <a:p>
-            <a:pPr lvl="4"/>
-            <a:r>
-              <a:rPr lang="fr-FR"/>
-              <a:t>Cinquième niveau</a:t>
-            </a:r>
-          </a:p>
-        </p:txBody>
-      </p:sp>
-      <p:sp>
-        <p:nvSpPr>
-          <p:cNvPr id="6" name="Espace réservé du pied de page 5"/>
-          <p:cNvSpPr>
-            <a:spLocks noGrp="1"/>
-          </p:cNvSpPr>
-          <p:nvPr>
-            <p:ph type="ftr" sz="quarter" idx="4"/>
-          </p:nvPr>
-        </p:nvSpPr>
-        <p:spPr>
-          <a:xfrm>
-            <a:off x="0" y="8685213"/>
-            <a:ext cx="2228850" cy="458787"/>
-          </a:xfrm>
-          <a:prstGeom prst="rect">
-            <a:avLst/>
-          </a:prstGeom>
-        </p:spPr>
-        <p:txBody>
-          <a:bodyPr vert="horz" lIns="91440" tIns="45720" rIns="91440" bIns="45720" rtlCol="0" anchor="b"/>
-          <a:lstStyle>
-            <a:lvl1pPr algn="l">
-              <a:defRPr sz="1200"/>
-            </a:lvl1pPr>
-          </a:lstStyle>
-          <a:p>
-            <a:endParaRPr lang="fr-FR"/>
-          </a:p>
-        </p:txBody>
-      </p:sp>
-      <p:sp>
-        <p:nvSpPr>
-          <p:cNvPr id="7" name="Espace réservé du numéro de diapositive 6"/>
-          <p:cNvSpPr>
-            <a:spLocks noGrp="1"/>
-          </p:cNvSpPr>
-          <p:nvPr>
-            <p:ph type="sldNum" sz="quarter" idx="5"/>
-          </p:nvPr>
-        </p:nvSpPr>
-        <p:spPr>
-          <a:xfrm>
-            <a:off x="2913063" y="8685213"/>
-            <a:ext cx="2228850" cy="458787"/>
-          </a:xfrm>
-          <a:prstGeom prst="rect">
-            <a:avLst/>
-          </a:prstGeom>
-        </p:spPr>
-        <p:txBody>
-          <a:bodyPr vert="horz" lIns="91440" tIns="45720" rIns="91440" bIns="45720" rtlCol="0" anchor="b"/>
-          <a:lstStyle>
-            <a:lvl1pPr algn="r">
-              <a:defRPr sz="1200"/>
-            </a:lvl1pPr>
-          </a:lstStyle>
-          <a:p>
-            <a:fld id="{F1063E17-8F90-493B-B23B-4DA4CFD9D81D}" type="slidenum">
-              <a:t>‹N°›</a:t>
-            </a:fld>
-            <a:endParaRPr lang="fr-FR"/>
-          </a:p>
-        </p:txBody>
-      </p:sp>
     </p:spTree>
     <p:extLst>
       <p:ext uri="{BB962C8B-B14F-4D97-AF65-F5344CB8AC3E}">
-        <p14:creationId xmlns:p14="http://schemas.microsoft.com/office/powerpoint/2010/main" val="1267687619"/>
+        <p14:creationId xmlns:p14="http://schemas.microsoft.com/office/powerpoint/2010/main" val="972199396"/>
       </p:ext>
     </p:extLst>
   </p:cSld>
@@ -1320,6 +333,258 @@
 </p:notes>
 </file>
 
+<file path=ppt/notesSlides/notesSlide10.xml><?xml version="1.0" encoding="utf-8"?>
+<p:notes xmlns:a="http://schemas.openxmlformats.org/drawingml/2006/main" xmlns:r="http://schemas.openxmlformats.org/officeDocument/2006/relationships" xmlns:p="http://schemas.openxmlformats.org/presentationml/2006/main">
+  <p:cSld>
+    <p:spTree>
+      <p:nvGrpSpPr>
+        <p:cNvPr id="1" name=""/>
+        <p:cNvGrpSpPr/>
+        <p:nvPr/>
+      </p:nvGrpSpPr>
+      <p:grpSpPr>
+        <a:xfrm>
+          <a:off x="0" y="0"/>
+          <a:ext cx="0" cy="0"/>
+          <a:chOff x="0" y="0"/>
+          <a:chExt cx="0" cy="0"/>
+        </a:xfrm>
+      </p:grpSpPr>
+      <p:sp>
+        <p:nvSpPr>
+          <p:cNvPr id="2" name="Slide Image Placeholder 1"/>
+          <p:cNvSpPr>
+            <a:spLocks noGrp="1" noRot="1" noChangeAspect="1"/>
+          </p:cNvSpPr>
+          <p:nvPr>
+            <p:ph type="sldImg"/>
+          </p:nvPr>
+        </p:nvSpPr>
+        <p:spPr/>
+      </p:sp>
+      <p:sp>
+        <p:nvSpPr>
+          <p:cNvPr id="3" name="Notes Placeholder 2"/>
+          <p:cNvSpPr>
+            <a:spLocks noGrp="1"/>
+          </p:cNvSpPr>
+          <p:nvPr>
+            <p:ph type="body" idx="1"/>
+          </p:nvPr>
+        </p:nvSpPr>
+        <p:spPr/>
+        <p:txBody>
+          <a:bodyPr/>
+          <a:lstStyle/>
+          <a:p>
+            <a:endParaRPr lang="en-US" dirty="0"/>
+          </a:p>
+        </p:txBody>
+      </p:sp>
+      <p:sp>
+        <p:nvSpPr>
+          <p:cNvPr id="4" name="Slide Number Placeholder 3"/>
+          <p:cNvSpPr>
+            <a:spLocks noGrp="1"/>
+          </p:cNvSpPr>
+          <p:nvPr>
+            <p:ph type="sldNum" sz="quarter" idx="10"/>
+          </p:nvPr>
+        </p:nvSpPr>
+        <p:spPr/>
+        <p:txBody>
+          <a:bodyPr/>
+          <a:lstStyle/>
+          <a:p>
+            <a:fld id="{F7021451-1387-4CA6-816F-3879F97B5CBC}" type="slidenum">
+              <a:rPr lang="en-US"/>
+              <a:t>11</a:t>
+            </a:fld>
+            <a:endParaRPr lang="en-US"/>
+          </a:p>
+        </p:txBody>
+      </p:sp>
+    </p:spTree>
+    <p:extLst>
+      <p:ext uri="{BB962C8B-B14F-4D97-AF65-F5344CB8AC3E}">
+        <p14:creationId xmlns:p14="http://schemas.microsoft.com/office/powerpoint/2010/main" val="1024086991"/>
+      </p:ext>
+    </p:extLst>
+  </p:cSld>
+  <p:clrMapOvr>
+    <a:masterClrMapping/>
+  </p:clrMapOvr>
+</p:notes>
+</file>
+
+<file path=ppt/notesSlides/notesSlide11.xml><?xml version="1.0" encoding="utf-8"?>
+<p:notes xmlns:a="http://schemas.openxmlformats.org/drawingml/2006/main" xmlns:r="http://schemas.openxmlformats.org/officeDocument/2006/relationships" xmlns:p="http://schemas.openxmlformats.org/presentationml/2006/main">
+  <p:cSld>
+    <p:spTree>
+      <p:nvGrpSpPr>
+        <p:cNvPr id="1" name=""/>
+        <p:cNvGrpSpPr/>
+        <p:nvPr/>
+      </p:nvGrpSpPr>
+      <p:grpSpPr>
+        <a:xfrm>
+          <a:off x="0" y="0"/>
+          <a:ext cx="0" cy="0"/>
+          <a:chOff x="0" y="0"/>
+          <a:chExt cx="0" cy="0"/>
+        </a:xfrm>
+      </p:grpSpPr>
+      <p:sp>
+        <p:nvSpPr>
+          <p:cNvPr id="2" name="Slide Image Placeholder 1"/>
+          <p:cNvSpPr>
+            <a:spLocks noGrp="1" noRot="1" noChangeAspect="1"/>
+          </p:cNvSpPr>
+          <p:nvPr>
+            <p:ph type="sldImg"/>
+          </p:nvPr>
+        </p:nvSpPr>
+        <p:spPr/>
+      </p:sp>
+      <p:sp>
+        <p:nvSpPr>
+          <p:cNvPr id="3" name="Notes Placeholder 2"/>
+          <p:cNvSpPr>
+            <a:spLocks noGrp="1"/>
+          </p:cNvSpPr>
+          <p:nvPr>
+            <p:ph type="body" idx="1"/>
+          </p:nvPr>
+        </p:nvSpPr>
+        <p:spPr/>
+        <p:txBody>
+          <a:bodyPr/>
+          <a:lstStyle/>
+          <a:p>
+            <a:endParaRPr lang="en-US" dirty="0"/>
+          </a:p>
+        </p:txBody>
+      </p:sp>
+      <p:sp>
+        <p:nvSpPr>
+          <p:cNvPr id="4" name="Slide Number Placeholder 3"/>
+          <p:cNvSpPr>
+            <a:spLocks noGrp="1"/>
+          </p:cNvSpPr>
+          <p:nvPr>
+            <p:ph type="sldNum" sz="quarter" idx="10"/>
+          </p:nvPr>
+        </p:nvSpPr>
+        <p:spPr/>
+        <p:txBody>
+          <a:bodyPr/>
+          <a:lstStyle/>
+          <a:p>
+            <a:fld id="{F7021451-1387-4CA6-816F-3879F97B5CBC}" type="slidenum">
+              <a:rPr lang="en-US"/>
+              <a:t>12</a:t>
+            </a:fld>
+            <a:endParaRPr lang="en-US"/>
+          </a:p>
+        </p:txBody>
+      </p:sp>
+    </p:spTree>
+    <p:extLst>
+      <p:ext uri="{BB962C8B-B14F-4D97-AF65-F5344CB8AC3E}">
+        <p14:creationId xmlns:p14="http://schemas.microsoft.com/office/powerpoint/2010/main" val="1024086991"/>
+      </p:ext>
+    </p:extLst>
+  </p:cSld>
+  <p:clrMapOvr>
+    <a:masterClrMapping/>
+  </p:clrMapOvr>
+</p:notes>
+</file>
+
+<file path=ppt/notesSlides/notesSlide12.xml><?xml version="1.0" encoding="utf-8"?>
+<p:notes xmlns:a="http://schemas.openxmlformats.org/drawingml/2006/main" xmlns:r="http://schemas.openxmlformats.org/officeDocument/2006/relationships" xmlns:p="http://schemas.openxmlformats.org/presentationml/2006/main">
+  <p:cSld>
+    <p:spTree>
+      <p:nvGrpSpPr>
+        <p:cNvPr id="1" name=""/>
+        <p:cNvGrpSpPr/>
+        <p:nvPr/>
+      </p:nvGrpSpPr>
+      <p:grpSpPr>
+        <a:xfrm>
+          <a:off x="0" y="0"/>
+          <a:ext cx="0" cy="0"/>
+          <a:chOff x="0" y="0"/>
+          <a:chExt cx="0" cy="0"/>
+        </a:xfrm>
+      </p:grpSpPr>
+      <p:sp>
+        <p:nvSpPr>
+          <p:cNvPr id="2" name="Slide Image Placeholder 1"/>
+          <p:cNvSpPr>
+            <a:spLocks noGrp="1" noRot="1" noChangeAspect="1"/>
+          </p:cNvSpPr>
+          <p:nvPr>
+            <p:ph type="sldImg"/>
+          </p:nvPr>
+        </p:nvSpPr>
+        <p:spPr/>
+      </p:sp>
+      <p:sp>
+        <p:nvSpPr>
+          <p:cNvPr id="3" name="Notes Placeholder 2"/>
+          <p:cNvSpPr>
+            <a:spLocks noGrp="1"/>
+          </p:cNvSpPr>
+          <p:nvPr>
+            <p:ph type="body" idx="1"/>
+          </p:nvPr>
+        </p:nvSpPr>
+        <p:spPr/>
+        <p:txBody>
+          <a:bodyPr/>
+          <a:lstStyle/>
+          <a:p>
+            <a:endParaRPr lang="en-US" dirty="0"/>
+          </a:p>
+        </p:txBody>
+      </p:sp>
+      <p:sp>
+        <p:nvSpPr>
+          <p:cNvPr id="4" name="Slide Number Placeholder 3"/>
+          <p:cNvSpPr>
+            <a:spLocks noGrp="1"/>
+          </p:cNvSpPr>
+          <p:nvPr>
+            <p:ph type="sldNum" sz="quarter" idx="10"/>
+          </p:nvPr>
+        </p:nvSpPr>
+        <p:spPr/>
+        <p:txBody>
+          <a:bodyPr/>
+          <a:lstStyle/>
+          <a:p>
+            <a:fld id="{F7021451-1387-4CA6-816F-3879F97B5CBC}" type="slidenum">
+              <a:rPr lang="en-US"/>
+              <a:t>13</a:t>
+            </a:fld>
+            <a:endParaRPr lang="en-US"/>
+          </a:p>
+        </p:txBody>
+      </p:sp>
+    </p:spTree>
+    <p:extLst>
+      <p:ext uri="{BB962C8B-B14F-4D97-AF65-F5344CB8AC3E}">
+        <p14:creationId xmlns:p14="http://schemas.microsoft.com/office/powerpoint/2010/main" val="1024086991"/>
+      </p:ext>
+    </p:extLst>
+  </p:cSld>
+  <p:clrMapOvr>
+    <a:masterClrMapping/>
+  </p:clrMapOvr>
+</p:notes>
+</file>
+
 <file path=ppt/notesSlides/notesSlide2.xml><?xml version="1.0" encoding="utf-8"?>
 <p:notes xmlns:a="http://schemas.openxmlformats.org/drawingml/2006/main" xmlns:r="http://schemas.openxmlformats.org/officeDocument/2006/relationships" xmlns:p="http://schemas.openxmlformats.org/presentationml/2006/main">
   <p:cSld>
@@ -1553,7 +818,7 @@
           <a:p>
             <a:fld id="{F7021451-1387-4CA6-816F-3879F97B5CBC}" type="slidenum">
               <a:rPr lang="en-US"/>
-              <a:t>4</a:t>
+              <a:t>5</a:t>
             </a:fld>
             <a:endParaRPr lang="en-US"/>
           </a:p>
@@ -1637,7 +902,7 @@
           <a:p>
             <a:fld id="{F7021451-1387-4CA6-816F-3879F97B5CBC}" type="slidenum">
               <a:rPr lang="en-US"/>
-              <a:t>5</a:t>
+              <a:t>6</a:t>
             </a:fld>
             <a:endParaRPr lang="en-US"/>
           </a:p>
@@ -1721,7 +986,7 @@
           <a:p>
             <a:fld id="{F7021451-1387-4CA6-816F-3879F97B5CBC}" type="slidenum">
               <a:rPr lang="en-US"/>
-              <a:t>6</a:t>
+              <a:t>7</a:t>
             </a:fld>
             <a:endParaRPr lang="en-US"/>
           </a:p>
@@ -1805,7 +1070,7 @@
           <a:p>
             <a:fld id="{F7021451-1387-4CA6-816F-3879F97B5CBC}" type="slidenum">
               <a:rPr lang="en-US"/>
-              <a:t>7</a:t>
+              <a:t>8</a:t>
             </a:fld>
             <a:endParaRPr lang="en-US"/>
           </a:p>
@@ -1889,7 +1154,91 @@
           <a:p>
             <a:fld id="{F7021451-1387-4CA6-816F-3879F97B5CBC}" type="slidenum">
               <a:rPr lang="en-US"/>
-              <a:t>8</a:t>
+              <a:t>9</a:t>
+            </a:fld>
+            <a:endParaRPr lang="en-US"/>
+          </a:p>
+        </p:txBody>
+      </p:sp>
+    </p:spTree>
+    <p:extLst>
+      <p:ext uri="{BB962C8B-B14F-4D97-AF65-F5344CB8AC3E}">
+        <p14:creationId xmlns:p14="http://schemas.microsoft.com/office/powerpoint/2010/main" val="1024086991"/>
+      </p:ext>
+    </p:extLst>
+  </p:cSld>
+  <p:clrMapOvr>
+    <a:masterClrMapping/>
+  </p:clrMapOvr>
+</p:notes>
+</file>
+
+<file path=ppt/notesSlides/notesSlide9.xml><?xml version="1.0" encoding="utf-8"?>
+<p:notes xmlns:a="http://schemas.openxmlformats.org/drawingml/2006/main" xmlns:r="http://schemas.openxmlformats.org/officeDocument/2006/relationships" xmlns:p="http://schemas.openxmlformats.org/presentationml/2006/main">
+  <p:cSld>
+    <p:spTree>
+      <p:nvGrpSpPr>
+        <p:cNvPr id="1" name=""/>
+        <p:cNvGrpSpPr/>
+        <p:nvPr/>
+      </p:nvGrpSpPr>
+      <p:grpSpPr>
+        <a:xfrm>
+          <a:off x="0" y="0"/>
+          <a:ext cx="0" cy="0"/>
+          <a:chOff x="0" y="0"/>
+          <a:chExt cx="0" cy="0"/>
+        </a:xfrm>
+      </p:grpSpPr>
+      <p:sp>
+        <p:nvSpPr>
+          <p:cNvPr id="2" name="Slide Image Placeholder 1"/>
+          <p:cNvSpPr>
+            <a:spLocks noGrp="1" noRot="1" noChangeAspect="1"/>
+          </p:cNvSpPr>
+          <p:nvPr>
+            <p:ph type="sldImg"/>
+          </p:nvPr>
+        </p:nvSpPr>
+        <p:spPr/>
+      </p:sp>
+      <p:sp>
+        <p:nvSpPr>
+          <p:cNvPr id="3" name="Notes Placeholder 2"/>
+          <p:cNvSpPr>
+            <a:spLocks noGrp="1"/>
+          </p:cNvSpPr>
+          <p:nvPr>
+            <p:ph type="body" idx="1"/>
+          </p:nvPr>
+        </p:nvSpPr>
+        <p:spPr/>
+        <p:txBody>
+          <a:bodyPr/>
+          <a:lstStyle/>
+          <a:p>
+            <a:endParaRPr lang="en-US" dirty="0"/>
+          </a:p>
+        </p:txBody>
+      </p:sp>
+      <p:sp>
+        <p:nvSpPr>
+          <p:cNvPr id="4" name="Slide Number Placeholder 3"/>
+          <p:cNvSpPr>
+            <a:spLocks noGrp="1"/>
+          </p:cNvSpPr>
+          <p:nvPr>
+            <p:ph type="sldNum" sz="quarter" idx="10"/>
+          </p:nvPr>
+        </p:nvSpPr>
+        <p:spPr/>
+        <p:txBody>
+          <a:bodyPr/>
+          <a:lstStyle/>
+          <a:p>
+            <a:fld id="{F7021451-1387-4CA6-816F-3879F97B5CBC}" type="slidenum">
+              <a:rPr lang="en-US"/>
+              <a:t>10</a:t>
             </a:fld>
             <a:endParaRPr lang="en-US"/>
           </a:p>
@@ -2263,7 +1612,7 @@
           <a:ln/>
         </p:spPr>
         <p:txBody>
-          <a:bodyPr wrap="square" rtlCol="0" anchor="ctr"/>
+          <a:bodyPr wrap="square" lIns="0" tIns="0" rIns="0" bIns="0" rtlCol="0" anchor="ctr"/>
           <a:lstStyle/>
           <a:p>
             <a:pPr marL="0" indent="0">
@@ -2302,7 +1651,7 @@
           <a:ln/>
         </p:spPr>
         <p:txBody>
-          <a:bodyPr wrap="square" rtlCol="0" anchor="ctr"/>
+          <a:bodyPr wrap="square" lIns="0" tIns="0" rIns="0" bIns="0" rtlCol="0" anchor="ctr"/>
           <a:lstStyle/>
           <a:p>
             <a:pPr marL="0" indent="0">
@@ -2347,6 +1696,13 @@
             <a:prstDash val="solid"/>
           </a:ln>
         </p:spPr>
+        <p:txBody>
+          <a:bodyPr/>
+          <a:lstStyle/>
+          <a:p>
+            <a:endParaRPr lang="fr-FR"/>
+          </a:p>
+        </p:txBody>
       </p:sp>
       <p:sp>
         <p:nvSpPr>
@@ -2366,7 +1722,7 @@
           <a:ln/>
         </p:spPr>
         <p:txBody>
-          <a:bodyPr wrap="square" rtlCol="0" anchor="ctr"/>
+          <a:bodyPr wrap="square" lIns="0" tIns="0" rIns="0" bIns="0" rtlCol="0" anchor="ctr"/>
           <a:lstStyle/>
           <a:p>
             <a:pPr marL="0" indent="0">
@@ -2405,7 +1761,7 @@
           <a:ln/>
         </p:spPr>
         <p:txBody>
-          <a:bodyPr wrap="square" rtlCol="0" anchor="ctr"/>
+          <a:bodyPr wrap="square" lIns="0" tIns="0" rIns="0" bIns="0" rtlCol="0" anchor="ctr"/>
           <a:lstStyle/>
           <a:p>
             <a:pPr marL="0" indent="0">
@@ -2420,7 +1776,7 @@
                 <a:ea typeface="Calibri" pitchFamily="34" charset="-122"/>
                 <a:cs typeface="Calibri" pitchFamily="34" charset="-120"/>
               </a:rPr>
-              <a:t>Corridor: Giffnock → University of Glasgow  |  June 2026</a:t>
+              <a:t>Corridor: Giffnock → University of Glasgow  |  Updated 21 July 2026</a:t>
             </a:r>
             <a:endParaRPr lang="en-US" sz="1300" dirty="0"/>
           </a:p>
@@ -2450,13 +1806,20 @@
             <a:prstDash val="solid"/>
           </a:ln>
           <a:effectLst>
-            <a:outerShdw blurRad="101600" dist="25400" dir="8100000" algn="bl" rotWithShape="0">
+            <a:outerShdw blurRad="50800" dist="12700" dir="5400000" algn="bl" rotWithShape="0">
               <a:srgbClr val="000000">
                 <a:alpha val="10000"/>
               </a:srgbClr>
             </a:outerShdw>
           </a:effectLst>
         </p:spPr>
+        <p:txBody>
+          <a:bodyPr/>
+          <a:lstStyle/>
+          <a:p>
+            <a:endParaRPr lang="fr-FR"/>
+          </a:p>
+        </p:txBody>
       </p:sp>
       <p:sp>
         <p:nvSpPr>
@@ -2506,7 +1869,7 @@
         <p:spPr>
           <a:xfrm>
             <a:off x="6144768" y="4434840"/>
-            <a:ext cx="27432" cy="0"/>
+            <a:ext cx="137160" cy="0"/>
           </a:xfrm>
           <a:prstGeom prst="line">
             <a:avLst/>
@@ -2519,6 +1882,13 @@
             <a:prstDash val="solid"/>
           </a:ln>
         </p:spPr>
+        <p:txBody>
+          <a:bodyPr/>
+          <a:lstStyle/>
+          <a:p>
+            <a:endParaRPr lang="fr-FR"/>
+          </a:p>
+        </p:txBody>
       </p:sp>
       <p:sp>
         <p:nvSpPr>
@@ -2528,7 +1898,7 @@
         </p:nvSpPr>
         <p:spPr>
           <a:xfrm>
-            <a:off x="6263640" y="4206240"/>
+            <a:off x="6281928" y="4206240"/>
             <a:ext cx="749808" cy="457200"/>
           </a:xfrm>
           <a:prstGeom prst="rect">
@@ -2544,13 +1914,20 @@
             <a:prstDash val="solid"/>
           </a:ln>
           <a:effectLst>
-            <a:outerShdw blurRad="101600" dist="25400" dir="8100000" algn="bl" rotWithShape="0">
+            <a:outerShdw blurRad="50800" dist="12700" dir="5400000" algn="bl" rotWithShape="0">
               <a:srgbClr val="000000">
                 <a:alpha val="10000"/>
               </a:srgbClr>
             </a:outerShdw>
           </a:effectLst>
         </p:spPr>
+        <p:txBody>
+          <a:bodyPr/>
+          <a:lstStyle/>
+          <a:p>
+            <a:endParaRPr lang="fr-FR"/>
+          </a:p>
+        </p:txBody>
       </p:sp>
       <p:sp>
         <p:nvSpPr>
@@ -2560,7 +1937,7 @@
         </p:nvSpPr>
         <p:spPr>
           <a:xfrm>
-            <a:off x="6263640" y="4206240"/>
+            <a:off x="6281928" y="4206240"/>
             <a:ext cx="749808" cy="457200"/>
           </a:xfrm>
           <a:prstGeom prst="rect">
@@ -2599,8 +1976,8 @@
         </p:nvSpPr>
         <p:spPr>
           <a:xfrm>
-            <a:off x="7013448" y="4434840"/>
-            <a:ext cx="27432" cy="0"/>
+            <a:off x="7031736" y="4434840"/>
+            <a:ext cx="137160" cy="0"/>
           </a:xfrm>
           <a:prstGeom prst="line">
             <a:avLst/>
@@ -2613,6 +1990,13 @@
             <a:prstDash val="solid"/>
           </a:ln>
         </p:spPr>
+        <p:txBody>
+          <a:bodyPr/>
+          <a:lstStyle/>
+          <a:p>
+            <a:endParaRPr lang="fr-FR"/>
+          </a:p>
+        </p:txBody>
       </p:sp>
       <p:sp>
         <p:nvSpPr>
@@ -2622,7 +2006,7 @@
         </p:nvSpPr>
         <p:spPr>
           <a:xfrm>
-            <a:off x="7132320" y="4206240"/>
+            <a:off x="7168896" y="4206240"/>
             <a:ext cx="749808" cy="457200"/>
           </a:xfrm>
           <a:prstGeom prst="rect">
@@ -2638,13 +2022,20 @@
             <a:prstDash val="solid"/>
           </a:ln>
           <a:effectLst>
-            <a:outerShdw blurRad="101600" dist="25400" dir="8100000" algn="bl" rotWithShape="0">
+            <a:outerShdw blurRad="50800" dist="12700" dir="5400000" algn="bl" rotWithShape="0">
               <a:srgbClr val="000000">
                 <a:alpha val="10000"/>
               </a:srgbClr>
             </a:outerShdw>
           </a:effectLst>
         </p:spPr>
+        <p:txBody>
+          <a:bodyPr/>
+          <a:lstStyle/>
+          <a:p>
+            <a:endParaRPr lang="fr-FR"/>
+          </a:p>
+        </p:txBody>
       </p:sp>
       <p:sp>
         <p:nvSpPr>
@@ -2654,7 +2045,7 @@
         </p:nvSpPr>
         <p:spPr>
           <a:xfrm>
-            <a:off x="7132320" y="4206240"/>
+            <a:off x="7168896" y="4206240"/>
             <a:ext cx="749808" cy="457200"/>
           </a:xfrm>
           <a:prstGeom prst="rect">
@@ -2693,8 +2084,8 @@
         </p:nvSpPr>
         <p:spPr>
           <a:xfrm>
-            <a:off x="7882128" y="4434840"/>
-            <a:ext cx="27432" cy="0"/>
+            <a:off x="7918704" y="4434840"/>
+            <a:ext cx="137160" cy="0"/>
           </a:xfrm>
           <a:prstGeom prst="line">
             <a:avLst/>
@@ -2707,6 +2098,13 @@
             <a:prstDash val="solid"/>
           </a:ln>
         </p:spPr>
+        <p:txBody>
+          <a:bodyPr/>
+          <a:lstStyle/>
+          <a:p>
+            <a:endParaRPr lang="fr-FR"/>
+          </a:p>
+        </p:txBody>
       </p:sp>
       <p:sp>
         <p:nvSpPr>
@@ -2716,7 +2114,7 @@
         </p:nvSpPr>
         <p:spPr>
           <a:xfrm>
-            <a:off x="8001000" y="4206240"/>
+            <a:off x="8055864" y="4206240"/>
             <a:ext cx="749808" cy="457200"/>
           </a:xfrm>
           <a:prstGeom prst="rect">
@@ -2732,13 +2130,20 @@
             <a:prstDash val="solid"/>
           </a:ln>
           <a:effectLst>
-            <a:outerShdw blurRad="101600" dist="25400" dir="8100000" algn="bl" rotWithShape="0">
+            <a:outerShdw blurRad="50800" dist="12700" dir="5400000" algn="bl" rotWithShape="0">
               <a:srgbClr val="000000">
                 <a:alpha val="10000"/>
               </a:srgbClr>
             </a:outerShdw>
           </a:effectLst>
         </p:spPr>
+        <p:txBody>
+          <a:bodyPr/>
+          <a:lstStyle/>
+          <a:p>
+            <a:endParaRPr lang="fr-FR"/>
+          </a:p>
+        </p:txBody>
       </p:sp>
       <p:sp>
         <p:nvSpPr>
@@ -2748,7 +2153,7 @@
         </p:nvSpPr>
         <p:spPr>
           <a:xfrm>
-            <a:off x="8001000" y="4206240"/>
+            <a:off x="8055864" y="4206240"/>
             <a:ext cx="749808" cy="457200"/>
           </a:xfrm>
           <a:prstGeom prst="rect">
@@ -2776,6 +2181,1650 @@
               <a:t>Dest.</a:t>
             </a:r>
             <a:endParaRPr lang="en-US" sz="1000" dirty="0"/>
+          </a:p>
+        </p:txBody>
+      </p:sp>
+    </p:spTree>
+  </p:cSld>
+  <p:clrMapOvr>
+    <a:masterClrMapping/>
+  </p:clrMapOvr>
+</p:sld>
+</file>
+
+<file path=ppt/slides/slide10.xml><?xml version="1.0" encoding="utf-8"?>
+<p:sld xmlns:a="http://schemas.openxmlformats.org/drawingml/2006/main" xmlns:r="http://schemas.openxmlformats.org/officeDocument/2006/relationships" xmlns:p="http://schemas.openxmlformats.org/presentationml/2006/main">
+  <p:cSld name="Slide 9">
+    <p:bg>
+      <p:bgPr>
+        <a:solidFill>
+          <a:srgbClr val="FFFFFF"/>
+        </a:solidFill>
+        <a:effectLst/>
+      </p:bgPr>
+    </p:bg>
+    <p:spTree>
+      <p:nvGrpSpPr>
+        <p:cNvPr id="1" name=""/>
+        <p:cNvGrpSpPr/>
+        <p:nvPr/>
+      </p:nvGrpSpPr>
+      <p:grpSpPr>
+        <a:xfrm>
+          <a:off x="0" y="0"/>
+          <a:ext cx="0" cy="0"/>
+          <a:chOff x="0" y="0"/>
+          <a:chExt cx="0" cy="0"/>
+        </a:xfrm>
+      </p:grpSpPr>
+      <p:sp>
+        <p:nvSpPr>
+          <p:cNvPr id="2" name="Text 0"/>
+          <p:cNvSpPr/>
+          <p:nvPr/>
+        </p:nvSpPr>
+        <p:spPr>
+          <a:xfrm>
+            <a:off x="411480" y="292608"/>
+            <a:ext cx="8321040" cy="502920"/>
+          </a:xfrm>
+          <a:prstGeom prst="rect">
+            <a:avLst/>
+          </a:prstGeom>
+          <a:noFill/>
+          <a:ln/>
+        </p:spPr>
+        <p:txBody>
+          <a:bodyPr wrap="square" rtlCol="0" anchor="ctr"/>
+          <a:lstStyle/>
+          <a:p>
+            <a:pPr marL="0" indent="0" algn="l">
+              <a:buNone/>
+            </a:pPr>
+            <a:r>
+              <a:rPr lang="en-US" sz="2400" b="1" dirty="0">
+                <a:solidFill>
+                  <a:srgbClr val="1B2B4B"/>
+                </a:solidFill>
+                <a:latin typeface="Calibri" pitchFamily="34" charset="0"/>
+                <a:ea typeface="Calibri" pitchFamily="34" charset="-122"/>
+                <a:cs typeface="Calibri" pitchFamily="34" charset="-120"/>
+              </a:rPr>
+              <a:t>A Modelling Lesson: The Free-Abandonment Bias</a:t>
+            </a:r>
+            <a:endParaRPr lang="en-US" sz="2400" dirty="0"/>
+          </a:p>
+        </p:txBody>
+      </p:sp>
+      <p:sp>
+        <p:nvSpPr>
+          <p:cNvPr id="3" name="Text 1"/>
+          <p:cNvSpPr/>
+          <p:nvPr/>
+        </p:nvSpPr>
+        <p:spPr>
+          <a:xfrm>
+            <a:off x="411480" y="868680"/>
+            <a:ext cx="8321040" cy="685800"/>
+          </a:xfrm>
+          <a:prstGeom prst="rect">
+            <a:avLst/>
+          </a:prstGeom>
+          <a:noFill/>
+          <a:ln/>
+        </p:spPr>
+        <p:txBody>
+          <a:bodyPr wrap="square" lIns="0" tIns="0" rIns="0" bIns="0" rtlCol="0" anchor="ctr"/>
+          <a:lstStyle/>
+          <a:p>
+            <a:pPr marL="0" indent="0">
+              <a:buNone/>
+            </a:pPr>
+            <a:r>
+              <a:rPr lang="en-US" sz="1150" dirty="0">
+                <a:solidFill>
+                  <a:srgbClr val="1B2B4B"/>
+                </a:solidFill>
+                <a:latin typeface="Calibri" pitchFamily="34" charset="0"/>
+                <a:ea typeface="Calibri" pitchFamily="34" charset="-122"/>
+                <a:cs typeface="Calibri" pitchFamily="34" charset="-120"/>
+              </a:rPr>
+              <a:t>give_up costs ≈ 0 in generalized_cost. As a policy makes paying more costly, “try the free option, abandon if it fails” becomes attractive — pulling the raw expectation down and creating apparent (false) improvements.</a:t>
+            </a:r>
+            <a:endParaRPr lang="en-US" sz="1150" dirty="0"/>
+          </a:p>
+        </p:txBody>
+      </p:sp>
+      <p:pic>
+        <p:nvPicPr>
+          <p:cNvPr id="4" name="Image 0" descr="fig5_high.png"/>
+          <p:cNvPicPr>
+            <a:picLocks noChangeAspect="1"/>
+          </p:cNvPicPr>
+          <p:nvPr/>
+        </p:nvPicPr>
+        <p:blipFill>
+          <a:blip r:embed="rId3"/>
+          <a:stretch>
+            <a:fillRect/>
+          </a:stretch>
+        </p:blipFill>
+        <p:spPr>
+          <a:xfrm>
+            <a:off x="320040" y="1645920"/>
+            <a:ext cx="4160520" cy="2416759"/>
+          </a:xfrm>
+          <a:prstGeom prst="rect">
+            <a:avLst/>
+          </a:prstGeom>
+        </p:spPr>
+      </p:pic>
+      <p:pic>
+        <p:nvPicPr>
+          <p:cNvPr id="5" name="Image 1" descr="fig5b_high.png"/>
+          <p:cNvPicPr>
+            <a:picLocks noChangeAspect="1"/>
+          </p:cNvPicPr>
+          <p:nvPr/>
+        </p:nvPicPr>
+        <p:blipFill>
+          <a:blip r:embed="rId4"/>
+          <a:stretch>
+            <a:fillRect/>
+          </a:stretch>
+        </p:blipFill>
+        <p:spPr>
+          <a:xfrm>
+            <a:off x="4617720" y="1645920"/>
+            <a:ext cx="4160520" cy="2419502"/>
+          </a:xfrm>
+          <a:prstGeom prst="rect">
+            <a:avLst/>
+          </a:prstGeom>
+        </p:spPr>
+      </p:pic>
+      <p:sp>
+        <p:nvSpPr>
+          <p:cNvPr id="6" name="Text 2"/>
+          <p:cNvSpPr/>
+          <p:nvPr/>
+        </p:nvSpPr>
+        <p:spPr>
+          <a:xfrm>
+            <a:off x="411480" y="4160520"/>
+            <a:ext cx="8321040" cy="320040"/>
+          </a:xfrm>
+          <a:prstGeom prst="rect">
+            <a:avLst/>
+          </a:prstGeom>
+          <a:noFill/>
+          <a:ln/>
+        </p:spPr>
+        <p:txBody>
+          <a:bodyPr wrap="square" lIns="0" tIns="0" rIns="0" bIns="0" rtlCol="0" anchor="ctr"/>
+          <a:lstStyle/>
+          <a:p>
+            <a:pPr marL="0" indent="0">
+              <a:buNone/>
+            </a:pPr>
+            <a:r>
+              <a:rPr lang="en-US" sz="1100" i="1" dirty="0">
+                <a:solidFill>
+                  <a:srgbClr val="7098B8"/>
+                </a:solidFill>
+                <a:latin typeface="Calibri" pitchFamily="34" charset="0"/>
+                <a:ea typeface="Calibri" pitchFamily="34" charset="-122"/>
+                <a:cs typeface="Calibri" pitchFamily="34" charset="-120"/>
+              </a:rPr>
+              <a:t>Fix: condition on success — divide by P(arrival) — to see cost given the journey actually completes (right).</a:t>
+            </a:r>
+            <a:endParaRPr lang="en-US" sz="1100" dirty="0"/>
+          </a:p>
+        </p:txBody>
+      </p:sp>
+    </p:spTree>
+  </p:cSld>
+  <p:clrMapOvr>
+    <a:masterClrMapping/>
+  </p:clrMapOvr>
+</p:sld>
+</file>
+
+<file path=ppt/slides/slide11.xml><?xml version="1.0" encoding="utf-8"?>
+<p:sld xmlns:a="http://schemas.openxmlformats.org/drawingml/2006/main" xmlns:r="http://schemas.openxmlformats.org/officeDocument/2006/relationships" xmlns:p="http://schemas.openxmlformats.org/presentationml/2006/main">
+  <p:cSld name="Slide 10">
+    <p:bg>
+      <p:bgPr>
+        <a:solidFill>
+          <a:srgbClr val="FFFFFF"/>
+        </a:solidFill>
+        <a:effectLst/>
+      </p:bgPr>
+    </p:bg>
+    <p:spTree>
+      <p:nvGrpSpPr>
+        <p:cNvPr id="1" name=""/>
+        <p:cNvGrpSpPr/>
+        <p:nvPr/>
+      </p:nvGrpSpPr>
+      <p:grpSpPr>
+        <a:xfrm>
+          <a:off x="0" y="0"/>
+          <a:ext cx="0" cy="0"/>
+          <a:chOff x="0" y="0"/>
+          <a:chExt cx="0" cy="0"/>
+        </a:xfrm>
+      </p:grpSpPr>
+      <p:sp>
+        <p:nvSpPr>
+          <p:cNvPr id="2" name="Text 0"/>
+          <p:cNvSpPr/>
+          <p:nvPr/>
+        </p:nvSpPr>
+        <p:spPr>
+          <a:xfrm>
+            <a:off x="411480" y="292608"/>
+            <a:ext cx="8321040" cy="502920"/>
+          </a:xfrm>
+          <a:prstGeom prst="rect">
+            <a:avLst/>
+          </a:prstGeom>
+          <a:noFill/>
+          <a:ln/>
+        </p:spPr>
+        <p:txBody>
+          <a:bodyPr wrap="square" rtlCol="0" anchor="ctr"/>
+          <a:lstStyle/>
+          <a:p>
+            <a:pPr marL="0" indent="0" algn="l">
+              <a:buNone/>
+            </a:pPr>
+            <a:r>
+              <a:rPr lang="en-US" sz="2400" b="1" dirty="0">
+                <a:solidFill>
+                  <a:srgbClr val="1B2B4B"/>
+                </a:solidFill>
+                <a:latin typeface="Calibri" pitchFamily="34" charset="0"/>
+                <a:ea typeface="Calibri" pitchFamily="34" charset="-122"/>
+                <a:cs typeface="Calibri" pitchFamily="34" charset="-120"/>
+              </a:rPr>
+              <a:t>Interactive Tooling: Parameter Sweeps On Demand</a:t>
+            </a:r>
+            <a:endParaRPr lang="en-US" sz="2400" dirty="0"/>
+          </a:p>
+        </p:txBody>
+      </p:sp>
+      <p:sp>
+        <p:nvSpPr>
+          <p:cNvPr id="3" name="Text 1"/>
+          <p:cNvSpPr/>
+          <p:nvPr/>
+        </p:nvSpPr>
+        <p:spPr>
+          <a:xfrm>
+            <a:off x="411480" y="914400"/>
+            <a:ext cx="8321040" cy="1371600"/>
+          </a:xfrm>
+          <a:prstGeom prst="rect">
+            <a:avLst/>
+          </a:prstGeom>
+          <a:noFill/>
+          <a:ln/>
+        </p:spPr>
+        <p:txBody>
+          <a:bodyPr wrap="square" lIns="0" tIns="0" rIns="0" bIns="0" rtlCol="0" anchor="t"/>
+          <a:lstStyle/>
+          <a:p>
+            <a:pPr marL="177800" indent="-177800">
+              <a:spcAft>
+                <a:spcPts val="800"/>
+              </a:spcAft>
+              <a:buSzPct val="100000"/>
+              <a:buChar char="•"/>
+            </a:pPr>
+            <a:r>
+              <a:rPr lang="en-US" sz="1250" dirty="0">
+                <a:solidFill>
+                  <a:srgbClr val="1B2B4B"/>
+                </a:solidFill>
+                <a:latin typeface="Calibri" pitchFamily="34" charset="0"/>
+                <a:ea typeface="Calibri" pitchFamily="34" charset="-122"/>
+                <a:cs typeface="Calibri" pitchFamily="34" charset="-120"/>
+              </a:rPr>
+              <a:t>A web app drives PRISM directly from editable persona / scenario / fare JSON — no hand-written PRISM invocations.</a:t>
+            </a:r>
+            <a:endParaRPr lang="en-US" sz="1250" dirty="0"/>
+          </a:p>
+          <a:p>
+            <a:pPr marL="177800" indent="-177800">
+              <a:spcAft>
+                <a:spcPts val="800"/>
+              </a:spcAft>
+              <a:buSzPct val="100000"/>
+              <a:buChar char="•"/>
+            </a:pPr>
+            <a:r>
+              <a:rPr lang="en-US" sz="1250" dirty="0">
+                <a:solidFill>
+                  <a:srgbClr val="1B2B4B"/>
+                </a:solidFill>
+                <a:latin typeface="Calibri" pitchFamily="34" charset="0"/>
+                <a:ea typeface="Calibri" pitchFamily="34" charset="-122"/>
+                <a:cs typeface="Calibri" pitchFamily="34" charset="-120"/>
+              </a:rPr>
+              <a:t>Sweep button on key constants (fares, surcharges, disruption probabilities): runs PRISM's native ranged constants in one pass, not one call per value.</a:t>
+            </a:r>
+            <a:endParaRPr lang="en-US" sz="1250" dirty="0"/>
+          </a:p>
+          <a:p>
+            <a:pPr marL="177800" indent="-177800">
+              <a:spcAft>
+                <a:spcPts val="800"/>
+              </a:spcAft>
+              <a:buSzPct val="100000"/>
+              <a:buChar char="•"/>
+            </a:pPr>
+            <a:r>
+              <a:rPr lang="en-US" sz="1250" dirty="0">
+                <a:solidFill>
+                  <a:srgbClr val="1B2B4B"/>
+                </a:solidFill>
+                <a:latin typeface="Calibri" pitchFamily="34" charset="0"/>
+                <a:ea typeface="Calibri" pitchFamily="34" charset="-122"/>
+                <a:cs typeface="Calibri" pitchFamily="34" charset="-120"/>
+              </a:rPr>
+              <a:t>Results stream live; charts export straight to SVG/PNG for reports and slides like this one.</a:t>
+            </a:r>
+            <a:endParaRPr lang="en-US" sz="1250" dirty="0"/>
+          </a:p>
+        </p:txBody>
+      </p:sp>
+      <p:pic>
+        <p:nvPicPr>
+          <p:cNvPr id="4" name="Image 0" descr="sweep_road.png"/>
+          <p:cNvPicPr>
+            <a:picLocks noChangeAspect="1"/>
+          </p:cNvPicPr>
+          <p:nvPr/>
+        </p:nvPicPr>
+        <p:blipFill>
+          <a:blip r:embed="rId3"/>
+          <a:stretch>
+            <a:fillRect/>
+          </a:stretch>
+        </p:blipFill>
+        <p:spPr>
+          <a:xfrm>
+            <a:off x="1773936" y="2377440"/>
+            <a:ext cx="5605272" cy="2628900"/>
+          </a:xfrm>
+          <a:prstGeom prst="rect">
+            <a:avLst/>
+          </a:prstGeom>
+        </p:spPr>
+      </p:pic>
+    </p:spTree>
+  </p:cSld>
+  <p:clrMapOvr>
+    <a:masterClrMapping/>
+  </p:clrMapOvr>
+</p:sld>
+</file>
+
+<file path=ppt/slides/slide12.xml><?xml version="1.0" encoding="utf-8"?>
+<p:sld xmlns:a="http://schemas.openxmlformats.org/drawingml/2006/main" xmlns:r="http://schemas.openxmlformats.org/officeDocument/2006/relationships" xmlns:p="http://schemas.openxmlformats.org/presentationml/2006/main">
+  <p:cSld name="Slide 11">
+    <p:bg>
+      <p:bgPr>
+        <a:solidFill>
+          <a:srgbClr val="FFFFFF"/>
+        </a:solidFill>
+        <a:effectLst/>
+      </p:bgPr>
+    </p:bg>
+    <p:spTree>
+      <p:nvGrpSpPr>
+        <p:cNvPr id="1" name=""/>
+        <p:cNvGrpSpPr/>
+        <p:nvPr/>
+      </p:nvGrpSpPr>
+      <p:grpSpPr>
+        <a:xfrm>
+          <a:off x="0" y="0"/>
+          <a:ext cx="0" cy="0"/>
+          <a:chOff x="0" y="0"/>
+          <a:chExt cx="0" cy="0"/>
+        </a:xfrm>
+      </p:grpSpPr>
+      <p:sp>
+        <p:nvSpPr>
+          <p:cNvPr id="2" name="Text 0"/>
+          <p:cNvSpPr/>
+          <p:nvPr/>
+        </p:nvSpPr>
+        <p:spPr>
+          <a:xfrm>
+            <a:off x="411480" y="292608"/>
+            <a:ext cx="8321040" cy="502920"/>
+          </a:xfrm>
+          <a:prstGeom prst="rect">
+            <a:avLst/>
+          </a:prstGeom>
+          <a:noFill/>
+          <a:ln/>
+        </p:spPr>
+        <p:txBody>
+          <a:bodyPr wrap="square" rtlCol="0" anchor="ctr"/>
+          <a:lstStyle/>
+          <a:p>
+            <a:pPr marL="0" indent="0" algn="l">
+              <a:buNone/>
+            </a:pPr>
+            <a:r>
+              <a:rPr lang="en-US" sz="2400" b="1" dirty="0">
+                <a:solidFill>
+                  <a:srgbClr val="1B2B4B"/>
+                </a:solidFill>
+                <a:latin typeface="Calibri" pitchFamily="34" charset="0"/>
+                <a:ea typeface="Calibri" pitchFamily="34" charset="-122"/>
+                <a:cs typeface="Calibri" pitchFamily="34" charset="-120"/>
+              </a:rPr>
+              <a:t>Validating Inputs Against the Official DfT Personas Pack</a:t>
+            </a:r>
+            <a:endParaRPr lang="en-US" sz="2400" dirty="0"/>
+          </a:p>
+        </p:txBody>
+      </p:sp>
+      <p:sp>
+        <p:nvSpPr>
+          <p:cNvPr id="3" name="Text 1"/>
+          <p:cNvSpPr/>
+          <p:nvPr/>
+        </p:nvSpPr>
+        <p:spPr>
+          <a:xfrm>
+            <a:off x="411480" y="868680"/>
+            <a:ext cx="8321040" cy="320040"/>
+          </a:xfrm>
+          <a:prstGeom prst="rect">
+            <a:avLst/>
+          </a:prstGeom>
+          <a:noFill/>
+          <a:ln/>
+        </p:spPr>
+        <p:txBody>
+          <a:bodyPr wrap="square" lIns="0" tIns="0" rIns="0" bIns="0" rtlCol="0" anchor="ctr"/>
+          <a:lstStyle/>
+          <a:p>
+            <a:pPr marL="0" indent="0">
+              <a:buNone/>
+            </a:pPr>
+            <a:r>
+              <a:rPr lang="en-US" sz="1250" dirty="0">
+                <a:solidFill>
+                  <a:srgbClr val="1B2B4B"/>
+                </a:solidFill>
+                <a:latin typeface="Calibri" pitchFamily="34" charset="0"/>
+                <a:ea typeface="Calibri" pitchFamily="34" charset="-122"/>
+                <a:cs typeface="Calibri" pitchFamily="34" charset="-120"/>
+              </a:rPr>
+              <a:t>All 9 personas checked against DfT's “Meet the Personas” pack. 4 values corrected:</a:t>
+            </a:r>
+            <a:endParaRPr lang="en-US" sz="1250" dirty="0"/>
+          </a:p>
+        </p:txBody>
+      </p:sp>
+      <p:sp>
+        <p:nvSpPr>
+          <p:cNvPr id="4" name="Shape 2"/>
+          <p:cNvSpPr/>
+          <p:nvPr/>
+        </p:nvSpPr>
+        <p:spPr>
+          <a:xfrm>
+            <a:off x="411480" y="1325880"/>
+            <a:ext cx="8321040" cy="566928"/>
+          </a:xfrm>
+          <a:prstGeom prst="roundRect">
+            <a:avLst>
+              <a:gd name="adj" fmla="val 12903"/>
+            </a:avLst>
+          </a:prstGeom>
+          <a:solidFill>
+            <a:srgbClr val="F4F7FA"/>
+          </a:solidFill>
+          <a:ln w="12700">
+            <a:solidFill>
+              <a:srgbClr val="F4F7FA"/>
+            </a:solidFill>
+            <a:prstDash val="solid"/>
+          </a:ln>
+          <a:effectLst>
+            <a:outerShdw blurRad="76200" dist="25400" dir="5400000" algn="bl" rotWithShape="0">
+              <a:srgbClr val="000000">
+                <a:alpha val="12000"/>
+              </a:srgbClr>
+            </a:outerShdw>
+          </a:effectLst>
+        </p:spPr>
+        <p:txBody>
+          <a:bodyPr/>
+          <a:lstStyle/>
+          <a:p>
+            <a:endParaRPr lang="fr-FR"/>
+          </a:p>
+        </p:txBody>
+      </p:sp>
+      <p:sp>
+        <p:nvSpPr>
+          <p:cNvPr id="5" name="Text 3"/>
+          <p:cNvSpPr/>
+          <p:nvPr/>
+        </p:nvSpPr>
+        <p:spPr>
+          <a:xfrm>
+            <a:off x="594360" y="1325880"/>
+            <a:ext cx="2377440" cy="566928"/>
+          </a:xfrm>
+          <a:prstGeom prst="rect">
+            <a:avLst/>
+          </a:prstGeom>
+          <a:noFill/>
+          <a:ln/>
+        </p:spPr>
+        <p:txBody>
+          <a:bodyPr wrap="square" lIns="0" tIns="0" rIns="0" bIns="0" rtlCol="0" anchor="ctr"/>
+          <a:lstStyle/>
+          <a:p>
+            <a:pPr marL="0" indent="0">
+              <a:buNone/>
+            </a:pPr>
+            <a:r>
+              <a:rPr lang="en-US" sz="1250" b="1" dirty="0">
+                <a:solidFill>
+                  <a:srgbClr val="065A82"/>
+                </a:solidFill>
+                <a:latin typeface="Calibri" pitchFamily="34" charset="0"/>
+                <a:ea typeface="Calibri" pitchFamily="34" charset="-122"/>
+                <a:cs typeface="Calibri" pitchFamily="34" charset="-120"/>
+              </a:rPr>
+              <a:t>less_mobile</a:t>
+            </a:r>
+            <a:endParaRPr lang="en-US" sz="1250" dirty="0"/>
+          </a:p>
+        </p:txBody>
+      </p:sp>
+      <p:sp>
+        <p:nvSpPr>
+          <p:cNvPr id="6" name="Text 4"/>
+          <p:cNvSpPr/>
+          <p:nvPr/>
+        </p:nvSpPr>
+        <p:spPr>
+          <a:xfrm>
+            <a:off x="3017520" y="1325880"/>
+            <a:ext cx="2103120" cy="566928"/>
+          </a:xfrm>
+          <a:prstGeom prst="rect">
+            <a:avLst/>
+          </a:prstGeom>
+          <a:noFill/>
+          <a:ln/>
+        </p:spPr>
+        <p:txBody>
+          <a:bodyPr wrap="square" lIns="0" tIns="0" rIns="0" bIns="0" rtlCol="0" anchor="ctr"/>
+          <a:lstStyle/>
+          <a:p>
+            <a:pPr marL="0" indent="0">
+              <a:buNone/>
+            </a:pPr>
+            <a:r>
+              <a:rPr lang="en-US" sz="1150" dirty="0">
+                <a:solidFill>
+                  <a:srgbClr val="1B2B4B"/>
+                </a:solidFill>
+                <a:latin typeface="Calibri" pitchFamily="34" charset="0"/>
+                <a:ea typeface="Calibri" pitchFamily="34" charset="-122"/>
+                <a:cs typeface="Calibri" pitchFamily="34" charset="-120"/>
+              </a:rPr>
+              <a:t>HAS_BUS_PASS</a:t>
+            </a:r>
+            <a:endParaRPr lang="en-US" sz="1150" dirty="0"/>
+          </a:p>
+        </p:txBody>
+      </p:sp>
+      <p:sp>
+        <p:nvSpPr>
+          <p:cNvPr id="7" name="Text 5"/>
+          <p:cNvSpPr/>
+          <p:nvPr/>
+        </p:nvSpPr>
+        <p:spPr>
+          <a:xfrm>
+            <a:off x="5212080" y="1325880"/>
+            <a:ext cx="1280160" cy="566928"/>
+          </a:xfrm>
+          <a:prstGeom prst="rect">
+            <a:avLst/>
+          </a:prstGeom>
+          <a:noFill/>
+          <a:ln/>
+        </p:spPr>
+        <p:txBody>
+          <a:bodyPr wrap="square" lIns="0" tIns="0" rIns="0" bIns="0" rtlCol="0" anchor="ctr"/>
+          <a:lstStyle/>
+          <a:p>
+            <a:pPr marL="0" indent="0" algn="ctr">
+              <a:buNone/>
+            </a:pPr>
+            <a:r>
+              <a:rPr lang="en-US" sz="1150" dirty="0">
+                <a:solidFill>
+                  <a:srgbClr val="B04A3A"/>
+                </a:solidFill>
+                <a:latin typeface="Calibri" pitchFamily="34" charset="0"/>
+                <a:ea typeface="Calibri" pitchFamily="34" charset="-122"/>
+                <a:cs typeface="Calibri" pitchFamily="34" charset="-120"/>
+              </a:rPr>
+              <a:t>false</a:t>
+            </a:r>
+            <a:endParaRPr lang="en-US" sz="1150" dirty="0"/>
+          </a:p>
+        </p:txBody>
+      </p:sp>
+      <p:sp>
+        <p:nvSpPr>
+          <p:cNvPr id="8" name="Text 6"/>
+          <p:cNvSpPr/>
+          <p:nvPr/>
+        </p:nvSpPr>
+        <p:spPr>
+          <a:xfrm>
+            <a:off x="6492240" y="1325880"/>
+            <a:ext cx="365760" cy="566928"/>
+          </a:xfrm>
+          <a:prstGeom prst="rect">
+            <a:avLst/>
+          </a:prstGeom>
+          <a:noFill/>
+          <a:ln/>
+        </p:spPr>
+        <p:txBody>
+          <a:bodyPr wrap="square" lIns="0" tIns="0" rIns="0" bIns="0" rtlCol="0" anchor="ctr"/>
+          <a:lstStyle/>
+          <a:p>
+            <a:pPr marL="0" indent="0" algn="ctr">
+              <a:buNone/>
+            </a:pPr>
+            <a:r>
+              <a:rPr lang="en-US" sz="1300" b="1" dirty="0">
+                <a:solidFill>
+                  <a:srgbClr val="7098B8"/>
+                </a:solidFill>
+                <a:latin typeface="Calibri" pitchFamily="34" charset="0"/>
+                <a:ea typeface="Calibri" pitchFamily="34" charset="-122"/>
+                <a:cs typeface="Calibri" pitchFamily="34" charset="-120"/>
+              </a:rPr>
+              <a:t>→</a:t>
+            </a:r>
+            <a:endParaRPr lang="en-US" sz="1300" dirty="0"/>
+          </a:p>
+        </p:txBody>
+      </p:sp>
+      <p:sp>
+        <p:nvSpPr>
+          <p:cNvPr id="9" name="Text 7"/>
+          <p:cNvSpPr/>
+          <p:nvPr/>
+        </p:nvSpPr>
+        <p:spPr>
+          <a:xfrm>
+            <a:off x="6858000" y="1325880"/>
+            <a:ext cx="1737360" cy="566928"/>
+          </a:xfrm>
+          <a:prstGeom prst="rect">
+            <a:avLst/>
+          </a:prstGeom>
+          <a:noFill/>
+          <a:ln/>
+        </p:spPr>
+        <p:txBody>
+          <a:bodyPr wrap="square" lIns="0" tIns="0" rIns="0" bIns="0" rtlCol="0" anchor="ctr"/>
+          <a:lstStyle/>
+          <a:p>
+            <a:pPr marL="0" indent="0" algn="ctr">
+              <a:buNone/>
+            </a:pPr>
+            <a:r>
+              <a:rPr lang="en-US" sz="1150" b="1" dirty="0">
+                <a:solidFill>
+                  <a:srgbClr val="1D7A5C"/>
+                </a:solidFill>
+                <a:latin typeface="Calibri" pitchFamily="34" charset="0"/>
+                <a:ea typeface="Calibri" pitchFamily="34" charset="-122"/>
+                <a:cs typeface="Calibri" pitchFamily="34" charset="-120"/>
+              </a:rPr>
+              <a:t>true</a:t>
+            </a:r>
+            <a:endParaRPr lang="en-US" sz="1150" dirty="0"/>
+          </a:p>
+        </p:txBody>
+      </p:sp>
+      <p:sp>
+        <p:nvSpPr>
+          <p:cNvPr id="10" name="Shape 8"/>
+          <p:cNvSpPr/>
+          <p:nvPr/>
+        </p:nvSpPr>
+        <p:spPr>
+          <a:xfrm>
+            <a:off x="411480" y="1984248"/>
+            <a:ext cx="8321040" cy="566928"/>
+          </a:xfrm>
+          <a:prstGeom prst="roundRect">
+            <a:avLst>
+              <a:gd name="adj" fmla="val 12903"/>
+            </a:avLst>
+          </a:prstGeom>
+          <a:solidFill>
+            <a:srgbClr val="F4F7FA"/>
+          </a:solidFill>
+          <a:ln w="12700">
+            <a:solidFill>
+              <a:srgbClr val="F4F7FA"/>
+            </a:solidFill>
+            <a:prstDash val="solid"/>
+          </a:ln>
+          <a:effectLst>
+            <a:outerShdw blurRad="76200" dist="25400" dir="5400000" algn="bl" rotWithShape="0">
+              <a:srgbClr val="000000">
+                <a:alpha val="12000"/>
+              </a:srgbClr>
+            </a:outerShdw>
+          </a:effectLst>
+        </p:spPr>
+        <p:txBody>
+          <a:bodyPr/>
+          <a:lstStyle/>
+          <a:p>
+            <a:endParaRPr lang="fr-FR"/>
+          </a:p>
+        </p:txBody>
+      </p:sp>
+      <p:sp>
+        <p:nvSpPr>
+          <p:cNvPr id="11" name="Text 9"/>
+          <p:cNvSpPr/>
+          <p:nvPr/>
+        </p:nvSpPr>
+        <p:spPr>
+          <a:xfrm>
+            <a:off x="594360" y="1984248"/>
+            <a:ext cx="2377440" cy="566928"/>
+          </a:xfrm>
+          <a:prstGeom prst="rect">
+            <a:avLst/>
+          </a:prstGeom>
+          <a:noFill/>
+          <a:ln/>
+        </p:spPr>
+        <p:txBody>
+          <a:bodyPr wrap="square" lIns="0" tIns="0" rIns="0" bIns="0" rtlCol="0" anchor="ctr"/>
+          <a:lstStyle/>
+          <a:p>
+            <a:pPr marL="0" indent="0">
+              <a:buNone/>
+            </a:pPr>
+            <a:r>
+              <a:rPr lang="en-US" sz="1250" b="1" dirty="0">
+                <a:solidFill>
+                  <a:srgbClr val="065A82"/>
+                </a:solidFill>
+                <a:latin typeface="Calibri" pitchFamily="34" charset="0"/>
+                <a:ea typeface="Calibri" pitchFamily="34" charset="-122"/>
+                <a:cs typeface="Calibri" pitchFamily="34" charset="-120"/>
+              </a:rPr>
+              <a:t>heavy_car_user</a:t>
+            </a:r>
+            <a:endParaRPr lang="en-US" sz="1250" dirty="0"/>
+          </a:p>
+        </p:txBody>
+      </p:sp>
+      <p:sp>
+        <p:nvSpPr>
+          <p:cNvPr id="12" name="Text 10"/>
+          <p:cNvSpPr/>
+          <p:nvPr/>
+        </p:nvSpPr>
+        <p:spPr>
+          <a:xfrm>
+            <a:off x="3017520" y="1984248"/>
+            <a:ext cx="2103120" cy="566928"/>
+          </a:xfrm>
+          <a:prstGeom prst="rect">
+            <a:avLst/>
+          </a:prstGeom>
+          <a:noFill/>
+          <a:ln/>
+        </p:spPr>
+        <p:txBody>
+          <a:bodyPr wrap="square" lIns="0" tIns="0" rIns="0" bIns="0" rtlCol="0" anchor="ctr"/>
+          <a:lstStyle/>
+          <a:p>
+            <a:pPr marL="0" indent="0">
+              <a:buNone/>
+            </a:pPr>
+            <a:r>
+              <a:rPr lang="en-US" sz="1150" dirty="0">
+                <a:solidFill>
+                  <a:srgbClr val="1B2B4B"/>
+                </a:solidFill>
+                <a:latin typeface="Calibri" pitchFamily="34" charset="0"/>
+                <a:ea typeface="Calibri" pitchFamily="34" charset="-122"/>
+                <a:cs typeface="Calibri" pitchFamily="34" charset="-120"/>
+              </a:rPr>
+              <a:t>W_TIME</a:t>
+            </a:r>
+            <a:endParaRPr lang="en-US" sz="1150" dirty="0"/>
+          </a:p>
+        </p:txBody>
+      </p:sp>
+      <p:sp>
+        <p:nvSpPr>
+          <p:cNvPr id="13" name="Text 11"/>
+          <p:cNvSpPr/>
+          <p:nvPr/>
+        </p:nvSpPr>
+        <p:spPr>
+          <a:xfrm>
+            <a:off x="5212080" y="1984248"/>
+            <a:ext cx="1280160" cy="566928"/>
+          </a:xfrm>
+          <a:prstGeom prst="rect">
+            <a:avLst/>
+          </a:prstGeom>
+          <a:noFill/>
+          <a:ln/>
+        </p:spPr>
+        <p:txBody>
+          <a:bodyPr wrap="square" lIns="0" tIns="0" rIns="0" bIns="0" rtlCol="0" anchor="ctr"/>
+          <a:lstStyle/>
+          <a:p>
+            <a:pPr marL="0" indent="0" algn="ctr">
+              <a:buNone/>
+            </a:pPr>
+            <a:r>
+              <a:rPr lang="en-US" sz="1150" dirty="0">
+                <a:solidFill>
+                  <a:srgbClr val="B04A3A"/>
+                </a:solidFill>
+                <a:latin typeface="Calibri" pitchFamily="34" charset="0"/>
+                <a:ea typeface="Calibri" pitchFamily="34" charset="-122"/>
+                <a:cs typeface="Calibri" pitchFamily="34" charset="-120"/>
+              </a:rPr>
+              <a:t>20</a:t>
+            </a:r>
+            <a:endParaRPr lang="en-US" sz="1150" dirty="0"/>
+          </a:p>
+        </p:txBody>
+      </p:sp>
+      <p:sp>
+        <p:nvSpPr>
+          <p:cNvPr id="14" name="Text 12"/>
+          <p:cNvSpPr/>
+          <p:nvPr/>
+        </p:nvSpPr>
+        <p:spPr>
+          <a:xfrm>
+            <a:off x="6492240" y="1984248"/>
+            <a:ext cx="365760" cy="566928"/>
+          </a:xfrm>
+          <a:prstGeom prst="rect">
+            <a:avLst/>
+          </a:prstGeom>
+          <a:noFill/>
+          <a:ln/>
+        </p:spPr>
+        <p:txBody>
+          <a:bodyPr wrap="square" lIns="0" tIns="0" rIns="0" bIns="0" rtlCol="0" anchor="ctr"/>
+          <a:lstStyle/>
+          <a:p>
+            <a:pPr marL="0" indent="0" algn="ctr">
+              <a:buNone/>
+            </a:pPr>
+            <a:r>
+              <a:rPr lang="en-US" sz="1300" b="1" dirty="0">
+                <a:solidFill>
+                  <a:srgbClr val="7098B8"/>
+                </a:solidFill>
+                <a:latin typeface="Calibri" pitchFamily="34" charset="0"/>
+                <a:ea typeface="Calibri" pitchFamily="34" charset="-122"/>
+                <a:cs typeface="Calibri" pitchFamily="34" charset="-120"/>
+              </a:rPr>
+              <a:t>→</a:t>
+            </a:r>
+            <a:endParaRPr lang="en-US" sz="1300" dirty="0"/>
+          </a:p>
+        </p:txBody>
+      </p:sp>
+      <p:sp>
+        <p:nvSpPr>
+          <p:cNvPr id="15" name="Text 13"/>
+          <p:cNvSpPr/>
+          <p:nvPr/>
+        </p:nvSpPr>
+        <p:spPr>
+          <a:xfrm>
+            <a:off x="6858000" y="1984248"/>
+            <a:ext cx="1737360" cy="566928"/>
+          </a:xfrm>
+          <a:prstGeom prst="rect">
+            <a:avLst/>
+          </a:prstGeom>
+          <a:noFill/>
+          <a:ln/>
+        </p:spPr>
+        <p:txBody>
+          <a:bodyPr wrap="square" lIns="0" tIns="0" rIns="0" bIns="0" rtlCol="0" anchor="ctr"/>
+          <a:lstStyle/>
+          <a:p>
+            <a:pPr marL="0" indent="0" algn="ctr">
+              <a:buNone/>
+            </a:pPr>
+            <a:r>
+              <a:rPr lang="en-US" sz="1150" b="1" dirty="0">
+                <a:solidFill>
+                  <a:srgbClr val="1D7A5C"/>
+                </a:solidFill>
+                <a:latin typeface="Calibri" pitchFamily="34" charset="0"/>
+                <a:ea typeface="Calibri" pitchFamily="34" charset="-122"/>
+                <a:cs typeface="Calibri" pitchFamily="34" charset="-120"/>
+              </a:rPr>
+              <a:t>25</a:t>
+            </a:r>
+            <a:endParaRPr lang="en-US" sz="1150" dirty="0"/>
+          </a:p>
+        </p:txBody>
+      </p:sp>
+      <p:sp>
+        <p:nvSpPr>
+          <p:cNvPr id="16" name="Shape 14"/>
+          <p:cNvSpPr/>
+          <p:nvPr/>
+        </p:nvSpPr>
+        <p:spPr>
+          <a:xfrm>
+            <a:off x="411480" y="2642616"/>
+            <a:ext cx="8321040" cy="566928"/>
+          </a:xfrm>
+          <a:prstGeom prst="roundRect">
+            <a:avLst>
+              <a:gd name="adj" fmla="val 12903"/>
+            </a:avLst>
+          </a:prstGeom>
+          <a:solidFill>
+            <a:srgbClr val="F4F7FA"/>
+          </a:solidFill>
+          <a:ln w="12700">
+            <a:solidFill>
+              <a:srgbClr val="F4F7FA"/>
+            </a:solidFill>
+            <a:prstDash val="solid"/>
+          </a:ln>
+          <a:effectLst>
+            <a:outerShdw blurRad="76200" dist="25400" dir="5400000" algn="bl" rotWithShape="0">
+              <a:srgbClr val="000000">
+                <a:alpha val="12000"/>
+              </a:srgbClr>
+            </a:outerShdw>
+          </a:effectLst>
+        </p:spPr>
+        <p:txBody>
+          <a:bodyPr/>
+          <a:lstStyle/>
+          <a:p>
+            <a:endParaRPr lang="fr-FR"/>
+          </a:p>
+        </p:txBody>
+      </p:sp>
+      <p:sp>
+        <p:nvSpPr>
+          <p:cNvPr id="17" name="Text 15"/>
+          <p:cNvSpPr/>
+          <p:nvPr/>
+        </p:nvSpPr>
+        <p:spPr>
+          <a:xfrm>
+            <a:off x="594360" y="2642616"/>
+            <a:ext cx="2377440" cy="566928"/>
+          </a:xfrm>
+          <a:prstGeom prst="rect">
+            <a:avLst/>
+          </a:prstGeom>
+          <a:noFill/>
+          <a:ln/>
+        </p:spPr>
+        <p:txBody>
+          <a:bodyPr wrap="square" lIns="0" tIns="0" rIns="0" bIns="0" rtlCol="0" anchor="ctr"/>
+          <a:lstStyle/>
+          <a:p>
+            <a:pPr marL="0" indent="0">
+              <a:buNone/>
+            </a:pPr>
+            <a:r>
+              <a:rPr lang="en-US" sz="1250" b="1" dirty="0">
+                <a:solidFill>
+                  <a:srgbClr val="065A82"/>
+                </a:solidFill>
+                <a:latin typeface="Calibri" pitchFamily="34" charset="0"/>
+                <a:ea typeface="Calibri" pitchFamily="34" charset="-122"/>
+                <a:cs typeface="Calibri" pitchFamily="34" charset="-120"/>
+              </a:rPr>
+              <a:t>elderly_no_car</a:t>
+            </a:r>
+            <a:endParaRPr lang="en-US" sz="1250" dirty="0"/>
+          </a:p>
+        </p:txBody>
+      </p:sp>
+      <p:sp>
+        <p:nvSpPr>
+          <p:cNvPr id="18" name="Text 16"/>
+          <p:cNvSpPr/>
+          <p:nvPr/>
+        </p:nvSpPr>
+        <p:spPr>
+          <a:xfrm>
+            <a:off x="3017520" y="2642616"/>
+            <a:ext cx="2103120" cy="566928"/>
+          </a:xfrm>
+          <a:prstGeom prst="rect">
+            <a:avLst/>
+          </a:prstGeom>
+          <a:noFill/>
+          <a:ln/>
+        </p:spPr>
+        <p:txBody>
+          <a:bodyPr wrap="square" lIns="0" tIns="0" rIns="0" bIns="0" rtlCol="0" anchor="ctr"/>
+          <a:lstStyle/>
+          <a:p>
+            <a:pPr marL="0" indent="0">
+              <a:buNone/>
+            </a:pPr>
+            <a:r>
+              <a:rPr lang="en-US" sz="1150" dirty="0">
+                <a:solidFill>
+                  <a:srgbClr val="1B2B4B"/>
+                </a:solidFill>
+                <a:latin typeface="Calibri" pitchFamily="34" charset="0"/>
+                <a:ea typeface="Calibri" pitchFamily="34" charset="-122"/>
+                <a:cs typeface="Calibri" pitchFamily="34" charset="-120"/>
+              </a:rPr>
+              <a:t>W_FARE</a:t>
+            </a:r>
+            <a:endParaRPr lang="en-US" sz="1150" dirty="0"/>
+          </a:p>
+        </p:txBody>
+      </p:sp>
+      <p:sp>
+        <p:nvSpPr>
+          <p:cNvPr id="19" name="Text 17"/>
+          <p:cNvSpPr/>
+          <p:nvPr/>
+        </p:nvSpPr>
+        <p:spPr>
+          <a:xfrm>
+            <a:off x="5212080" y="2642616"/>
+            <a:ext cx="1280160" cy="566928"/>
+          </a:xfrm>
+          <a:prstGeom prst="rect">
+            <a:avLst/>
+          </a:prstGeom>
+          <a:noFill/>
+          <a:ln/>
+        </p:spPr>
+        <p:txBody>
+          <a:bodyPr wrap="square" lIns="0" tIns="0" rIns="0" bIns="0" rtlCol="0" anchor="ctr"/>
+          <a:lstStyle/>
+          <a:p>
+            <a:pPr marL="0" indent="0" algn="ctr">
+              <a:buNone/>
+            </a:pPr>
+            <a:r>
+              <a:rPr lang="en-US" sz="1150" dirty="0">
+                <a:solidFill>
+                  <a:srgbClr val="B04A3A"/>
+                </a:solidFill>
+                <a:latin typeface="Calibri" pitchFamily="34" charset="0"/>
+                <a:ea typeface="Calibri" pitchFamily="34" charset="-122"/>
+                <a:cs typeface="Calibri" pitchFamily="34" charset="-120"/>
+              </a:rPr>
+              <a:t>1.0</a:t>
+            </a:r>
+            <a:endParaRPr lang="en-US" sz="1150" dirty="0"/>
+          </a:p>
+        </p:txBody>
+      </p:sp>
+      <p:sp>
+        <p:nvSpPr>
+          <p:cNvPr id="20" name="Text 18"/>
+          <p:cNvSpPr/>
+          <p:nvPr/>
+        </p:nvSpPr>
+        <p:spPr>
+          <a:xfrm>
+            <a:off x="6492240" y="2642616"/>
+            <a:ext cx="365760" cy="566928"/>
+          </a:xfrm>
+          <a:prstGeom prst="rect">
+            <a:avLst/>
+          </a:prstGeom>
+          <a:noFill/>
+          <a:ln/>
+        </p:spPr>
+        <p:txBody>
+          <a:bodyPr wrap="square" lIns="0" tIns="0" rIns="0" bIns="0" rtlCol="0" anchor="ctr"/>
+          <a:lstStyle/>
+          <a:p>
+            <a:pPr marL="0" indent="0" algn="ctr">
+              <a:buNone/>
+            </a:pPr>
+            <a:r>
+              <a:rPr lang="en-US" sz="1300" b="1" dirty="0">
+                <a:solidFill>
+                  <a:srgbClr val="7098B8"/>
+                </a:solidFill>
+                <a:latin typeface="Calibri" pitchFamily="34" charset="0"/>
+                <a:ea typeface="Calibri" pitchFamily="34" charset="-122"/>
+                <a:cs typeface="Calibri" pitchFamily="34" charset="-120"/>
+              </a:rPr>
+              <a:t>→</a:t>
+            </a:r>
+            <a:endParaRPr lang="en-US" sz="1300" dirty="0"/>
+          </a:p>
+        </p:txBody>
+      </p:sp>
+      <p:sp>
+        <p:nvSpPr>
+          <p:cNvPr id="21" name="Text 19"/>
+          <p:cNvSpPr/>
+          <p:nvPr/>
+        </p:nvSpPr>
+        <p:spPr>
+          <a:xfrm>
+            <a:off x="6858000" y="2642616"/>
+            <a:ext cx="1737360" cy="566928"/>
+          </a:xfrm>
+          <a:prstGeom prst="rect">
+            <a:avLst/>
+          </a:prstGeom>
+          <a:noFill/>
+          <a:ln/>
+        </p:spPr>
+        <p:txBody>
+          <a:bodyPr wrap="square" lIns="0" tIns="0" rIns="0" bIns="0" rtlCol="0" anchor="ctr"/>
+          <a:lstStyle/>
+          <a:p>
+            <a:pPr marL="0" indent="0" algn="ctr">
+              <a:buNone/>
+            </a:pPr>
+            <a:r>
+              <a:rPr lang="en-US" sz="1150" b="1" dirty="0">
+                <a:solidFill>
+                  <a:srgbClr val="1D7A5C"/>
+                </a:solidFill>
+                <a:latin typeface="Calibri" pitchFamily="34" charset="0"/>
+                <a:ea typeface="Calibri" pitchFamily="34" charset="-122"/>
+                <a:cs typeface="Calibri" pitchFamily="34" charset="-120"/>
+              </a:rPr>
+              <a:t>2.5</a:t>
+            </a:r>
+            <a:endParaRPr lang="en-US" sz="1150" dirty="0"/>
+          </a:p>
+        </p:txBody>
+      </p:sp>
+      <p:sp>
+        <p:nvSpPr>
+          <p:cNvPr id="22" name="Shape 20"/>
+          <p:cNvSpPr/>
+          <p:nvPr/>
+        </p:nvSpPr>
+        <p:spPr>
+          <a:xfrm>
+            <a:off x="411480" y="3300984"/>
+            <a:ext cx="8321040" cy="566928"/>
+          </a:xfrm>
+          <a:prstGeom prst="roundRect">
+            <a:avLst>
+              <a:gd name="adj" fmla="val 12903"/>
+            </a:avLst>
+          </a:prstGeom>
+          <a:solidFill>
+            <a:srgbClr val="F4F7FA"/>
+          </a:solidFill>
+          <a:ln w="12700">
+            <a:solidFill>
+              <a:srgbClr val="F4F7FA"/>
+            </a:solidFill>
+            <a:prstDash val="solid"/>
+          </a:ln>
+          <a:effectLst>
+            <a:outerShdw blurRad="76200" dist="25400" dir="5400000" algn="bl" rotWithShape="0">
+              <a:srgbClr val="000000">
+                <a:alpha val="12000"/>
+              </a:srgbClr>
+            </a:outerShdw>
+          </a:effectLst>
+        </p:spPr>
+        <p:txBody>
+          <a:bodyPr/>
+          <a:lstStyle/>
+          <a:p>
+            <a:endParaRPr lang="fr-FR"/>
+          </a:p>
+        </p:txBody>
+      </p:sp>
+      <p:sp>
+        <p:nvSpPr>
+          <p:cNvPr id="23" name="Text 21"/>
+          <p:cNvSpPr/>
+          <p:nvPr/>
+        </p:nvSpPr>
+        <p:spPr>
+          <a:xfrm>
+            <a:off x="594360" y="3300984"/>
+            <a:ext cx="2377440" cy="566928"/>
+          </a:xfrm>
+          <a:prstGeom prst="rect">
+            <a:avLst/>
+          </a:prstGeom>
+          <a:noFill/>
+          <a:ln/>
+        </p:spPr>
+        <p:txBody>
+          <a:bodyPr wrap="square" lIns="0" tIns="0" rIns="0" bIns="0" rtlCol="0" anchor="ctr"/>
+          <a:lstStyle/>
+          <a:p>
+            <a:pPr marL="0" indent="0">
+              <a:buNone/>
+            </a:pPr>
+            <a:r>
+              <a:rPr lang="en-US" sz="1250" b="1" dirty="0">
+                <a:solidFill>
+                  <a:srgbClr val="065A82"/>
+                </a:solidFill>
+                <a:latin typeface="Calibri" pitchFamily="34" charset="0"/>
+                <a:ea typeface="Calibri" pitchFamily="34" charset="-122"/>
+                <a:cs typeface="Calibri" pitchFamily="34" charset="-120"/>
+              </a:rPr>
+              <a:t>urban_professional</a:t>
+            </a:r>
+            <a:endParaRPr lang="en-US" sz="1250" dirty="0"/>
+          </a:p>
+        </p:txBody>
+      </p:sp>
+      <p:sp>
+        <p:nvSpPr>
+          <p:cNvPr id="24" name="Text 22"/>
+          <p:cNvSpPr/>
+          <p:nvPr/>
+        </p:nvSpPr>
+        <p:spPr>
+          <a:xfrm>
+            <a:off x="3017520" y="3300984"/>
+            <a:ext cx="2103120" cy="566928"/>
+          </a:xfrm>
+          <a:prstGeom prst="rect">
+            <a:avLst/>
+          </a:prstGeom>
+          <a:noFill/>
+          <a:ln/>
+        </p:spPr>
+        <p:txBody>
+          <a:bodyPr wrap="square" lIns="0" tIns="0" rIns="0" bIns="0" rtlCol="0" anchor="ctr"/>
+          <a:lstStyle/>
+          <a:p>
+            <a:pPr marL="0" indent="0">
+              <a:buNone/>
+            </a:pPr>
+            <a:r>
+              <a:rPr lang="en-US" sz="1150" dirty="0">
+                <a:solidFill>
+                  <a:srgbClr val="1B2B4B"/>
+                </a:solidFill>
+                <a:latin typeface="Calibri" pitchFamily="34" charset="0"/>
+                <a:ea typeface="Calibri" pitchFamily="34" charset="-122"/>
+                <a:cs typeface="Calibri" pitchFamily="34" charset="-120"/>
+              </a:rPr>
+              <a:t>W_TIME / W_FARE</a:t>
+            </a:r>
+            <a:endParaRPr lang="en-US" sz="1150" dirty="0"/>
+          </a:p>
+        </p:txBody>
+      </p:sp>
+      <p:sp>
+        <p:nvSpPr>
+          <p:cNvPr id="25" name="Text 23"/>
+          <p:cNvSpPr/>
+          <p:nvPr/>
+        </p:nvSpPr>
+        <p:spPr>
+          <a:xfrm>
+            <a:off x="5212080" y="3300984"/>
+            <a:ext cx="1280160" cy="566928"/>
+          </a:xfrm>
+          <a:prstGeom prst="rect">
+            <a:avLst/>
+          </a:prstGeom>
+          <a:noFill/>
+          <a:ln/>
+        </p:spPr>
+        <p:txBody>
+          <a:bodyPr wrap="square" lIns="0" tIns="0" rIns="0" bIns="0" rtlCol="0" anchor="ctr"/>
+          <a:lstStyle/>
+          <a:p>
+            <a:pPr marL="0" indent="0" algn="ctr">
+              <a:buNone/>
+            </a:pPr>
+            <a:r>
+              <a:rPr lang="en-US" sz="1150" dirty="0">
+                <a:solidFill>
+                  <a:srgbClr val="B04A3A"/>
+                </a:solidFill>
+                <a:latin typeface="Calibri" pitchFamily="34" charset="0"/>
+                <a:ea typeface="Calibri" pitchFamily="34" charset="-122"/>
+                <a:cs typeface="Calibri" pitchFamily="34" charset="-120"/>
+              </a:rPr>
+              <a:t>30 / 1.0</a:t>
+            </a:r>
+            <a:endParaRPr lang="en-US" sz="1150" dirty="0"/>
+          </a:p>
+        </p:txBody>
+      </p:sp>
+      <p:sp>
+        <p:nvSpPr>
+          <p:cNvPr id="26" name="Text 24"/>
+          <p:cNvSpPr/>
+          <p:nvPr/>
+        </p:nvSpPr>
+        <p:spPr>
+          <a:xfrm>
+            <a:off x="6492240" y="3300984"/>
+            <a:ext cx="365760" cy="566928"/>
+          </a:xfrm>
+          <a:prstGeom prst="rect">
+            <a:avLst/>
+          </a:prstGeom>
+          <a:noFill/>
+          <a:ln/>
+        </p:spPr>
+        <p:txBody>
+          <a:bodyPr wrap="square" lIns="0" tIns="0" rIns="0" bIns="0" rtlCol="0" anchor="ctr"/>
+          <a:lstStyle/>
+          <a:p>
+            <a:pPr marL="0" indent="0" algn="ctr">
+              <a:buNone/>
+            </a:pPr>
+            <a:r>
+              <a:rPr lang="en-US" sz="1300" b="1" dirty="0">
+                <a:solidFill>
+                  <a:srgbClr val="7098B8"/>
+                </a:solidFill>
+                <a:latin typeface="Calibri" pitchFamily="34" charset="0"/>
+                <a:ea typeface="Calibri" pitchFamily="34" charset="-122"/>
+                <a:cs typeface="Calibri" pitchFamily="34" charset="-120"/>
+              </a:rPr>
+              <a:t>→</a:t>
+            </a:r>
+            <a:endParaRPr lang="en-US" sz="1300" dirty="0"/>
+          </a:p>
+        </p:txBody>
+      </p:sp>
+      <p:sp>
+        <p:nvSpPr>
+          <p:cNvPr id="27" name="Text 25"/>
+          <p:cNvSpPr/>
+          <p:nvPr/>
+        </p:nvSpPr>
+        <p:spPr>
+          <a:xfrm>
+            <a:off x="6858000" y="3300984"/>
+            <a:ext cx="1737360" cy="566928"/>
+          </a:xfrm>
+          <a:prstGeom prst="rect">
+            <a:avLst/>
+          </a:prstGeom>
+          <a:noFill/>
+          <a:ln/>
+        </p:spPr>
+        <p:txBody>
+          <a:bodyPr wrap="square" lIns="0" tIns="0" rIns="0" bIns="0" rtlCol="0" anchor="ctr"/>
+          <a:lstStyle/>
+          <a:p>
+            <a:pPr marL="0" indent="0" algn="ctr">
+              <a:buNone/>
+            </a:pPr>
+            <a:r>
+              <a:rPr lang="en-US" sz="1150" b="1" dirty="0">
+                <a:solidFill>
+                  <a:srgbClr val="1D7A5C"/>
+                </a:solidFill>
+                <a:latin typeface="Calibri" pitchFamily="34" charset="0"/>
+                <a:ea typeface="Calibri" pitchFamily="34" charset="-122"/>
+                <a:cs typeface="Calibri" pitchFamily="34" charset="-120"/>
+              </a:rPr>
+              <a:t>18 / 1.2</a:t>
+            </a:r>
+            <a:endParaRPr lang="en-US" sz="1150" dirty="0"/>
+          </a:p>
+        </p:txBody>
+      </p:sp>
+    </p:spTree>
+  </p:cSld>
+  <p:clrMapOvr>
+    <a:masterClrMapping/>
+  </p:clrMapOvr>
+</p:sld>
+</file>
+
+<file path=ppt/slides/slide13.xml><?xml version="1.0" encoding="utf-8"?>
+<p:sld xmlns:a="http://schemas.openxmlformats.org/drawingml/2006/main" xmlns:r="http://schemas.openxmlformats.org/officeDocument/2006/relationships" xmlns:p="http://schemas.openxmlformats.org/presentationml/2006/main">
+  <p:cSld name="Slide 12">
+    <p:bg>
+      <p:bgPr>
+        <a:solidFill>
+          <a:srgbClr val="21295C"/>
+        </a:solidFill>
+        <a:effectLst/>
+      </p:bgPr>
+    </p:bg>
+    <p:spTree>
+      <p:nvGrpSpPr>
+        <p:cNvPr id="1" name=""/>
+        <p:cNvGrpSpPr/>
+        <p:nvPr/>
+      </p:nvGrpSpPr>
+      <p:grpSpPr>
+        <a:xfrm>
+          <a:off x="0" y="0"/>
+          <a:ext cx="0" cy="0"/>
+          <a:chOff x="0" y="0"/>
+          <a:chExt cx="0" cy="0"/>
+        </a:xfrm>
+      </p:grpSpPr>
+      <p:sp>
+        <p:nvSpPr>
+          <p:cNvPr id="2" name="Text 0"/>
+          <p:cNvSpPr/>
+          <p:nvPr/>
+        </p:nvSpPr>
+        <p:spPr>
+          <a:xfrm>
+            <a:off x="640080" y="548640"/>
+            <a:ext cx="7863840" cy="594360"/>
+          </a:xfrm>
+          <a:prstGeom prst="rect">
+            <a:avLst/>
+          </a:prstGeom>
+          <a:noFill/>
+          <a:ln/>
+        </p:spPr>
+        <p:txBody>
+          <a:bodyPr wrap="square" lIns="0" tIns="0" rIns="0" bIns="0" rtlCol="0" anchor="ctr"/>
+          <a:lstStyle/>
+          <a:p>
+            <a:pPr marL="0" indent="0">
+              <a:buNone/>
+            </a:pPr>
+            <a:r>
+              <a:rPr lang="en-US" sz="3200" b="1" dirty="0">
+                <a:solidFill>
+                  <a:srgbClr val="FFFFFF"/>
+                </a:solidFill>
+                <a:latin typeface="Calibri" pitchFamily="34" charset="0"/>
+                <a:ea typeface="Calibri" pitchFamily="34" charset="-122"/>
+                <a:cs typeface="Calibri" pitchFamily="34" charset="-120"/>
+              </a:rPr>
+              <a:t>Status &amp; Next Steps</a:t>
+            </a:r>
+            <a:endParaRPr lang="en-US" sz="3200" dirty="0"/>
+          </a:p>
+        </p:txBody>
+      </p:sp>
+      <p:sp>
+        <p:nvSpPr>
+          <p:cNvPr id="3" name="Shape 1"/>
+          <p:cNvSpPr/>
+          <p:nvPr/>
+        </p:nvSpPr>
+        <p:spPr>
+          <a:xfrm>
+            <a:off x="640080" y="1188720"/>
+            <a:ext cx="2377440" cy="41148"/>
+          </a:xfrm>
+          <a:prstGeom prst="rect">
+            <a:avLst/>
+          </a:prstGeom>
+          <a:solidFill>
+            <a:srgbClr val="02C39A"/>
+          </a:solidFill>
+          <a:ln w="12700">
+            <a:solidFill>
+              <a:srgbClr val="02C39A"/>
+            </a:solidFill>
+            <a:prstDash val="solid"/>
+          </a:ln>
+        </p:spPr>
+        <p:txBody>
+          <a:bodyPr/>
+          <a:lstStyle/>
+          <a:p>
+            <a:endParaRPr lang="fr-FR"/>
+          </a:p>
+        </p:txBody>
+      </p:sp>
+      <p:sp>
+        <p:nvSpPr>
+          <p:cNvPr id="4" name="Text 2"/>
+          <p:cNvSpPr/>
+          <p:nvPr/>
+        </p:nvSpPr>
+        <p:spPr>
+          <a:xfrm>
+            <a:off x="640080" y="1463040"/>
+            <a:ext cx="7863840" cy="2560320"/>
+          </a:xfrm>
+          <a:prstGeom prst="rect">
+            <a:avLst/>
+          </a:prstGeom>
+          <a:noFill/>
+          <a:ln/>
+        </p:spPr>
+        <p:txBody>
+          <a:bodyPr wrap="square" lIns="0" tIns="0" rIns="0" bIns="0" rtlCol="0" anchor="t"/>
+          <a:lstStyle/>
+          <a:p>
+            <a:pPr marL="177800" indent="-177800">
+              <a:spcAft>
+                <a:spcPts val="800"/>
+              </a:spcAft>
+              <a:buSzPct val="100000"/>
+              <a:buChar char="•"/>
+            </a:pPr>
+            <a:r>
+              <a:rPr lang="en-US" sz="1350" dirty="0">
+                <a:solidFill>
+                  <a:srgbClr val="E8ECF5"/>
+                </a:solidFill>
+                <a:latin typeface="Calibri" pitchFamily="34" charset="0"/>
+                <a:ea typeface="Calibri" pitchFamily="34" charset="-122"/>
+                <a:cs typeface="Calibri" pitchFamily="34" charset="-120"/>
+              </a:rPr>
+              <a:t>Model: manager/persona SMG, generalized_cost + revenue/policy_cost rewards, 63 properties, validated against real PRISM runs.</a:t>
+            </a:r>
+            <a:endParaRPr lang="en-US" sz="1350" dirty="0"/>
+          </a:p>
+          <a:p>
+            <a:pPr marL="177800" indent="-177800">
+              <a:spcAft>
+                <a:spcPts val="800"/>
+              </a:spcAft>
+              <a:buSzPct val="100000"/>
+              <a:buChar char="•"/>
+            </a:pPr>
+            <a:r>
+              <a:rPr lang="en-US" sz="1350" dirty="0">
+                <a:solidFill>
+                  <a:srgbClr val="E8ECF5"/>
+                </a:solidFill>
+                <a:latin typeface="Calibri" pitchFamily="34" charset="0"/>
+                <a:ea typeface="Calibri" pitchFamily="34" charset="-122"/>
+                <a:cs typeface="Calibri" pitchFamily="34" charset="-120"/>
+              </a:rPr>
+              <a:t>Tooling: webapp with parameter sweeps, figure generation, chart export — all 9 personas × 5 policies × 2 scenarios reproducible on demand.</a:t>
+            </a:r>
+            <a:endParaRPr lang="en-US" sz="1350" dirty="0"/>
+          </a:p>
+          <a:p>
+            <a:pPr marL="177800" indent="-177800">
+              <a:spcAft>
+                <a:spcPts val="800"/>
+              </a:spcAft>
+              <a:buSzPct val="100000"/>
+              <a:buChar char="•"/>
+            </a:pPr>
+            <a:r>
+              <a:rPr lang="en-US" sz="1350" dirty="0">
+                <a:solidFill>
+                  <a:srgbClr val="E8ECF5"/>
+                </a:solidFill>
+                <a:latin typeface="Calibri" pitchFamily="34" charset="0"/>
+                <a:ea typeface="Calibri" pitchFamily="34" charset="-122"/>
+                <a:cs typeface="Calibri" pitchFamily="34" charset="-120"/>
+              </a:rPr>
+              <a:t>Known limitation: free-abandonment bias identified and mitigated for display; a structural (headway) fix remains a documented option, not yet built.</a:t>
+            </a:r>
+            <a:endParaRPr lang="en-US" sz="1350" dirty="0"/>
+          </a:p>
+          <a:p>
+            <a:pPr marL="177800" indent="-177800">
+              <a:spcAft>
+                <a:spcPts val="800"/>
+              </a:spcAft>
+              <a:buSzPct val="100000"/>
+              <a:buChar char="•"/>
+            </a:pPr>
+            <a:r>
+              <a:rPr lang="en-US" sz="1350" dirty="0">
+                <a:solidFill>
+                  <a:srgbClr val="E8ECF5"/>
+                </a:solidFill>
+                <a:latin typeface="Calibri" pitchFamily="34" charset="0"/>
+                <a:ea typeface="Calibri" pitchFamily="34" charset="-122"/>
+                <a:cs typeface="Calibri" pitchFamily="34" charset="-120"/>
+              </a:rPr>
+              <a:t>Next: short paper drafted— venue and exact numbers still to be finalised.</a:t>
+            </a:r>
+            <a:endParaRPr lang="en-US" sz="1350" dirty="0"/>
           </a:p>
         </p:txBody>
       </p:sp>
@@ -2820,8 +3869,8 @@
         </p:nvSpPr>
         <p:spPr>
           <a:xfrm>
-            <a:off x="548640" y="228600"/>
-            <a:ext cx="8046720" cy="594360"/>
+            <a:off x="411480" y="292608"/>
+            <a:ext cx="8321040" cy="502920"/>
           </a:xfrm>
           <a:prstGeom prst="rect">
             <a:avLst/>
@@ -2833,13 +3882,13 @@
           <a:bodyPr wrap="square" rtlCol="0" anchor="ctr"/>
           <a:lstStyle/>
           <a:p>
-            <a:pPr marL="0" indent="0">
+            <a:pPr marL="0" indent="0" algn="l">
               <a:buNone/>
             </a:pPr>
             <a:r>
-              <a:rPr lang="en-US" sz="3000" b="1" dirty="0">
-                <a:solidFill>
-                  <a:srgbClr val="1E293B"/>
+              <a:rPr lang="en-US" sz="2400" b="1" dirty="0">
+                <a:solidFill>
+                  <a:srgbClr val="1B2B4B"/>
                 </a:solidFill>
                 <a:latin typeface="Calibri" pitchFamily="34" charset="0"/>
                 <a:ea typeface="Calibri" pitchFamily="34" charset="-122"/>
@@ -2847,7 +3896,7 @@
               </a:rPr>
               <a:t>What Question Are We Asking?</a:t>
             </a:r>
-            <a:endParaRPr lang="en-US" sz="3000" dirty="0"/>
+            <a:endParaRPr lang="en-US" sz="2400" dirty="0"/>
           </a:p>
         </p:txBody>
       </p:sp>
@@ -2859,29 +3908,38 @@
         </p:nvSpPr>
         <p:spPr>
           <a:xfrm>
-            <a:off x="457200" y="1005840"/>
-            <a:ext cx="3840480" cy="3749040"/>
-          </a:xfrm>
-          <a:prstGeom prst="rect">
-            <a:avLst/>
+            <a:off x="411480" y="960120"/>
+            <a:ext cx="3840480" cy="2331720"/>
+          </a:xfrm>
+          <a:prstGeom prst="roundRect">
+            <a:avLst>
+              <a:gd name="adj" fmla="val 3137"/>
+            </a:avLst>
           </a:prstGeom>
           <a:solidFill>
-            <a:srgbClr val="EEF5FA"/>
+            <a:srgbClr val="F4F7FA"/>
           </a:solidFill>
           <a:ln w="12700">
             <a:solidFill>
-              <a:srgbClr val="C8DFF0"/>
+              <a:srgbClr val="F4F7FA"/>
             </a:solidFill>
             <a:prstDash val="solid"/>
           </a:ln>
           <a:effectLst>
-            <a:outerShdw blurRad="101600" dist="25400" dir="8100000" algn="bl" rotWithShape="0">
+            <a:outerShdw blurRad="76200" dist="25400" dir="5400000" algn="bl" rotWithShape="0">
               <a:srgbClr val="000000">
-                <a:alpha val="10000"/>
+                <a:alpha val="12000"/>
               </a:srgbClr>
             </a:outerShdw>
           </a:effectLst>
         </p:spPr>
+        <p:txBody>
+          <a:bodyPr/>
+          <a:lstStyle/>
+          <a:p>
+            <a:endParaRPr lang="fr-FR"/>
+          </a:p>
+        </p:txBody>
       </p:sp>
       <p:sp>
         <p:nvSpPr>
@@ -2891,8 +3949,8 @@
         </p:nvSpPr>
         <p:spPr>
           <a:xfrm>
-            <a:off x="640080" y="1097280"/>
-            <a:ext cx="3474720" cy="411480"/>
+            <a:off x="594360" y="1097280"/>
+            <a:ext cx="3474720" cy="320040"/>
           </a:xfrm>
           <a:prstGeom prst="rect">
             <a:avLst/>
@@ -2901,14 +3959,14 @@
           <a:ln/>
         </p:spPr>
         <p:txBody>
-          <a:bodyPr wrap="square" rtlCol="0" anchor="ctr"/>
+          <a:bodyPr wrap="square" lIns="0" tIns="0" rIns="0" bIns="0" rtlCol="0" anchor="ctr"/>
           <a:lstStyle/>
           <a:p>
             <a:pPr marL="0" indent="0">
               <a:buNone/>
             </a:pPr>
             <a:r>
-              <a:rPr lang="en-US" sz="1500" b="1" dirty="0">
+              <a:rPr lang="en-US" sz="1400" b="1" dirty="0">
                 <a:solidFill>
                   <a:srgbClr val="065A82"/>
                 </a:solidFill>
@@ -2918,7 +3976,7 @@
               </a:rPr>
               <a:t>9 DfT Transport Personas</a:t>
             </a:r>
-            <a:endParaRPr lang="en-US" sz="1500" dirty="0"/>
+            <a:endParaRPr lang="en-US" sz="1400" dirty="0"/>
           </a:p>
         </p:txBody>
       </p:sp>
@@ -2930,8 +3988,8 @@
         </p:nvSpPr>
         <p:spPr>
           <a:xfrm>
-            <a:off x="640080" y="1600200"/>
-            <a:ext cx="3474720" cy="2926080"/>
+            <a:off x="594360" y="1481328"/>
+            <a:ext cx="1691640" cy="1737360"/>
           </a:xfrm>
           <a:prstGeom prst="rect">
             <a:avLst/>
@@ -2940,17 +3998,20 @@
           <a:ln/>
         </p:spPr>
         <p:txBody>
-          <a:bodyPr wrap="square" rtlCol="0" anchor="t"/>
-          <a:lstStyle/>
-          <a:p>
-            <a:pPr marL="342900" indent="-342900">
+          <a:bodyPr wrap="square" lIns="0" tIns="0" rIns="0" bIns="0" rtlCol="0" anchor="t"/>
+          <a:lstStyle/>
+          <a:p>
+            <a:pPr marL="177800" indent="-177800">
+              <a:spcAft>
+                <a:spcPts val="800"/>
+              </a:spcAft>
               <a:buSzPct val="100000"/>
               <a:buChar char="•"/>
             </a:pPr>
             <a:r>
-              <a:rPr lang="en-US" sz="1300" dirty="0">
-                <a:solidFill>
-                  <a:srgbClr val="1E293B"/>
+              <a:rPr lang="en-US" sz="1050" dirty="0">
+                <a:solidFill>
+                  <a:srgbClr val="1B2B4B"/>
                 </a:solidFill>
                 <a:latin typeface="Calibri" pitchFamily="34" charset="0"/>
                 <a:ea typeface="Calibri" pitchFamily="34" charset="-122"/>
@@ -2958,17 +4019,20 @@
               </a:rPr>
               <a:t>Elderly (no car)</a:t>
             </a:r>
-            <a:endParaRPr lang="en-US" sz="1300" dirty="0"/>
-          </a:p>
-          <a:p>
-            <a:pPr marL="342900" indent="-342900">
+            <a:endParaRPr lang="en-US" sz="1050" dirty="0"/>
+          </a:p>
+          <a:p>
+            <a:pPr marL="177800" indent="-177800">
+              <a:spcAft>
+                <a:spcPts val="800"/>
+              </a:spcAft>
               <a:buSzPct val="100000"/>
               <a:buChar char="•"/>
             </a:pPr>
             <a:r>
-              <a:rPr lang="en-US" sz="1300" dirty="0">
-                <a:solidFill>
-                  <a:srgbClr val="1E293B"/>
+              <a:rPr lang="en-US" sz="1050" dirty="0">
+                <a:solidFill>
+                  <a:srgbClr val="1B2B4B"/>
                 </a:solidFill>
                 <a:latin typeface="Calibri" pitchFamily="34" charset="0"/>
                 <a:ea typeface="Calibri" pitchFamily="34" charset="-122"/>
@@ -2976,17 +4040,20 @@
               </a:rPr>
               <a:t>Less Mobile</a:t>
             </a:r>
-            <a:endParaRPr lang="en-US" sz="1300" dirty="0"/>
-          </a:p>
-          <a:p>
-            <a:pPr marL="342900" indent="-342900">
+            <a:endParaRPr lang="en-US" sz="1050" dirty="0"/>
+          </a:p>
+          <a:p>
+            <a:pPr marL="177800" indent="-177800">
+              <a:spcAft>
+                <a:spcPts val="800"/>
+              </a:spcAft>
               <a:buSzPct val="100000"/>
               <a:buChar char="•"/>
             </a:pPr>
             <a:r>
-              <a:rPr lang="en-US" sz="1300" dirty="0">
-                <a:solidFill>
-                  <a:srgbClr val="1E293B"/>
+              <a:rPr lang="en-US" sz="1050" dirty="0">
+                <a:solidFill>
+                  <a:srgbClr val="1B2B4B"/>
                 </a:solidFill>
                 <a:latin typeface="Calibri" pitchFamily="34" charset="0"/>
                 <a:ea typeface="Calibri" pitchFamily="34" charset="-122"/>
@@ -2994,160 +4061,209 @@
               </a:rPr>
               <a:t>Young Low Income</a:t>
             </a:r>
-            <a:endParaRPr lang="en-US" sz="1300" dirty="0"/>
-          </a:p>
-          <a:p>
-            <a:pPr marL="342900" indent="-342900">
+            <a:endParaRPr lang="en-US" sz="1050" dirty="0"/>
+          </a:p>
+          <a:p>
+            <a:pPr marL="177800" indent="-177800">
+              <a:spcAft>
+                <a:spcPts val="800"/>
+              </a:spcAft>
               <a:buSzPct val="100000"/>
               <a:buChar char="•"/>
             </a:pPr>
             <a:r>
-              <a:rPr lang="en-US" sz="1300" dirty="0">
-                <a:solidFill>
-                  <a:srgbClr val="1E293B"/>
-                </a:solidFill>
-                <a:latin typeface="Calibri" pitchFamily="34" charset="0"/>
-                <a:ea typeface="Calibri" pitchFamily="34" charset="-122"/>
-                <a:cs typeface="Calibri" pitchFamily="34" charset="-120"/>
-              </a:rPr>
-              <a:t>Heavy Car User</a:t>
-            </a:r>
-            <a:endParaRPr lang="en-US" sz="1300" dirty="0"/>
-          </a:p>
-          <a:p>
-            <a:pPr marL="342900" indent="-342900">
+              <a:rPr lang="en-US" sz="1050" dirty="0">
+                <a:solidFill>
+                  <a:srgbClr val="1B2B4B"/>
+                </a:solidFill>
+                <a:latin typeface="Calibri" pitchFamily="34" charset="0"/>
+                <a:ea typeface="Calibri" pitchFamily="34" charset="-122"/>
+                <a:cs typeface="Calibri" pitchFamily="34" charset="-120"/>
+              </a:rPr>
+              <a:t>Older Less Affluent</a:t>
+            </a:r>
+            <a:endParaRPr lang="en-US" sz="1050" dirty="0"/>
+          </a:p>
+          <a:p>
+            <a:pPr marL="177800" indent="-177800">
+              <a:spcAft>
+                <a:spcPts val="800"/>
+              </a:spcAft>
               <a:buSzPct val="100000"/>
               <a:buChar char="•"/>
             </a:pPr>
             <a:r>
-              <a:rPr lang="en-US" sz="1300" dirty="0">
-                <a:solidFill>
-                  <a:srgbClr val="1E293B"/>
-                </a:solidFill>
-                <a:latin typeface="Calibri" pitchFamily="34" charset="0"/>
-                <a:ea typeface="Calibri" pitchFamily="34" charset="-122"/>
-                <a:cs typeface="Calibri" pitchFamily="34" charset="-120"/>
-              </a:rPr>
-              <a:t>Urban Professional</a:t>
-            </a:r>
-            <a:endParaRPr lang="en-US" sz="1300" dirty="0"/>
-          </a:p>
-          <a:p>
-            <a:pPr marL="342900" indent="-342900">
+              <a:rPr lang="en-US" sz="1050" dirty="0">
+                <a:solidFill>
+                  <a:srgbClr val="1B2B4B"/>
+                </a:solidFill>
+                <a:latin typeface="Calibri" pitchFamily="34" charset="0"/>
+                <a:ea typeface="Calibri" pitchFamily="34" charset="-122"/>
+                <a:cs typeface="Calibri" pitchFamily="34" charset="-120"/>
+              </a:rPr>
+              <a:t>Young Family</a:t>
+            </a:r>
+            <a:endParaRPr lang="en-US" sz="1050" dirty="0"/>
+          </a:p>
+        </p:txBody>
+      </p:sp>
+      <p:sp>
+        <p:nvSpPr>
+          <p:cNvPr id="6" name="Text 4"/>
+          <p:cNvSpPr/>
+          <p:nvPr/>
+        </p:nvSpPr>
+        <p:spPr>
+          <a:xfrm>
+            <a:off x="2331720" y="1481328"/>
+            <a:ext cx="1691640" cy="1737360"/>
+          </a:xfrm>
+          <a:prstGeom prst="rect">
+            <a:avLst/>
+          </a:prstGeom>
+          <a:noFill/>
+          <a:ln/>
+        </p:spPr>
+        <p:txBody>
+          <a:bodyPr wrap="square" lIns="0" tIns="0" rIns="0" bIns="0" rtlCol="0" anchor="t"/>
+          <a:lstStyle/>
+          <a:p>
+            <a:pPr marL="177800" indent="-177800">
+              <a:spcAft>
+                <a:spcPts val="800"/>
+              </a:spcAft>
               <a:buSzPct val="100000"/>
               <a:buChar char="•"/>
             </a:pPr>
             <a:r>
-              <a:rPr lang="en-US" sz="1300" dirty="0">
-                <a:solidFill>
-                  <a:srgbClr val="1E293B"/>
-                </a:solidFill>
-                <a:latin typeface="Calibri" pitchFamily="34" charset="0"/>
-                <a:ea typeface="Calibri" pitchFamily="34" charset="-122"/>
-                <a:cs typeface="Calibri" pitchFamily="34" charset="-120"/>
-              </a:rPr>
-              <a:t>Young Family</a:t>
-            </a:r>
-            <a:endParaRPr lang="en-US" sz="1300" dirty="0"/>
-          </a:p>
-          <a:p>
-            <a:pPr marL="342900" indent="-342900">
+              <a:rPr lang="en-US" sz="1050" dirty="0">
+                <a:solidFill>
+                  <a:srgbClr val="1B2B4B"/>
+                </a:solidFill>
+                <a:latin typeface="Calibri" pitchFamily="34" charset="0"/>
+                <a:ea typeface="Calibri" pitchFamily="34" charset="-122"/>
+                <a:cs typeface="Calibri" pitchFamily="34" charset="-120"/>
+              </a:rPr>
+              <a:t>Urban Professional</a:t>
+            </a:r>
+            <a:endParaRPr lang="en-US" sz="1050" dirty="0"/>
+          </a:p>
+          <a:p>
+            <a:pPr marL="177800" indent="-177800">
+              <a:spcAft>
+                <a:spcPts val="800"/>
+              </a:spcAft>
               <a:buSzPct val="100000"/>
               <a:buChar char="•"/>
             </a:pPr>
             <a:r>
-              <a:rPr lang="en-US" sz="1300" dirty="0">
-                <a:solidFill>
-                  <a:srgbClr val="1E293B"/>
-                </a:solidFill>
-                <a:latin typeface="Calibri" pitchFamily="34" charset="0"/>
-                <a:ea typeface="Calibri" pitchFamily="34" charset="-122"/>
-                <a:cs typeface="Calibri" pitchFamily="34" charset="-120"/>
-              </a:rPr>
-              <a:t>Older Less Affluent</a:t>
-            </a:r>
-            <a:endParaRPr lang="en-US" sz="1300" dirty="0"/>
-          </a:p>
-          <a:p>
-            <a:pPr marL="342900" indent="-342900">
+              <a:rPr lang="en-US" sz="1050" dirty="0">
+                <a:solidFill>
+                  <a:srgbClr val="1B2B4B"/>
+                </a:solidFill>
+                <a:latin typeface="Calibri" pitchFamily="34" charset="0"/>
+                <a:ea typeface="Calibri" pitchFamily="34" charset="-122"/>
+                <a:cs typeface="Calibri" pitchFamily="34" charset="-120"/>
+              </a:rPr>
+              <a:t>Suburban Family</a:t>
+            </a:r>
+            <a:endParaRPr lang="en-US" sz="1050" dirty="0"/>
+          </a:p>
+          <a:p>
+            <a:pPr marL="177800" indent="-177800">
+              <a:spcAft>
+                <a:spcPts val="800"/>
+              </a:spcAft>
               <a:buSzPct val="100000"/>
               <a:buChar char="•"/>
             </a:pPr>
             <a:r>
-              <a:rPr lang="en-US" sz="1300" dirty="0">
-                <a:solidFill>
-                  <a:srgbClr val="1E293B"/>
-                </a:solidFill>
-                <a:latin typeface="Calibri" pitchFamily="34" charset="0"/>
-                <a:ea typeface="Calibri" pitchFamily="34" charset="-122"/>
-                <a:cs typeface="Calibri" pitchFamily="34" charset="-120"/>
-              </a:rPr>
-              <a:t>Suburban Family</a:t>
-            </a:r>
-            <a:endParaRPr lang="en-US" sz="1300" dirty="0"/>
-          </a:p>
-          <a:p>
-            <a:pPr marL="342900" indent="-342900">
+              <a:rPr lang="en-US" sz="1050" dirty="0">
+                <a:solidFill>
+                  <a:srgbClr val="1B2B4B"/>
+                </a:solidFill>
+                <a:latin typeface="Calibri" pitchFamily="34" charset="0"/>
+                <a:ea typeface="Calibri" pitchFamily="34" charset="-122"/>
+                <a:cs typeface="Calibri" pitchFamily="34" charset="-120"/>
+              </a:rPr>
+              <a:t>Empty Nester</a:t>
+            </a:r>
+            <a:endParaRPr lang="en-US" sz="1050" dirty="0"/>
+          </a:p>
+          <a:p>
+            <a:pPr marL="177800" indent="-177800">
+              <a:spcAft>
+                <a:spcPts val="800"/>
+              </a:spcAft>
               <a:buSzPct val="100000"/>
               <a:buChar char="•"/>
             </a:pPr>
             <a:r>
-              <a:rPr lang="en-US" sz="1300" dirty="0">
-                <a:solidFill>
-                  <a:srgbClr val="1E293B"/>
-                </a:solidFill>
-                <a:latin typeface="Calibri" pitchFamily="34" charset="0"/>
-                <a:ea typeface="Calibri" pitchFamily="34" charset="-122"/>
-                <a:cs typeface="Calibri" pitchFamily="34" charset="-120"/>
-              </a:rPr>
-              <a:t>Empty Nester</a:t>
-            </a:r>
-            <a:endParaRPr lang="en-US" sz="1300" dirty="0"/>
-          </a:p>
-        </p:txBody>
-      </p:sp>
-      <p:sp>
-        <p:nvSpPr>
-          <p:cNvPr id="6" name="Shape 4"/>
-          <p:cNvSpPr/>
-          <p:nvPr/>
-        </p:nvSpPr>
-        <p:spPr>
-          <a:xfrm>
-            <a:off x="4754880" y="1005840"/>
-            <a:ext cx="3840480" cy="2286000"/>
-          </a:xfrm>
-          <a:prstGeom prst="rect">
-            <a:avLst/>
+              <a:rPr lang="en-US" sz="1050" dirty="0">
+                <a:solidFill>
+                  <a:srgbClr val="1B2B4B"/>
+                </a:solidFill>
+                <a:latin typeface="Calibri" pitchFamily="34" charset="0"/>
+                <a:ea typeface="Calibri" pitchFamily="34" charset="-122"/>
+                <a:cs typeface="Calibri" pitchFamily="34" charset="-120"/>
+              </a:rPr>
+              <a:t>Heavy Car User</a:t>
+            </a:r>
+            <a:endParaRPr lang="en-US" sz="1050" dirty="0"/>
+          </a:p>
+        </p:txBody>
+      </p:sp>
+      <p:sp>
+        <p:nvSpPr>
+          <p:cNvPr id="7" name="Shape 5"/>
+          <p:cNvSpPr/>
+          <p:nvPr/>
+        </p:nvSpPr>
+        <p:spPr>
+          <a:xfrm>
+            <a:off x="4434840" y="960120"/>
+            <a:ext cx="2148840" cy="2331720"/>
+          </a:xfrm>
+          <a:prstGeom prst="roundRect">
+            <a:avLst>
+              <a:gd name="adj" fmla="val 3404"/>
+            </a:avLst>
           </a:prstGeom>
           <a:solidFill>
-            <a:srgbClr val="EEF5FA"/>
+            <a:srgbClr val="F4F7FA"/>
           </a:solidFill>
           <a:ln w="12700">
             <a:solidFill>
-              <a:srgbClr val="C8DFF0"/>
+              <a:srgbClr val="F4F7FA"/>
             </a:solidFill>
             <a:prstDash val="solid"/>
           </a:ln>
           <a:effectLst>
-            <a:outerShdw blurRad="101600" dist="25400" dir="8100000" algn="bl" rotWithShape="0">
+            <a:outerShdw blurRad="76200" dist="25400" dir="5400000" algn="bl" rotWithShape="0">
               <a:srgbClr val="000000">
-                <a:alpha val="10000"/>
+                <a:alpha val="12000"/>
               </a:srgbClr>
             </a:outerShdw>
           </a:effectLst>
         </p:spPr>
-      </p:sp>
-      <p:sp>
-        <p:nvSpPr>
-          <p:cNvPr id="7" name="Text 5"/>
-          <p:cNvSpPr/>
-          <p:nvPr/>
-        </p:nvSpPr>
-        <p:spPr>
-          <a:xfrm>
-            <a:off x="4937760" y="1097280"/>
-            <a:ext cx="3474720" cy="411480"/>
+        <p:txBody>
+          <a:bodyPr/>
+          <a:lstStyle/>
+          <a:p>
+            <a:endParaRPr lang="fr-FR"/>
+          </a:p>
+        </p:txBody>
+      </p:sp>
+      <p:sp>
+        <p:nvSpPr>
+          <p:cNvPr id="8" name="Text 6"/>
+          <p:cNvSpPr/>
+          <p:nvPr/>
+        </p:nvSpPr>
+        <p:spPr>
+          <a:xfrm>
+            <a:off x="4572000" y="1097280"/>
+            <a:ext cx="1920240" cy="320040"/>
           </a:xfrm>
           <a:prstGeom prst="rect">
             <a:avLst/>
@@ -3156,14 +4272,14 @@
           <a:ln/>
         </p:spPr>
         <p:txBody>
-          <a:bodyPr wrap="square" rtlCol="0" anchor="ctr"/>
+          <a:bodyPr wrap="square" lIns="0" tIns="0" rIns="0" bIns="0" rtlCol="0" anchor="ctr"/>
           <a:lstStyle/>
           <a:p>
             <a:pPr marL="0" indent="0">
               <a:buNone/>
             </a:pPr>
             <a:r>
-              <a:rPr lang="en-US" sz="1500" b="1" dirty="0">
+              <a:rPr lang="en-US" sz="1400" b="1" dirty="0">
                 <a:solidFill>
                   <a:srgbClr val="065A82"/>
                 </a:solidFill>
@@ -3173,20 +4289,20 @@
               </a:rPr>
               <a:t>5 Transport Policies</a:t>
             </a:r>
-            <a:endParaRPr lang="en-US" sz="1500" dirty="0"/>
-          </a:p>
-        </p:txBody>
-      </p:sp>
-      <p:sp>
-        <p:nvSpPr>
-          <p:cNvPr id="8" name="Text 6"/>
-          <p:cNvSpPr/>
-          <p:nvPr/>
-        </p:nvSpPr>
-        <p:spPr>
-          <a:xfrm>
-            <a:off x="4937760" y="1600200"/>
-            <a:ext cx="3474720" cy="1508760"/>
+            <a:endParaRPr lang="en-US" sz="1400" dirty="0"/>
+          </a:p>
+        </p:txBody>
+      </p:sp>
+      <p:sp>
+        <p:nvSpPr>
+          <p:cNvPr id="9" name="Text 7"/>
+          <p:cNvSpPr/>
+          <p:nvPr/>
+        </p:nvSpPr>
+        <p:spPr>
+          <a:xfrm>
+            <a:off x="4572000" y="1463040"/>
+            <a:ext cx="1920240" cy="1737360"/>
           </a:xfrm>
           <a:prstGeom prst="rect">
             <a:avLst/>
@@ -3195,17 +4311,20 @@
           <a:ln/>
         </p:spPr>
         <p:txBody>
-          <a:bodyPr wrap="square" rtlCol="0" anchor="t"/>
-          <a:lstStyle/>
-          <a:p>
-            <a:pPr marL="342900" indent="-342900">
+          <a:bodyPr wrap="square" lIns="0" tIns="0" rIns="0" bIns="0" rtlCol="0" anchor="t"/>
+          <a:lstStyle/>
+          <a:p>
+            <a:pPr marL="177800" indent="-177800">
+              <a:spcAft>
+                <a:spcPts val="800"/>
+              </a:spcAft>
               <a:buSzPct val="100000"/>
               <a:buChar char="•"/>
             </a:pPr>
             <a:r>
-              <a:rPr lang="en-US" sz="1300" dirty="0">
-                <a:solidFill>
-                  <a:srgbClr val="1E293B"/>
+              <a:rPr lang="en-US" sz="1100" dirty="0">
+                <a:solidFill>
+                  <a:srgbClr val="1B2B4B"/>
                 </a:solidFill>
                 <a:latin typeface="Calibri" pitchFamily="34" charset="0"/>
                 <a:ea typeface="Calibri" pitchFamily="34" charset="-122"/>
@@ -3213,17 +4332,20 @@
               </a:rPr>
               <a:t>Normal (baseline)</a:t>
             </a:r>
-            <a:endParaRPr lang="en-US" sz="1300" dirty="0"/>
-          </a:p>
-          <a:p>
-            <a:pPr marL="342900" indent="-342900">
+            <a:endParaRPr lang="en-US" sz="1100" dirty="0"/>
+          </a:p>
+          <a:p>
+            <a:pPr marL="177800" indent="-177800">
+              <a:spcAft>
+                <a:spcPts val="800"/>
+              </a:spcAft>
               <a:buSzPct val="100000"/>
               <a:buChar char="•"/>
             </a:pPr>
             <a:r>
-              <a:rPr lang="en-US" sz="1300" dirty="0">
-                <a:solidFill>
-                  <a:srgbClr val="1E293B"/>
+              <a:rPr lang="en-US" sz="1100" dirty="0">
+                <a:solidFill>
+                  <a:srgbClr val="1B2B4B"/>
                 </a:solidFill>
                 <a:latin typeface="Calibri" pitchFamily="34" charset="0"/>
                 <a:ea typeface="Calibri" pitchFamily="34" charset="-122"/>
@@ -3231,17 +4353,20 @@
               </a:rPr>
               <a:t>High Frequency</a:t>
             </a:r>
-            <a:endParaRPr lang="en-US" sz="1300" dirty="0"/>
-          </a:p>
-          <a:p>
-            <a:pPr marL="342900" indent="-342900">
+            <a:endParaRPr lang="en-US" sz="1100" dirty="0"/>
+          </a:p>
+          <a:p>
+            <a:pPr marL="177800" indent="-177800">
+              <a:spcAft>
+                <a:spcPts val="800"/>
+              </a:spcAft>
               <a:buSzPct val="100000"/>
               <a:buChar char="•"/>
             </a:pPr>
             <a:r>
-              <a:rPr lang="en-US" sz="1300" dirty="0">
-                <a:solidFill>
-                  <a:srgbClr val="1E293B"/>
+              <a:rPr lang="en-US" sz="1100" dirty="0">
+                <a:solidFill>
+                  <a:srgbClr val="1B2B4B"/>
                 </a:solidFill>
                 <a:latin typeface="Calibri" pitchFamily="34" charset="0"/>
                 <a:ea typeface="Calibri" pitchFamily="34" charset="-122"/>
@@ -3249,17 +4374,20 @@
               </a:rPr>
               <a:t>Low Fare</a:t>
             </a:r>
-            <a:endParaRPr lang="en-US" sz="1300" dirty="0"/>
-          </a:p>
-          <a:p>
-            <a:pPr marL="342900" indent="-342900">
+            <a:endParaRPr lang="en-US" sz="1100" dirty="0"/>
+          </a:p>
+          <a:p>
+            <a:pPr marL="177800" indent="-177800">
+              <a:spcAft>
+                <a:spcPts val="800"/>
+              </a:spcAft>
               <a:buSzPct val="100000"/>
               <a:buChar char="•"/>
             </a:pPr>
             <a:r>
-              <a:rPr lang="en-US" sz="1300" dirty="0">
-                <a:solidFill>
-                  <a:srgbClr val="1E293B"/>
+              <a:rPr lang="en-US" sz="1100" dirty="0">
+                <a:solidFill>
+                  <a:srgbClr val="1B2B4B"/>
                 </a:solidFill>
                 <a:latin typeface="Calibri" pitchFamily="34" charset="0"/>
                 <a:ea typeface="Calibri" pitchFamily="34" charset="-122"/>
@@ -3267,17 +4395,20 @@
               </a:rPr>
               <a:t>Road Charge</a:t>
             </a:r>
-            <a:endParaRPr lang="en-US" sz="1300" dirty="0"/>
-          </a:p>
-          <a:p>
-            <a:pPr marL="342900" indent="-342900">
+            <a:endParaRPr lang="en-US" sz="1100" dirty="0"/>
+          </a:p>
+          <a:p>
+            <a:pPr marL="177800" indent="-177800">
+              <a:spcAft>
+                <a:spcPts val="800"/>
+              </a:spcAft>
               <a:buSzPct val="100000"/>
               <a:buChar char="•"/>
             </a:pPr>
             <a:r>
-              <a:rPr lang="en-US" sz="1300" dirty="0">
-                <a:solidFill>
-                  <a:srgbClr val="1E293B"/>
+              <a:rPr lang="en-US" sz="1100" dirty="0">
+                <a:solidFill>
+                  <a:srgbClr val="1B2B4B"/>
                 </a:solidFill>
                 <a:latin typeface="Calibri" pitchFamily="34" charset="0"/>
                 <a:ea typeface="Calibri" pitchFamily="34" charset="-122"/>
@@ -3285,52 +4416,61 @@
               </a:rPr>
               <a:t>Accessible Service</a:t>
             </a:r>
-            <a:endParaRPr lang="en-US" sz="1300" dirty="0"/>
-          </a:p>
-        </p:txBody>
-      </p:sp>
-      <p:sp>
-        <p:nvSpPr>
-          <p:cNvPr id="9" name="Shape 7"/>
-          <p:cNvSpPr/>
-          <p:nvPr/>
-        </p:nvSpPr>
-        <p:spPr>
-          <a:xfrm>
-            <a:off x="4754880" y="3429000"/>
-            <a:ext cx="3840480" cy="1325880"/>
-          </a:xfrm>
-          <a:prstGeom prst="rect">
-            <a:avLst/>
+            <a:endParaRPr lang="en-US" sz="1100" dirty="0"/>
+          </a:p>
+        </p:txBody>
+      </p:sp>
+      <p:sp>
+        <p:nvSpPr>
+          <p:cNvPr id="10" name="Shape 8"/>
+          <p:cNvSpPr/>
+          <p:nvPr/>
+        </p:nvSpPr>
+        <p:spPr>
+          <a:xfrm>
+            <a:off x="6720840" y="960120"/>
+            <a:ext cx="2011680" cy="2331720"/>
+          </a:xfrm>
+          <a:prstGeom prst="roundRect">
+            <a:avLst>
+              <a:gd name="adj" fmla="val 3636"/>
+            </a:avLst>
           </a:prstGeom>
           <a:solidFill>
-            <a:srgbClr val="065A82"/>
+            <a:srgbClr val="1C7293"/>
           </a:solidFill>
           <a:ln w="12700">
             <a:solidFill>
-              <a:srgbClr val="065A82"/>
+              <a:srgbClr val="1C7293"/>
             </a:solidFill>
             <a:prstDash val="solid"/>
           </a:ln>
           <a:effectLst>
-            <a:outerShdw blurRad="101600" dist="25400" dir="8100000" algn="bl" rotWithShape="0">
+            <a:outerShdw blurRad="76200" dist="25400" dir="5400000" algn="bl" rotWithShape="0">
               <a:srgbClr val="000000">
-                <a:alpha val="10000"/>
+                <a:alpha val="12000"/>
               </a:srgbClr>
             </a:outerShdw>
           </a:effectLst>
         </p:spPr>
-      </p:sp>
-      <p:sp>
-        <p:nvSpPr>
-          <p:cNvPr id="10" name="Text 8"/>
-          <p:cNvSpPr/>
-          <p:nvPr/>
-        </p:nvSpPr>
-        <p:spPr>
-          <a:xfrm>
-            <a:off x="4754592" y="3520440"/>
-            <a:ext cx="3841057" cy="1143000"/>
+        <p:txBody>
+          <a:bodyPr/>
+          <a:lstStyle/>
+          <a:p>
+            <a:endParaRPr lang="fr-FR"/>
+          </a:p>
+        </p:txBody>
+      </p:sp>
+      <p:sp>
+        <p:nvSpPr>
+          <p:cNvPr id="11" name="Text 9"/>
+          <p:cNvSpPr/>
+          <p:nvPr/>
+        </p:nvSpPr>
+        <p:spPr>
+          <a:xfrm>
+            <a:off x="6903720" y="1143000"/>
+            <a:ext cx="1645920" cy="1965960"/>
           </a:xfrm>
           <a:prstGeom prst="rect">
             <a:avLst/>
@@ -3339,44 +4479,24 @@
           <a:ln/>
         </p:spPr>
         <p:txBody>
-          <a:bodyPr wrap="square" lIns="91440" tIns="45720" rIns="91440" bIns="45720" rtlCol="0" anchor="ctr"/>
-          <a:lstStyle/>
-          <a:p>
-            <a:pPr algn="ctr"/>
-            <a:r>
-              <a:rPr lang="en-US" sz="1400" dirty="0">
+          <a:bodyPr wrap="square" lIns="0" tIns="0" rIns="0" bIns="0" rtlCol="0" anchor="ctr"/>
+          <a:lstStyle/>
+          <a:p>
+            <a:pPr marL="0" indent="0">
+              <a:buNone/>
+            </a:pPr>
+            <a:r>
+              <a:rPr lang="en-US" sz="1200" dirty="0">
                 <a:solidFill>
                   <a:srgbClr val="FFFFFF"/>
                 </a:solidFill>
-                <a:ea typeface="+mn-lt"/>
-                <a:cs typeface="+mn-lt"/>
-              </a:rPr>
-              <a:t>Can formal verification reveal which transport policies best balance user cost, operator revenue and emissions across diverse </a:t>
-            </a:r>
-            <a:r>
-              <a:rPr lang="en-US" sz="1400" dirty="0" err="1">
-                <a:solidFill>
-                  <a:srgbClr val="FFFFFF"/>
-                </a:solidFill>
-                <a:ea typeface="+mn-lt"/>
-                <a:cs typeface="+mn-lt"/>
-              </a:rPr>
-              <a:t>traveller</a:t>
-            </a:r>
-            <a:r>
-              <a:rPr lang="en-US" sz="1400" dirty="0">
-                <a:solidFill>
-                  <a:srgbClr val="FFFFFF"/>
-                </a:solidFill>
-                <a:ea typeface="+mn-lt"/>
-                <a:cs typeface="+mn-lt"/>
-              </a:rPr>
-              <a:t> types?</a:t>
-            </a:r>
-            <a:endParaRPr lang="fr-FR" dirty="0">
-              <a:ea typeface="+mn-lt"/>
-              <a:cs typeface="+mn-lt"/>
-            </a:endParaRPr>
+                <a:latin typeface="Calibri" pitchFamily="34" charset="0"/>
+                <a:ea typeface="Calibri" pitchFamily="34" charset="-122"/>
+                <a:cs typeface="Calibri" pitchFamily="34" charset="-120"/>
+              </a:rPr>
+              <a:t>Can formal verification reveal which transport policies best balance user cost, operator revenue and emissions across diverse traveller types?</a:t>
+            </a:r>
+            <a:endParaRPr lang="en-US" sz="1200" dirty="0"/>
           </a:p>
         </p:txBody>
       </p:sp>
@@ -3421,8 +4541,8 @@
         </p:nvSpPr>
         <p:spPr>
           <a:xfrm>
-            <a:off x="548640" y="228600"/>
-            <a:ext cx="8046720" cy="594360"/>
+            <a:off x="411480" y="292608"/>
+            <a:ext cx="8321040" cy="502920"/>
           </a:xfrm>
           <a:prstGeom prst="rect">
             <a:avLst/>
@@ -3434,13 +4554,13 @@
           <a:bodyPr wrap="square" rtlCol="0" anchor="ctr"/>
           <a:lstStyle/>
           <a:p>
-            <a:pPr marL="0" indent="0">
+            <a:pPr marL="0" indent="0" algn="l">
               <a:buNone/>
             </a:pPr>
             <a:r>
-              <a:rPr lang="en-US" sz="3000" b="1" dirty="0">
-                <a:solidFill>
-                  <a:srgbClr val="1E293B"/>
+              <a:rPr lang="en-US" sz="2400" b="1" dirty="0">
+                <a:solidFill>
+                  <a:srgbClr val="1B2B4B"/>
                 </a:solidFill>
                 <a:latin typeface="Calibri" pitchFamily="34" charset="0"/>
                 <a:ea typeface="Calibri" pitchFamily="34" charset="-122"/>
@@ -3448,7 +4568,7 @@
               </a:rPr>
               <a:t>Why Not Just Simulate?</a:t>
             </a:r>
-            <a:endParaRPr lang="en-US" sz="3000" dirty="0"/>
+            <a:endParaRPr lang="en-US" sz="2400" dirty="0"/>
           </a:p>
         </p:txBody>
       </p:sp>
@@ -3460,280 +4580,49 @@
         </p:nvSpPr>
         <p:spPr>
           <a:xfrm>
-            <a:off x="457200" y="1005840"/>
-            <a:ext cx="3840480" cy="2011680"/>
-          </a:xfrm>
-          <a:prstGeom prst="rect">
-            <a:avLst/>
+            <a:off x="411480" y="1005840"/>
+            <a:ext cx="3931920" cy="2926080"/>
+          </a:xfrm>
+          <a:prstGeom prst="roundRect">
+            <a:avLst>
+              <a:gd name="adj" fmla="val 2500"/>
+            </a:avLst>
           </a:prstGeom>
           <a:solidFill>
-            <a:srgbClr val="EEF5FA"/>
+            <a:srgbClr val="F4F7FA"/>
           </a:solidFill>
           <a:ln w="12700">
             <a:solidFill>
-              <a:srgbClr val="C8DFF0"/>
-            </a:solidFill>
-            <a:prstDash val="solid"/>
-          </a:ln>
-        </p:spPr>
-      </p:sp>
-      <p:sp>
-        <p:nvSpPr>
-          <p:cNvPr id="4" name="Text 2"/>
-          <p:cNvSpPr/>
-          <p:nvPr/>
-        </p:nvSpPr>
-        <p:spPr>
-          <a:xfrm>
-            <a:off x="640080" y="1097280"/>
-            <a:ext cx="3474720" cy="411480"/>
-          </a:xfrm>
-          <a:prstGeom prst="rect">
-            <a:avLst/>
-          </a:prstGeom>
-          <a:noFill/>
-          <a:ln/>
-        </p:spPr>
-        <p:txBody>
-          <a:bodyPr wrap="square" rtlCol="0" anchor="ctr"/>
-          <a:lstStyle/>
-          <a:p>
-            <a:pPr marL="0" indent="0" algn="ctr">
-              <a:buNone/>
-            </a:pPr>
-            <a:r>
-              <a:rPr lang="en-US" sz="1900" b="1" dirty="0">
-                <a:solidFill>
-                  <a:srgbClr val="64748B"/>
-                </a:solidFill>
-                <a:latin typeface="Calibri" pitchFamily="34" charset="0"/>
-                <a:ea typeface="Calibri" pitchFamily="34" charset="-122"/>
-                <a:cs typeface="Calibri" pitchFamily="34" charset="-120"/>
-              </a:rPr>
-              <a:t>Simulation</a:t>
-            </a:r>
-            <a:endParaRPr lang="en-US" sz="1900" dirty="0"/>
-          </a:p>
-        </p:txBody>
-      </p:sp>
-      <p:sp>
-        <p:nvSpPr>
-          <p:cNvPr id="5" name="Text 3"/>
-          <p:cNvSpPr/>
-          <p:nvPr/>
-        </p:nvSpPr>
-        <p:spPr>
-          <a:xfrm>
-            <a:off x="640080" y="1600200"/>
-            <a:ext cx="3474720" cy="1280160"/>
-          </a:xfrm>
-          <a:prstGeom prst="rect">
-            <a:avLst/>
-          </a:prstGeom>
-          <a:noFill/>
-          <a:ln/>
-        </p:spPr>
-        <p:txBody>
-          <a:bodyPr wrap="square" rtlCol="0" anchor="t"/>
-          <a:lstStyle/>
-          <a:p>
-            <a:pPr marL="342900" indent="-342900">
-              <a:buSzPct val="100000"/>
-              <a:buChar char="•"/>
-            </a:pPr>
-            <a:r>
-              <a:rPr lang="en-US" sz="1300" dirty="0">
-                <a:solidFill>
-                  <a:srgbClr val="64748B"/>
-                </a:solidFill>
-                <a:latin typeface="Calibri" pitchFamily="34" charset="0"/>
-                <a:ea typeface="Calibri" pitchFamily="34" charset="-122"/>
-                <a:cs typeface="Calibri" pitchFamily="34" charset="-120"/>
-              </a:rPr>
-              <a:t>Runs many random scenarios</a:t>
-            </a:r>
-            <a:endParaRPr lang="en-US" sz="1300" dirty="0"/>
-          </a:p>
-          <a:p>
-            <a:pPr marL="342900" indent="-342900">
-              <a:buSzPct val="100000"/>
-              <a:buChar char="•"/>
-            </a:pPr>
-            <a:r>
-              <a:rPr lang="en-US" sz="1300" dirty="0">
-                <a:solidFill>
-                  <a:srgbClr val="64748B"/>
-                </a:solidFill>
-                <a:latin typeface="Calibri" pitchFamily="34" charset="0"/>
-                <a:ea typeface="Calibri" pitchFamily="34" charset="-122"/>
-                <a:cs typeface="Calibri" pitchFamily="34" charset="-120"/>
-              </a:rPr>
-              <a:t>Results are statistical estimates</a:t>
-            </a:r>
-            <a:endParaRPr lang="en-US" sz="1300" dirty="0"/>
-          </a:p>
-          <a:p>
-            <a:pPr marL="342900" indent="-342900">
-              <a:buSzPct val="100000"/>
-              <a:buChar char="•"/>
-            </a:pPr>
-            <a:r>
-              <a:rPr lang="en-US" sz="1300" dirty="0">
-                <a:solidFill>
-                  <a:srgbClr val="64748B"/>
-                </a:solidFill>
-                <a:latin typeface="Calibri" pitchFamily="34" charset="0"/>
-                <a:ea typeface="Calibri" pitchFamily="34" charset="-122"/>
-                <a:cs typeface="Calibri" pitchFamily="34" charset="-120"/>
-              </a:rPr>
-              <a:t>Cannot guarantee optimality</a:t>
-            </a:r>
-            <a:endParaRPr lang="en-US" sz="1300" dirty="0"/>
-          </a:p>
-          <a:p>
-            <a:pPr marL="342900" indent="-342900">
-              <a:buSzPct val="100000"/>
-              <a:buChar char="•"/>
-            </a:pPr>
-            <a:r>
-              <a:rPr lang="en-US" sz="1300" dirty="0">
-                <a:solidFill>
-                  <a:srgbClr val="64748B"/>
-                </a:solidFill>
-                <a:latin typeface="Calibri" pitchFamily="34" charset="0"/>
-                <a:ea typeface="Calibri" pitchFamily="34" charset="-122"/>
-                <a:cs typeface="Calibri" pitchFamily="34" charset="-120"/>
-              </a:rPr>
-              <a:t>May miss rare but critical events</a:t>
-            </a:r>
-            <a:endParaRPr lang="en-US" sz="1300" dirty="0"/>
-          </a:p>
-          <a:p>
-            <a:pPr marL="342900" indent="-342900">
-              <a:buSzPct val="100000"/>
-              <a:buChar char="•"/>
-            </a:pPr>
-            <a:r>
-              <a:rPr lang="en-US" sz="1300" dirty="0">
-                <a:solidFill>
-                  <a:srgbClr val="64748B"/>
-                </a:solidFill>
-                <a:latin typeface="Calibri" pitchFamily="34" charset="0"/>
-                <a:ea typeface="Calibri" pitchFamily="34" charset="-122"/>
-                <a:cs typeface="Calibri" pitchFamily="34" charset="-120"/>
-              </a:rPr>
-              <a:t>Output: average / distribution</a:t>
-            </a:r>
-            <a:endParaRPr lang="en-US" sz="1300" dirty="0"/>
-          </a:p>
-        </p:txBody>
-      </p:sp>
-      <p:sp>
-        <p:nvSpPr>
-          <p:cNvPr id="6" name="Shape 4"/>
-          <p:cNvSpPr/>
-          <p:nvPr/>
-        </p:nvSpPr>
-        <p:spPr>
-          <a:xfrm>
-            <a:off x="4160520" y="1645920"/>
-            <a:ext cx="731520" cy="731520"/>
-          </a:xfrm>
-          <a:prstGeom prst="ellipse">
-            <a:avLst/>
-          </a:prstGeom>
-          <a:solidFill>
-            <a:srgbClr val="21295C"/>
-          </a:solidFill>
-          <a:ln w="12700">
-            <a:solidFill>
-              <a:srgbClr val="21295C"/>
-            </a:solidFill>
-            <a:prstDash val="solid"/>
-          </a:ln>
-        </p:spPr>
-      </p:sp>
-      <p:sp>
-        <p:nvSpPr>
-          <p:cNvPr id="7" name="Text 5"/>
-          <p:cNvSpPr/>
-          <p:nvPr/>
-        </p:nvSpPr>
-        <p:spPr>
-          <a:xfrm>
-            <a:off x="4160520" y="1645920"/>
-            <a:ext cx="731520" cy="731520"/>
-          </a:xfrm>
-          <a:prstGeom prst="rect">
-            <a:avLst/>
-          </a:prstGeom>
-          <a:noFill/>
-          <a:ln/>
-        </p:spPr>
-        <p:txBody>
-          <a:bodyPr wrap="square" lIns="0" tIns="0" rIns="0" bIns="0" rtlCol="0" anchor="ctr"/>
-          <a:lstStyle/>
-          <a:p>
-            <a:pPr marL="0" indent="0" algn="ctr">
-              <a:buNone/>
-            </a:pPr>
-            <a:r>
-              <a:rPr lang="en-US" sz="1300" b="1" dirty="0">
-                <a:solidFill>
-                  <a:srgbClr val="FFFFFF"/>
-                </a:solidFill>
-                <a:latin typeface="Calibri" pitchFamily="34" charset="0"/>
-                <a:ea typeface="Calibri" pitchFamily="34" charset="-122"/>
-                <a:cs typeface="Calibri" pitchFamily="34" charset="-120"/>
-              </a:rPr>
-              <a:t>VS</a:t>
-            </a:r>
-            <a:endParaRPr lang="en-US" sz="1300" dirty="0"/>
-          </a:p>
-        </p:txBody>
-      </p:sp>
-      <p:sp>
-        <p:nvSpPr>
-          <p:cNvPr id="8" name="Shape 6"/>
-          <p:cNvSpPr/>
-          <p:nvPr/>
-        </p:nvSpPr>
-        <p:spPr>
-          <a:xfrm>
-            <a:off x="4754880" y="1005840"/>
-            <a:ext cx="3840480" cy="2011680"/>
-          </a:xfrm>
-          <a:prstGeom prst="rect">
-            <a:avLst/>
-          </a:prstGeom>
-          <a:solidFill>
-            <a:srgbClr val="E8F4FF"/>
-          </a:solidFill>
-          <a:ln w="25400">
-            <a:solidFill>
-              <a:srgbClr val="1C7293"/>
+              <a:srgbClr val="F4F7FA"/>
             </a:solidFill>
             <a:prstDash val="solid"/>
           </a:ln>
           <a:effectLst>
-            <a:outerShdw blurRad="101600" dist="25400" dir="8100000" algn="bl" rotWithShape="0">
+            <a:outerShdw blurRad="76200" dist="25400" dir="5400000" algn="bl" rotWithShape="0">
               <a:srgbClr val="000000">
-                <a:alpha val="10000"/>
+                <a:alpha val="12000"/>
               </a:srgbClr>
             </a:outerShdw>
           </a:effectLst>
         </p:spPr>
-      </p:sp>
-      <p:sp>
-        <p:nvSpPr>
-          <p:cNvPr id="9" name="Text 7"/>
-          <p:cNvSpPr/>
-          <p:nvPr/>
-        </p:nvSpPr>
-        <p:spPr>
-          <a:xfrm>
-            <a:off x="4937760" y="1097280"/>
-            <a:ext cx="3474720" cy="411480"/>
+        <p:txBody>
+          <a:bodyPr/>
+          <a:lstStyle/>
+          <a:p>
+            <a:endParaRPr lang="fr-FR"/>
+          </a:p>
+        </p:txBody>
+      </p:sp>
+      <p:sp>
+        <p:nvSpPr>
+          <p:cNvPr id="4" name="Text 2"/>
+          <p:cNvSpPr/>
+          <p:nvPr/>
+        </p:nvSpPr>
+        <p:spPr>
+          <a:xfrm>
+            <a:off x="594360" y="1143000"/>
+            <a:ext cx="3566160" cy="320040"/>
           </a:xfrm>
           <a:prstGeom prst="rect">
             <a:avLst/>
@@ -3742,37 +4631,37 @@
           <a:ln/>
         </p:spPr>
         <p:txBody>
-          <a:bodyPr wrap="square" rtlCol="0" anchor="ctr"/>
-          <a:lstStyle/>
-          <a:p>
-            <a:pPr marL="0" indent="0" algn="ctr">
+          <a:bodyPr wrap="square" lIns="0" tIns="0" rIns="0" bIns="0" rtlCol="0" anchor="ctr"/>
+          <a:lstStyle/>
+          <a:p>
+            <a:pPr marL="0" indent="0">
               <a:buNone/>
             </a:pPr>
             <a:r>
-              <a:rPr lang="en-US" sz="1900" b="1" dirty="0">
-                <a:solidFill>
-                  <a:srgbClr val="065A82"/>
-                </a:solidFill>
-                <a:latin typeface="Calibri" pitchFamily="34" charset="0"/>
-                <a:ea typeface="Calibri" pitchFamily="34" charset="-122"/>
-                <a:cs typeface="Calibri" pitchFamily="34" charset="-120"/>
-              </a:rPr>
-              <a:t>Formal Verification</a:t>
-            </a:r>
-            <a:endParaRPr lang="en-US" sz="1900" dirty="0"/>
-          </a:p>
-        </p:txBody>
-      </p:sp>
-      <p:sp>
-        <p:nvSpPr>
-          <p:cNvPr id="10" name="Text 8"/>
-          <p:cNvSpPr/>
-          <p:nvPr/>
-        </p:nvSpPr>
-        <p:spPr>
-          <a:xfrm>
-            <a:off x="4937760" y="1600200"/>
-            <a:ext cx="3474720" cy="1280160"/>
+              <a:rPr lang="en-US" sz="1500" b="1" dirty="0">
+                <a:solidFill>
+                  <a:srgbClr val="7098B8"/>
+                </a:solidFill>
+                <a:latin typeface="Calibri" pitchFamily="34" charset="0"/>
+                <a:ea typeface="Calibri" pitchFamily="34" charset="-122"/>
+                <a:cs typeface="Calibri" pitchFamily="34" charset="-120"/>
+              </a:rPr>
+              <a:t>Simulation</a:t>
+            </a:r>
+            <a:endParaRPr lang="en-US" sz="1500" dirty="0"/>
+          </a:p>
+        </p:txBody>
+      </p:sp>
+      <p:sp>
+        <p:nvSpPr>
+          <p:cNvPr id="5" name="Text 3"/>
+          <p:cNvSpPr/>
+          <p:nvPr/>
+        </p:nvSpPr>
+        <p:spPr>
+          <a:xfrm>
+            <a:off x="594360" y="1508760"/>
+            <a:ext cx="3566160" cy="2286000"/>
           </a:xfrm>
           <a:prstGeom prst="rect">
             <a:avLst/>
@@ -3781,89 +4670,311 @@
           <a:ln/>
         </p:spPr>
         <p:txBody>
-          <a:bodyPr wrap="square" rtlCol="0" anchor="t"/>
-          <a:lstStyle/>
-          <a:p>
-            <a:pPr marL="342900" indent="-342900">
+          <a:bodyPr wrap="square" lIns="0" tIns="0" rIns="0" bIns="0" rtlCol="0" anchor="t"/>
+          <a:lstStyle/>
+          <a:p>
+            <a:pPr marL="177800" indent="-177800">
+              <a:spcAft>
+                <a:spcPts val="800"/>
+              </a:spcAft>
               <a:buSzPct val="100000"/>
               <a:buChar char="•"/>
             </a:pPr>
             <a:r>
-              <a:rPr lang="en-US" sz="1300" dirty="0">
-                <a:solidFill>
-                  <a:srgbClr val="1E293B"/>
-                </a:solidFill>
-                <a:latin typeface="Calibri" pitchFamily="34" charset="0"/>
-                <a:ea typeface="Calibri" pitchFamily="34" charset="-122"/>
-                <a:cs typeface="Calibri" pitchFamily="34" charset="-120"/>
-              </a:rPr>
-              <a:t>Exhaustively explores all states</a:t>
-            </a:r>
-            <a:endParaRPr lang="en-US" sz="1300" dirty="0"/>
-          </a:p>
-          <a:p>
-            <a:pPr marL="342900" indent="-342900">
+              <a:rPr lang="en-US" sz="1200" dirty="0">
+                <a:solidFill>
+                  <a:srgbClr val="445566"/>
+                </a:solidFill>
+                <a:latin typeface="Calibri" pitchFamily="34" charset="0"/>
+                <a:ea typeface="Calibri" pitchFamily="34" charset="-122"/>
+                <a:cs typeface="Calibri" pitchFamily="34" charset="-120"/>
+              </a:rPr>
+              <a:t>Runs many random scenarios</a:t>
+            </a:r>
+            <a:endParaRPr lang="en-US" sz="1200" dirty="0"/>
+          </a:p>
+          <a:p>
+            <a:pPr marL="177800" indent="-177800">
+              <a:spcAft>
+                <a:spcPts val="800"/>
+              </a:spcAft>
               <a:buSzPct val="100000"/>
               <a:buChar char="•"/>
             </a:pPr>
             <a:r>
-              <a:rPr lang="en-US" sz="1300" dirty="0">
-                <a:solidFill>
-                  <a:srgbClr val="1E293B"/>
-                </a:solidFill>
-                <a:latin typeface="Calibri" pitchFamily="34" charset="0"/>
-                <a:ea typeface="Calibri" pitchFamily="34" charset="-122"/>
-                <a:cs typeface="Calibri" pitchFamily="34" charset="-120"/>
-              </a:rPr>
-              <a:t>Results are mathematical guarantees</a:t>
-            </a:r>
-            <a:endParaRPr lang="en-US" sz="1300" dirty="0"/>
-          </a:p>
-          <a:p>
-            <a:pPr marL="342900" indent="-342900">
+              <a:rPr lang="en-US" sz="1200" dirty="0">
+                <a:solidFill>
+                  <a:srgbClr val="445566"/>
+                </a:solidFill>
+                <a:latin typeface="Calibri" pitchFamily="34" charset="0"/>
+                <a:ea typeface="Calibri" pitchFamily="34" charset="-122"/>
+                <a:cs typeface="Calibri" pitchFamily="34" charset="-120"/>
+              </a:rPr>
+              <a:t>Results are statistical estimates</a:t>
+            </a:r>
+            <a:endParaRPr lang="en-US" sz="1200" dirty="0"/>
+          </a:p>
+          <a:p>
+            <a:pPr marL="177800" indent="-177800">
+              <a:spcAft>
+                <a:spcPts val="800"/>
+              </a:spcAft>
               <a:buSzPct val="100000"/>
               <a:buChar char="•"/>
             </a:pPr>
             <a:r>
-              <a:rPr lang="en-US" sz="1300" dirty="0">
-                <a:solidFill>
-                  <a:srgbClr val="1E293B"/>
-                </a:solidFill>
-                <a:latin typeface="Calibri" pitchFamily="34" charset="0"/>
-                <a:ea typeface="Calibri" pitchFamily="34" charset="-122"/>
-                <a:cs typeface="Calibri" pitchFamily="34" charset="-120"/>
-              </a:rPr>
-              <a:t>Computes provably optimal strategies</a:t>
-            </a:r>
-            <a:endParaRPr lang="en-US" sz="1300" dirty="0"/>
-          </a:p>
-          <a:p>
-            <a:pPr marL="342900" indent="-342900">
+              <a:rPr lang="en-US" sz="1200" dirty="0">
+                <a:solidFill>
+                  <a:srgbClr val="445566"/>
+                </a:solidFill>
+                <a:latin typeface="Calibri" pitchFamily="34" charset="0"/>
+                <a:ea typeface="Calibri" pitchFamily="34" charset="-122"/>
+                <a:cs typeface="Calibri" pitchFamily="34" charset="-120"/>
+              </a:rPr>
+              <a:t>Cannot guarantee optimality</a:t>
+            </a:r>
+            <a:endParaRPr lang="en-US" sz="1200" dirty="0"/>
+          </a:p>
+          <a:p>
+            <a:pPr marL="177800" indent="-177800">
+              <a:spcAft>
+                <a:spcPts val="800"/>
+              </a:spcAft>
               <a:buSzPct val="100000"/>
               <a:buChar char="•"/>
             </a:pPr>
             <a:r>
-              <a:rPr lang="en-US" sz="1300" dirty="0">
-                <a:solidFill>
-                  <a:srgbClr val="1E293B"/>
-                </a:solidFill>
-                <a:latin typeface="Calibri" pitchFamily="34" charset="0"/>
-                <a:ea typeface="Calibri" pitchFamily="34" charset="-122"/>
-                <a:cs typeface="Calibri" pitchFamily="34" charset="-120"/>
-              </a:rPr>
-              <a:t>Handles adversarial conditions</a:t>
-            </a:r>
-            <a:endParaRPr lang="en-US" sz="1300" dirty="0"/>
-          </a:p>
-          <a:p>
-            <a:pPr marL="342900" indent="-342900">
+              <a:rPr lang="en-US" sz="1200" dirty="0">
+                <a:solidFill>
+                  <a:srgbClr val="445566"/>
+                </a:solidFill>
+                <a:latin typeface="Calibri" pitchFamily="34" charset="0"/>
+                <a:ea typeface="Calibri" pitchFamily="34" charset="-122"/>
+                <a:cs typeface="Calibri" pitchFamily="34" charset="-120"/>
+              </a:rPr>
+              <a:t>May miss rare but critical events</a:t>
+            </a:r>
+            <a:endParaRPr lang="en-US" sz="1200" dirty="0"/>
+          </a:p>
+          <a:p>
+            <a:pPr marL="177800" indent="-177800">
+              <a:spcAft>
+                <a:spcPts val="800"/>
+              </a:spcAft>
               <a:buSzPct val="100000"/>
               <a:buChar char="•"/>
             </a:pPr>
             <a:r>
-              <a:rPr lang="en-US" sz="1300" dirty="0">
-                <a:solidFill>
-                  <a:srgbClr val="1E293B"/>
+              <a:rPr lang="en-US" sz="1200" dirty="0">
+                <a:solidFill>
+                  <a:srgbClr val="445566"/>
+                </a:solidFill>
+                <a:latin typeface="Calibri" pitchFamily="34" charset="0"/>
+                <a:ea typeface="Calibri" pitchFamily="34" charset="-122"/>
+                <a:cs typeface="Calibri" pitchFamily="34" charset="-120"/>
+              </a:rPr>
+              <a:t>Output: average / distribution</a:t>
+            </a:r>
+            <a:endParaRPr lang="en-US" sz="1200" dirty="0"/>
+          </a:p>
+        </p:txBody>
+      </p:sp>
+      <p:sp>
+        <p:nvSpPr>
+          <p:cNvPr id="6" name="Shape 4"/>
+          <p:cNvSpPr/>
+          <p:nvPr/>
+        </p:nvSpPr>
+        <p:spPr>
+          <a:xfrm>
+            <a:off x="4617720" y="1005840"/>
+            <a:ext cx="4114800" cy="2926080"/>
+          </a:xfrm>
+          <a:prstGeom prst="roundRect">
+            <a:avLst>
+              <a:gd name="adj" fmla="val 2500"/>
+            </a:avLst>
+          </a:prstGeom>
+          <a:solidFill>
+            <a:srgbClr val="065A82"/>
+          </a:solidFill>
+          <a:ln w="12700">
+            <a:solidFill>
+              <a:srgbClr val="065A82"/>
+            </a:solidFill>
+            <a:prstDash val="solid"/>
+          </a:ln>
+          <a:effectLst>
+            <a:outerShdw blurRad="76200" dist="25400" dir="5400000" algn="bl" rotWithShape="0">
+              <a:srgbClr val="000000">
+                <a:alpha val="12000"/>
+              </a:srgbClr>
+            </a:outerShdw>
+          </a:effectLst>
+        </p:spPr>
+        <p:txBody>
+          <a:bodyPr/>
+          <a:lstStyle/>
+          <a:p>
+            <a:endParaRPr lang="fr-FR"/>
+          </a:p>
+        </p:txBody>
+      </p:sp>
+      <p:sp>
+        <p:nvSpPr>
+          <p:cNvPr id="7" name="Text 5"/>
+          <p:cNvSpPr/>
+          <p:nvPr/>
+        </p:nvSpPr>
+        <p:spPr>
+          <a:xfrm>
+            <a:off x="4800600" y="1143000"/>
+            <a:ext cx="3749040" cy="320040"/>
+          </a:xfrm>
+          <a:prstGeom prst="rect">
+            <a:avLst/>
+          </a:prstGeom>
+          <a:noFill/>
+          <a:ln/>
+        </p:spPr>
+        <p:txBody>
+          <a:bodyPr wrap="square" lIns="0" tIns="0" rIns="0" bIns="0" rtlCol="0" anchor="ctr"/>
+          <a:lstStyle/>
+          <a:p>
+            <a:pPr marL="0" indent="0">
+              <a:buNone/>
+            </a:pPr>
+            <a:r>
+              <a:rPr lang="en-US" sz="1500" b="1" dirty="0">
+                <a:solidFill>
+                  <a:srgbClr val="02C39A"/>
+                </a:solidFill>
+                <a:latin typeface="Calibri" pitchFamily="34" charset="0"/>
+                <a:ea typeface="Calibri" pitchFamily="34" charset="-122"/>
+                <a:cs typeface="Calibri" pitchFamily="34" charset="-120"/>
+              </a:rPr>
+              <a:t>Formal Verification</a:t>
+            </a:r>
+            <a:endParaRPr lang="en-US" sz="1500" dirty="0"/>
+          </a:p>
+        </p:txBody>
+      </p:sp>
+      <p:sp>
+        <p:nvSpPr>
+          <p:cNvPr id="8" name="Text 6"/>
+          <p:cNvSpPr/>
+          <p:nvPr/>
+        </p:nvSpPr>
+        <p:spPr>
+          <a:xfrm>
+            <a:off x="4800600" y="1508760"/>
+            <a:ext cx="3749040" cy="2286000"/>
+          </a:xfrm>
+          <a:prstGeom prst="rect">
+            <a:avLst/>
+          </a:prstGeom>
+          <a:noFill/>
+          <a:ln/>
+        </p:spPr>
+        <p:txBody>
+          <a:bodyPr wrap="square" lIns="0" tIns="0" rIns="0" bIns="0" rtlCol="0" anchor="t"/>
+          <a:lstStyle/>
+          <a:p>
+            <a:pPr marL="177800" indent="-177800">
+              <a:spcAft>
+                <a:spcPts val="800"/>
+              </a:spcAft>
+              <a:buSzPct val="100000"/>
+              <a:buChar char="•"/>
+            </a:pPr>
+            <a:r>
+              <a:rPr lang="en-US" sz="1200" dirty="0">
+                <a:solidFill>
+                  <a:srgbClr val="FFFFFF"/>
+                </a:solidFill>
+                <a:latin typeface="Calibri" pitchFamily="34" charset="0"/>
+                <a:ea typeface="Calibri" pitchFamily="34" charset="-122"/>
+                <a:cs typeface="Calibri" pitchFamily="34" charset="-120"/>
+              </a:rPr>
+              <a:t>Exhaustively explores all states</a:t>
+            </a:r>
+            <a:endParaRPr lang="en-US" sz="1200" dirty="0"/>
+          </a:p>
+          <a:p>
+            <a:pPr marL="177800" indent="-177800">
+              <a:spcAft>
+                <a:spcPts val="800"/>
+              </a:spcAft>
+              <a:buSzPct val="100000"/>
+              <a:buChar char="•"/>
+            </a:pPr>
+            <a:r>
+              <a:rPr lang="en-US" sz="1200" dirty="0">
+                <a:solidFill>
+                  <a:srgbClr val="FFFFFF"/>
+                </a:solidFill>
+                <a:latin typeface="Calibri" pitchFamily="34" charset="0"/>
+                <a:ea typeface="Calibri" pitchFamily="34" charset="-122"/>
+                <a:cs typeface="Calibri" pitchFamily="34" charset="-120"/>
+              </a:rPr>
+              <a:t>Results are mathematical guarantees</a:t>
+            </a:r>
+            <a:endParaRPr lang="en-US" sz="1200" dirty="0"/>
+          </a:p>
+          <a:p>
+            <a:pPr marL="177800" indent="-177800">
+              <a:spcAft>
+                <a:spcPts val="800"/>
+              </a:spcAft>
+              <a:buSzPct val="100000"/>
+              <a:buChar char="•"/>
+            </a:pPr>
+            <a:r>
+              <a:rPr lang="en-US" sz="1200" dirty="0">
+                <a:solidFill>
+                  <a:srgbClr val="FFFFFF"/>
+                </a:solidFill>
+                <a:latin typeface="Calibri" pitchFamily="34" charset="0"/>
+                <a:ea typeface="Calibri" pitchFamily="34" charset="-122"/>
+                <a:cs typeface="Calibri" pitchFamily="34" charset="-120"/>
+              </a:rPr>
+              <a:t>Computes provably optimal strategies</a:t>
+            </a:r>
+            <a:endParaRPr lang="en-US" sz="1200" dirty="0"/>
+          </a:p>
+          <a:p>
+            <a:pPr marL="177800" indent="-177800">
+              <a:spcAft>
+                <a:spcPts val="800"/>
+              </a:spcAft>
+              <a:buSzPct val="100000"/>
+              <a:buChar char="•"/>
+            </a:pPr>
+            <a:r>
+              <a:rPr lang="en-US" sz="1200" dirty="0">
+                <a:solidFill>
+                  <a:srgbClr val="FFFFFF"/>
+                </a:solidFill>
+                <a:latin typeface="Calibri" pitchFamily="34" charset="0"/>
+                <a:ea typeface="Calibri" pitchFamily="34" charset="-122"/>
+                <a:cs typeface="Calibri" pitchFamily="34" charset="-120"/>
+              </a:rPr>
+              <a:t>Handles adversarial conditions</a:t>
+            </a:r>
+            <a:endParaRPr lang="en-US" sz="1200" dirty="0"/>
+          </a:p>
+          <a:p>
+            <a:pPr marL="177800" indent="-177800">
+              <a:spcAft>
+                <a:spcPts val="800"/>
+              </a:spcAft>
+              <a:buSzPct val="100000"/>
+              <a:buChar char="•"/>
+            </a:pPr>
+            <a:r>
+              <a:rPr lang="en-US" sz="1200" dirty="0">
+                <a:solidFill>
+                  <a:srgbClr val="FFFFFF"/>
                 </a:solidFill>
                 <a:latin typeface="Calibri" pitchFamily="34" charset="0"/>
                 <a:ea typeface="Calibri" pitchFamily="34" charset="-122"/>
@@ -3871,7 +4982,7 @@
               </a:rPr>
               <a:t>Output: exact probability / value</a:t>
             </a:r>
-            <a:endParaRPr lang="en-US" sz="1300" dirty="0"/>
+            <a:endParaRPr lang="en-US" sz="1200" dirty="0"/>
           </a:p>
         </p:txBody>
       </p:sp>
@@ -3884,6 +4995,66 @@
 </file>
 
 <file path=ppt/slides/slide4.xml><?xml version="1.0" encoding="utf-8"?>
+<p:sld xmlns:a="http://schemas.openxmlformats.org/drawingml/2006/main" xmlns:r="http://schemas.openxmlformats.org/officeDocument/2006/relationships" xmlns:p="http://schemas.openxmlformats.org/presentationml/2006/main">
+  <p:cSld>
+    <p:spTree>
+      <p:nvGrpSpPr>
+        <p:cNvPr id="1" name=""/>
+        <p:cNvGrpSpPr/>
+        <p:nvPr/>
+      </p:nvGrpSpPr>
+      <p:grpSpPr>
+        <a:xfrm>
+          <a:off x="0" y="0"/>
+          <a:ext cx="0" cy="0"/>
+          <a:chOff x="0" y="0"/>
+          <a:chExt cx="0" cy="0"/>
+        </a:xfrm>
+      </p:grpSpPr>
+      <p:pic>
+        <p:nvPicPr>
+          <p:cNvPr id="3" name="Image 2">
+            <a:extLst>
+              <a:ext uri="{FF2B5EF4-FFF2-40B4-BE49-F238E27FC236}">
+                <a16:creationId xmlns:a16="http://schemas.microsoft.com/office/drawing/2014/main" id="{2B06DBDF-8C0E-434C-0A90-15D15EF1BA1E}"/>
+              </a:ext>
+            </a:extLst>
+          </p:cNvPr>
+          <p:cNvPicPr>
+            <a:picLocks noChangeAspect="1"/>
+          </p:cNvPicPr>
+          <p:nvPr/>
+        </p:nvPicPr>
+        <p:blipFill>
+          <a:blip r:embed="rId2"/>
+          <a:stretch>
+            <a:fillRect/>
+          </a:stretch>
+        </p:blipFill>
+        <p:spPr>
+          <a:xfrm>
+            <a:off x="0" y="0"/>
+            <a:ext cx="9144000" cy="4209143"/>
+          </a:xfrm>
+          <a:prstGeom prst="rect">
+            <a:avLst/>
+          </a:prstGeom>
+        </p:spPr>
+      </p:pic>
+    </p:spTree>
+    <p:extLst>
+      <p:ext uri="{BB962C8B-B14F-4D97-AF65-F5344CB8AC3E}">
+        <p14:creationId xmlns:p14="http://schemas.microsoft.com/office/powerpoint/2010/main" val="2961879775"/>
+      </p:ext>
+    </p:extLst>
+  </p:cSld>
+  <p:clrMapOvr>
+    <a:masterClrMapping/>
+  </p:clrMapOvr>
+</p:sld>
+</file>
+
+<file path=ppt/slides/slide5.xml><?xml version="1.0" encoding="utf-8"?>
 <p:sld xmlns:a="http://schemas.openxmlformats.org/drawingml/2006/main" xmlns:r="http://schemas.openxmlformats.org/officeDocument/2006/relationships" xmlns:p="http://schemas.openxmlformats.org/presentationml/2006/main">
   <p:cSld name="Slide 4">
     <p:bg>
@@ -3916,8 +5087,8 @@
         </p:nvSpPr>
         <p:spPr>
           <a:xfrm>
-            <a:off x="548640" y="228600"/>
-            <a:ext cx="8046720" cy="594360"/>
+            <a:off x="411480" y="292608"/>
+            <a:ext cx="8321040" cy="502920"/>
           </a:xfrm>
           <a:prstGeom prst="rect">
             <a:avLst/>
@@ -3929,13 +5100,13 @@
           <a:bodyPr wrap="square" rtlCol="0" anchor="ctr"/>
           <a:lstStyle/>
           <a:p>
-            <a:pPr marL="0" indent="0">
+            <a:pPr marL="0" indent="0" algn="l">
               <a:buNone/>
             </a:pPr>
             <a:r>
-              <a:rPr lang="en-US" sz="2700" b="1" dirty="0">
-                <a:solidFill>
-                  <a:srgbClr val="1E293B"/>
+              <a:rPr lang="en-US" sz="2400" b="1" dirty="0">
+                <a:solidFill>
+                  <a:srgbClr val="1B2B4B"/>
                 </a:solidFill>
                 <a:latin typeface="Calibri" pitchFamily="34" charset="0"/>
                 <a:ea typeface="Calibri" pitchFamily="34" charset="-122"/>
@@ -3943,7 +5114,7 @@
               </a:rPr>
               <a:t>First Approach: Concurrent Stochastic Game (CSG)</a:t>
             </a:r>
-            <a:endParaRPr lang="en-US" sz="2700" dirty="0"/>
+            <a:endParaRPr lang="en-US" sz="2400" dirty="0"/>
           </a:p>
         </p:txBody>
       </p:sp>
@@ -3955,11 +5126,13 @@
         </p:nvSpPr>
         <p:spPr>
           <a:xfrm>
-            <a:off x="457200" y="1005840"/>
-            <a:ext cx="2606040" cy="1234440"/>
-          </a:xfrm>
-          <a:prstGeom prst="rect">
-            <a:avLst/>
+            <a:off x="411480" y="960120"/>
+            <a:ext cx="2651760" cy="1234440"/>
+          </a:xfrm>
+          <a:prstGeom prst="roundRect">
+            <a:avLst>
+              <a:gd name="adj" fmla="val 5926"/>
+            </a:avLst>
           </a:prstGeom>
           <a:solidFill>
             <a:srgbClr val="065A82"/>
@@ -3971,13 +5144,20 @@
             <a:prstDash val="solid"/>
           </a:ln>
           <a:effectLst>
-            <a:outerShdw blurRad="101600" dist="25400" dir="8100000" algn="bl" rotWithShape="0">
+            <a:outerShdw blurRad="76200" dist="25400" dir="5400000" algn="bl" rotWithShape="0">
               <a:srgbClr val="000000">
-                <a:alpha val="10000"/>
+                <a:alpha val="12000"/>
               </a:srgbClr>
             </a:outerShdw>
           </a:effectLst>
         </p:spPr>
+        <p:txBody>
+          <a:bodyPr/>
+          <a:lstStyle/>
+          <a:p>
+            <a:endParaRPr lang="fr-FR"/>
+          </a:p>
+        </p:txBody>
       </p:sp>
       <p:sp>
         <p:nvSpPr>
@@ -3987,8 +5167,8 @@
         </p:nvSpPr>
         <p:spPr>
           <a:xfrm>
-            <a:off x="457200" y="1005840"/>
-            <a:ext cx="2606040" cy="502920"/>
+            <a:off x="548640" y="1051560"/>
+            <a:ext cx="2377440" cy="320040"/>
           </a:xfrm>
           <a:prstGeom prst="rect">
             <a:avLst/>
@@ -4000,11 +5180,11 @@
           <a:bodyPr wrap="square" lIns="0" tIns="0" rIns="0" bIns="0" rtlCol="0" anchor="ctr"/>
           <a:lstStyle/>
           <a:p>
-            <a:pPr marL="0" indent="0" algn="ctr">
+            <a:pPr marL="0" indent="0">
               <a:buNone/>
             </a:pPr>
             <a:r>
-              <a:rPr lang="en-US" sz="1700" b="1" dirty="0">
+              <a:rPr lang="en-US" sz="1400" b="1" dirty="0">
                 <a:solidFill>
                   <a:srgbClr val="FFFFFF"/>
                 </a:solidFill>
@@ -4014,7 +5194,7 @@
               </a:rPr>
               <a:t>Persona</a:t>
             </a:r>
-            <a:endParaRPr lang="en-US" sz="1700" dirty="0"/>
+            <a:endParaRPr lang="en-US" sz="1400" dirty="0"/>
           </a:p>
         </p:txBody>
       </p:sp>
@@ -4026,8 +5206,8 @@
         </p:nvSpPr>
         <p:spPr>
           <a:xfrm>
-            <a:off x="548640" y="1508760"/>
-            <a:ext cx="2423160" cy="685800"/>
+            <a:off x="548640" y="1371600"/>
+            <a:ext cx="2377440" cy="731520"/>
           </a:xfrm>
           <a:prstGeom prst="rect">
             <a:avLst/>
@@ -4036,16 +5216,16 @@
           <a:ln/>
         </p:spPr>
         <p:txBody>
-          <a:bodyPr wrap="square" rtlCol="0" anchor="ctr"/>
-          <a:lstStyle/>
-          <a:p>
-            <a:pPr marL="0" indent="0" algn="ctr">
+          <a:bodyPr wrap="square" lIns="0" tIns="0" rIns="0" bIns="0" rtlCol="0" anchor="ctr"/>
+          <a:lstStyle/>
+          <a:p>
+            <a:pPr marL="0" indent="0">
               <a:buNone/>
             </a:pPr>
             <a:r>
               <a:rPr lang="en-US" sz="1100" dirty="0">
                 <a:solidFill>
-                  <a:srgbClr val="FFFFFF"/>
+                  <a:srgbClr val="E8ECF5"/>
                 </a:solidFill>
                 <a:latin typeface="Calibri" pitchFamily="34" charset="0"/>
                 <a:ea typeface="Calibri" pitchFamily="34" charset="-122"/>
@@ -4056,13 +5236,13 @@
             <a:endParaRPr lang="en-US" sz="1100" dirty="0"/>
           </a:p>
           <a:p>
-            <a:pPr marL="0" indent="0" algn="ctr">
+            <a:pPr marL="0" indent="0">
               <a:buNone/>
             </a:pPr>
             <a:r>
               <a:rPr lang="en-US" sz="1100" dirty="0">
                 <a:solidFill>
-                  <a:srgbClr val="FFFFFF"/>
+                  <a:srgbClr val="E8ECF5"/>
                 </a:solidFill>
                 <a:latin typeface="Calibri" pitchFamily="34" charset="0"/>
                 <a:ea typeface="Calibri" pitchFamily="34" charset="-122"/>
@@ -4082,11 +5262,13 @@
         </p:nvSpPr>
         <p:spPr>
           <a:xfrm>
-            <a:off x="3337560" y="1005840"/>
-            <a:ext cx="2606040" cy="1234440"/>
-          </a:xfrm>
-          <a:prstGeom prst="rect">
-            <a:avLst/>
+            <a:off x="3200400" y="960120"/>
+            <a:ext cx="2651760" cy="1234440"/>
+          </a:xfrm>
+          <a:prstGeom prst="roundRect">
+            <a:avLst>
+              <a:gd name="adj" fmla="val 5926"/>
+            </a:avLst>
           </a:prstGeom>
           <a:solidFill>
             <a:srgbClr val="1C7293"/>
@@ -4098,13 +5280,20 @@
             <a:prstDash val="solid"/>
           </a:ln>
           <a:effectLst>
-            <a:outerShdw blurRad="101600" dist="25400" dir="8100000" algn="bl" rotWithShape="0">
+            <a:outerShdw blurRad="76200" dist="25400" dir="5400000" algn="bl" rotWithShape="0">
               <a:srgbClr val="000000">
-                <a:alpha val="10000"/>
+                <a:alpha val="12000"/>
               </a:srgbClr>
             </a:outerShdw>
           </a:effectLst>
         </p:spPr>
+        <p:txBody>
+          <a:bodyPr/>
+          <a:lstStyle/>
+          <a:p>
+            <a:endParaRPr lang="fr-FR"/>
+          </a:p>
+        </p:txBody>
       </p:sp>
       <p:sp>
         <p:nvSpPr>
@@ -4114,8 +5303,8 @@
         </p:nvSpPr>
         <p:spPr>
           <a:xfrm>
-            <a:off x="3337560" y="1005840"/>
-            <a:ext cx="2606040" cy="502920"/>
+            <a:off x="3337560" y="1051560"/>
+            <a:ext cx="2377440" cy="320040"/>
           </a:xfrm>
           <a:prstGeom prst="rect">
             <a:avLst/>
@@ -4127,11 +5316,11 @@
           <a:bodyPr wrap="square" lIns="0" tIns="0" rIns="0" bIns="0" rtlCol="0" anchor="ctr"/>
           <a:lstStyle/>
           <a:p>
-            <a:pPr marL="0" indent="0" algn="ctr">
+            <a:pPr marL="0" indent="0">
               <a:buNone/>
             </a:pPr>
             <a:r>
-              <a:rPr lang="en-US" sz="1700" b="1" dirty="0">
+              <a:rPr lang="en-US" sz="1400" b="1" dirty="0">
                 <a:solidFill>
                   <a:srgbClr val="FFFFFF"/>
                 </a:solidFill>
@@ -4141,7 +5330,7 @@
               </a:rPr>
               <a:t>Operator</a:t>
             </a:r>
-            <a:endParaRPr lang="en-US" sz="1700" dirty="0"/>
+            <a:endParaRPr lang="en-US" sz="1400" dirty="0"/>
           </a:p>
         </p:txBody>
       </p:sp>
@@ -4153,8 +5342,8 @@
         </p:nvSpPr>
         <p:spPr>
           <a:xfrm>
-            <a:off x="3429000" y="1508760"/>
-            <a:ext cx="2423160" cy="685800"/>
+            <a:off x="3337560" y="1371600"/>
+            <a:ext cx="2377440" cy="731520"/>
           </a:xfrm>
           <a:prstGeom prst="rect">
             <a:avLst/>
@@ -4163,48 +5352,41 @@
           <a:ln/>
         </p:spPr>
         <p:txBody>
-          <a:bodyPr wrap="square" lIns="91440" tIns="45720" rIns="91440" bIns="45720" rtlCol="0" anchor="ctr"/>
-          <a:lstStyle/>
-          <a:p>
-            <a:pPr algn="ctr"/>
-            <a:r>
-              <a:rPr lang="en-US" sz="1100">
-                <a:solidFill>
-                  <a:srgbClr val="FFFFFF"/>
-                </a:solidFill>
-                <a:latin typeface="Calibri"/>
-                <a:ea typeface="Calibri"/>
-                <a:cs typeface="Calibri"/>
-              </a:rPr>
-              <a:t>Responds to </a:t>
-            </a:r>
-            <a:endParaRPr lang="en-US" sz="1100">
-              <a:solidFill>
-                <a:srgbClr val="000000"/>
-              </a:solidFill>
-              <a:latin typeface="Calibri"/>
-              <a:ea typeface="Calibri"/>
-              <a:cs typeface="Calibri"/>
-            </a:endParaRPr>
-          </a:p>
-          <a:p>
-            <a:pPr algn="ctr"/>
-            <a:r>
-              <a:rPr lang="en-US" sz="1100">
-                <a:solidFill>
-                  <a:srgbClr val="FFFFFF"/>
-                </a:solidFill>
-                <a:latin typeface="Calibri"/>
-                <a:ea typeface="Calibri"/>
-                <a:cs typeface="Calibri"/>
+          <a:bodyPr wrap="square" lIns="0" tIns="0" rIns="0" bIns="0" rtlCol="0" anchor="ctr"/>
+          <a:lstStyle/>
+          <a:p>
+            <a:pPr marL="0" indent="0">
+              <a:buNone/>
+            </a:pPr>
+            <a:r>
+              <a:rPr lang="en-US" sz="1100" dirty="0">
+                <a:solidFill>
+                  <a:srgbClr val="E8ECF5"/>
+                </a:solidFill>
+                <a:latin typeface="Calibri" pitchFamily="34" charset="0"/>
+                <a:ea typeface="Calibri" pitchFamily="34" charset="-122"/>
+                <a:cs typeface="Calibri" pitchFamily="34" charset="-120"/>
+              </a:rPr>
+              <a:t>Responds to</a:t>
+            </a:r>
+            <a:endParaRPr lang="en-US" sz="1100" dirty="0"/>
+          </a:p>
+          <a:p>
+            <a:pPr marL="0" indent="0">
+              <a:buNone/>
+            </a:pPr>
+            <a:r>
+              <a:rPr lang="en-US" sz="1100" dirty="0">
+                <a:solidFill>
+                  <a:srgbClr val="E8ECF5"/>
+                </a:solidFill>
+                <a:latin typeface="Calibri" pitchFamily="34" charset="0"/>
+                <a:ea typeface="Calibri" pitchFamily="34" charset="-122"/>
+                <a:cs typeface="Calibri" pitchFamily="34" charset="-120"/>
               </a:rPr>
               <a:t>accessibility requests</a:t>
             </a:r>
-            <a:endParaRPr lang="en-US" sz="1100">
-              <a:latin typeface="Calibri"/>
-              <a:ea typeface="Calibri"/>
-              <a:cs typeface="Calibri"/>
-            </a:endParaRPr>
+            <a:endParaRPr lang="en-US" sz="1100" dirty="0"/>
           </a:p>
         </p:txBody>
       </p:sp>
@@ -4216,29 +5398,38 @@
         </p:nvSpPr>
         <p:spPr>
           <a:xfrm>
-            <a:off x="6217920" y="1005840"/>
-            <a:ext cx="2606040" cy="1234440"/>
-          </a:xfrm>
-          <a:prstGeom prst="rect">
-            <a:avLst/>
+            <a:off x="5989320" y="960120"/>
+            <a:ext cx="2651760" cy="1234440"/>
+          </a:xfrm>
+          <a:prstGeom prst="roundRect">
+            <a:avLst>
+              <a:gd name="adj" fmla="val 5926"/>
+            </a:avLst>
           </a:prstGeom>
           <a:solidFill>
-            <a:srgbClr val="8B3A3A"/>
+            <a:srgbClr val="8A2E2E"/>
           </a:solidFill>
           <a:ln w="12700">
             <a:solidFill>
-              <a:srgbClr val="8B3A3A"/>
+              <a:srgbClr val="8A2E2E"/>
             </a:solidFill>
             <a:prstDash val="solid"/>
           </a:ln>
           <a:effectLst>
-            <a:outerShdw blurRad="101600" dist="25400" dir="8100000" algn="bl" rotWithShape="0">
+            <a:outerShdw blurRad="76200" dist="25400" dir="5400000" algn="bl" rotWithShape="0">
               <a:srgbClr val="000000">
-                <a:alpha val="10000"/>
+                <a:alpha val="12000"/>
               </a:srgbClr>
             </a:outerShdw>
           </a:effectLst>
         </p:spPr>
+        <p:txBody>
+          <a:bodyPr/>
+          <a:lstStyle/>
+          <a:p>
+            <a:endParaRPr lang="fr-FR"/>
+          </a:p>
+        </p:txBody>
       </p:sp>
       <p:sp>
         <p:nvSpPr>
@@ -4248,8 +5439,8 @@
         </p:nvSpPr>
         <p:spPr>
           <a:xfrm>
-            <a:off x="6217920" y="1005840"/>
-            <a:ext cx="2606040" cy="502920"/>
+            <a:off x="6126480" y="1051560"/>
+            <a:ext cx="2377440" cy="320040"/>
           </a:xfrm>
           <a:prstGeom prst="rect">
             <a:avLst/>
@@ -4261,11 +5452,11 @@
           <a:bodyPr wrap="square" lIns="0" tIns="0" rIns="0" bIns="0" rtlCol="0" anchor="ctr"/>
           <a:lstStyle/>
           <a:p>
-            <a:pPr marL="0" indent="0" algn="ctr">
+            <a:pPr marL="0" indent="0">
               <a:buNone/>
             </a:pPr>
             <a:r>
-              <a:rPr lang="en-US" sz="1700" b="1" dirty="0">
+              <a:rPr lang="en-US" sz="1400" b="1" dirty="0">
                 <a:solidFill>
                   <a:srgbClr val="FFFFFF"/>
                 </a:solidFill>
@@ -4275,7 +5466,7 @@
               </a:rPr>
               <a:t>Environment</a:t>
             </a:r>
-            <a:endParaRPr lang="en-US" sz="1700" dirty="0"/>
+            <a:endParaRPr lang="en-US" sz="1400" dirty="0"/>
           </a:p>
         </p:txBody>
       </p:sp>
@@ -4287,8 +5478,8 @@
         </p:nvSpPr>
         <p:spPr>
           <a:xfrm>
-            <a:off x="6309360" y="1508760"/>
-            <a:ext cx="2423160" cy="685800"/>
+            <a:off x="6126480" y="1371600"/>
+            <a:ext cx="2377440" cy="731520"/>
           </a:xfrm>
           <a:prstGeom prst="rect">
             <a:avLst/>
@@ -4297,16 +5488,16 @@
           <a:ln/>
         </p:spPr>
         <p:txBody>
-          <a:bodyPr wrap="square" rtlCol="0" anchor="ctr"/>
-          <a:lstStyle/>
-          <a:p>
-            <a:pPr marL="0" indent="0" algn="ctr">
+          <a:bodyPr wrap="square" lIns="0" tIns="0" rIns="0" bIns="0" rtlCol="0" anchor="ctr"/>
+          <a:lstStyle/>
+          <a:p>
+            <a:pPr marL="0" indent="0">
               <a:buNone/>
             </a:pPr>
             <a:r>
               <a:rPr lang="en-US" sz="1100" dirty="0">
                 <a:solidFill>
-                  <a:srgbClr val="FFFFFF"/>
+                  <a:srgbClr val="E8ECF5"/>
                 </a:solidFill>
                 <a:latin typeface="Calibri" pitchFamily="34" charset="0"/>
                 <a:ea typeface="Calibri" pitchFamily="34" charset="-122"/>
@@ -4317,13 +5508,13 @@
             <a:endParaRPr lang="en-US" sz="1100" dirty="0"/>
           </a:p>
           <a:p>
-            <a:pPr marL="0" indent="0" algn="ctr">
+            <a:pPr marL="0" indent="0">
               <a:buNone/>
             </a:pPr>
             <a:r>
               <a:rPr lang="en-US" sz="1100" dirty="0">
                 <a:solidFill>
-                  <a:srgbClr val="FFFFFF"/>
+                  <a:srgbClr val="E8ECF5"/>
                 </a:solidFill>
                 <a:latin typeface="Calibri" pitchFamily="34" charset="0"/>
                 <a:ea typeface="Calibri" pitchFamily="34" charset="-122"/>
@@ -4337,39 +5528,55 @@
       </p:sp>
       <p:sp>
         <p:nvSpPr>
-          <p:cNvPr id="15" name="Shape 13"/>
-          <p:cNvSpPr/>
-          <p:nvPr/>
-        </p:nvSpPr>
-        <p:spPr>
-          <a:xfrm>
-            <a:off x="464435" y="2574500"/>
-            <a:ext cx="8265770" cy="2344162"/>
-          </a:xfrm>
-          <a:prstGeom prst="rect">
-            <a:avLst/>
+          <p:cNvPr id="12" name="Shape 10"/>
+          <p:cNvSpPr/>
+          <p:nvPr/>
+        </p:nvSpPr>
+        <p:spPr>
+          <a:xfrm>
+            <a:off x="411480" y="2423160"/>
+            <a:ext cx="8321040" cy="1554480"/>
+          </a:xfrm>
+          <a:prstGeom prst="roundRect">
+            <a:avLst>
+              <a:gd name="adj" fmla="val 4706"/>
+            </a:avLst>
           </a:prstGeom>
           <a:solidFill>
-            <a:srgbClr val="FFF0EE"/>
+            <a:srgbClr val="FDEDEA"/>
           </a:solidFill>
           <a:ln w="12700">
             <a:solidFill>
-              <a:srgbClr val="E8B0A8"/>
+              <a:srgbClr val="FDEDEA"/>
             </a:solidFill>
             <a:prstDash val="solid"/>
           </a:ln>
-        </p:spPr>
-      </p:sp>
-      <p:sp>
-        <p:nvSpPr>
-          <p:cNvPr id="16" name="Text 14"/>
-          <p:cNvSpPr/>
-          <p:nvPr/>
-        </p:nvSpPr>
-        <p:spPr>
-          <a:xfrm>
-            <a:off x="461541" y="3154043"/>
-            <a:ext cx="7772400" cy="868680"/>
+          <a:effectLst>
+            <a:outerShdw blurRad="76200" dist="25400" dir="5400000" algn="bl" rotWithShape="0">
+              <a:srgbClr val="000000">
+                <a:alpha val="12000"/>
+              </a:srgbClr>
+            </a:outerShdw>
+          </a:effectLst>
+        </p:spPr>
+        <p:txBody>
+          <a:bodyPr/>
+          <a:lstStyle/>
+          <a:p>
+            <a:endParaRPr lang="fr-FR"/>
+          </a:p>
+        </p:txBody>
+      </p:sp>
+      <p:sp>
+        <p:nvSpPr>
+          <p:cNvPr id="13" name="Text 11"/>
+          <p:cNvSpPr/>
+          <p:nvPr/>
+        </p:nvSpPr>
+        <p:spPr>
+          <a:xfrm>
+            <a:off x="594360" y="2542032"/>
+            <a:ext cx="7955280" cy="292608"/>
           </a:xfrm>
           <a:prstGeom prst="rect">
             <a:avLst/>
@@ -4378,101 +5585,88 @@
           <a:ln/>
         </p:spPr>
         <p:txBody>
-          <a:bodyPr wrap="square" lIns="91440" tIns="45720" rIns="91440" bIns="45720" rtlCol="0" anchor="ctr"/>
-          <a:lstStyle/>
-          <a:p>
-            <a:r>
-              <a:rPr lang="en-US" sz="1400" b="1">
-                <a:solidFill>
-                  <a:srgbClr val="1E293B"/>
-                </a:solidFill>
-                <a:ea typeface="+mn-lt"/>
-                <a:cs typeface="+mn-lt"/>
+          <a:bodyPr wrap="square" lIns="0" tIns="0" rIns="0" bIns="0" rtlCol="0" anchor="ctr"/>
+          <a:lstStyle/>
+          <a:p>
+            <a:pPr marL="0" indent="0">
+              <a:buNone/>
+            </a:pPr>
+            <a:r>
+              <a:rPr lang="en-US" sz="1300" b="1" dirty="0">
+                <a:solidFill>
+                  <a:srgbClr val="9A3B2E"/>
+                </a:solidFill>
+                <a:latin typeface="Calibri" pitchFamily="34" charset="0"/>
+                <a:ea typeface="Calibri" pitchFamily="34" charset="-122"/>
+                <a:cs typeface="Calibri" pitchFamily="34" charset="-120"/>
               </a:rPr>
               <a:t>Why we moved from CSG to SMG</a:t>
             </a:r>
-            <a:endParaRPr lang="fr-FR" sz="1400" b="1">
-              <a:ea typeface="Calibri"/>
-              <a:cs typeface="Calibri"/>
-            </a:endParaRPr>
-          </a:p>
-          <a:p>
-            <a:endParaRPr lang="en-US" sz="1400" b="1" dirty="0">
-              <a:solidFill>
-                <a:srgbClr val="1E293B"/>
-              </a:solidFill>
-              <a:ea typeface="+mn-lt"/>
-              <a:cs typeface="+mn-lt"/>
-            </a:endParaRPr>
-          </a:p>
-          <a:p>
-            <a:pPr marL="285750" indent="-285750">
-              <a:buFont typeface="Arial"/>
+            <a:endParaRPr lang="en-US" sz="1300" dirty="0"/>
+          </a:p>
+        </p:txBody>
+      </p:sp>
+      <p:sp>
+        <p:nvSpPr>
+          <p:cNvPr id="14" name="Text 12"/>
+          <p:cNvSpPr/>
+          <p:nvPr/>
+        </p:nvSpPr>
+        <p:spPr>
+          <a:xfrm>
+            <a:off x="594360" y="2852928"/>
+            <a:ext cx="7955280" cy="1051560"/>
+          </a:xfrm>
+          <a:prstGeom prst="rect">
+            <a:avLst/>
+          </a:prstGeom>
+          <a:noFill/>
+          <a:ln/>
+        </p:spPr>
+        <p:txBody>
+          <a:bodyPr wrap="square" lIns="0" tIns="0" rIns="0" bIns="0" rtlCol="0" anchor="t"/>
+          <a:lstStyle/>
+          <a:p>
+            <a:pPr marL="177800" indent="-177800">
+              <a:spcAft>
+                <a:spcPts val="800"/>
+              </a:spcAft>
+              <a:buSzPct val="100000"/>
               <a:buChar char="•"/>
             </a:pPr>
             <a:r>
-              <a:rPr lang="en-US" sz="1250">
-                <a:solidFill>
-                  <a:srgbClr val="1E293B"/>
-                </a:solidFill>
-                <a:ea typeface="+mn-lt"/>
-                <a:cs typeface="+mn-lt"/>
-              </a:rPr>
-              <a:t>Multi-objective not supported yet in CSG - Pareto fronts and combined reliability/cost queries (multi(...)) require a turn-based SMG.</a:t>
-            </a:r>
-            <a:endParaRPr lang="en-US">
-              <a:ea typeface="Calibri" panose="020F0502020204030204"/>
-              <a:cs typeface="Calibri" panose="020F0502020204030204"/>
-            </a:endParaRPr>
-          </a:p>
-          <a:p>
-            <a:endParaRPr lang="en-US" sz="1250" dirty="0">
-              <a:solidFill>
-                <a:srgbClr val="1E293B"/>
-              </a:solidFill>
-              <a:ea typeface="+mn-lt"/>
-              <a:cs typeface="+mn-lt"/>
-            </a:endParaRPr>
-          </a:p>
-          <a:p>
-            <a:pPr marL="285750" indent="-285750">
-              <a:buFont typeface="Arial"/>
+              <a:rPr lang="en-US" sz="1150" dirty="0">
+                <a:solidFill>
+                  <a:srgbClr val="9A3B2E"/>
+                </a:solidFill>
+                <a:latin typeface="Calibri" pitchFamily="34" charset="0"/>
+                <a:ea typeface="Calibri" pitchFamily="34" charset="-122"/>
+                <a:cs typeface="Calibri" pitchFamily="34" charset="-120"/>
+              </a:rPr>
+              <a:t>Multi-objective not supported in CSG — Pareto fronts and combined reliability/cost queries (multi(...)) require a turn-based SMG.</a:t>
+            </a:r>
+            <a:endParaRPr lang="en-US" sz="1150" dirty="0"/>
+          </a:p>
+          <a:p>
+            <a:pPr marL="177800" indent="-177800">
+              <a:spcAft>
+                <a:spcPts val="800"/>
+              </a:spcAft>
+              <a:buSzPct val="100000"/>
               <a:buChar char="•"/>
             </a:pPr>
             <a:r>
-              <a:rPr lang="en-US" sz="1250" dirty="0">
-                <a:solidFill>
-                  <a:srgbClr val="1E293B"/>
-                </a:solidFill>
-                <a:ea typeface="+mn-lt"/>
-                <a:cs typeface="+mn-lt"/>
-              </a:rPr>
-              <a:t>Unrealistic simultaneity - In a CSG, environment and persona act simultaneously. In reality, a </a:t>
-            </a:r>
-            <a:r>
-              <a:rPr lang="en-US" sz="1250" dirty="0" err="1">
-                <a:solidFill>
-                  <a:srgbClr val="1E293B"/>
-                </a:solidFill>
-                <a:ea typeface="+mn-lt"/>
-                <a:cs typeface="+mn-lt"/>
-              </a:rPr>
-              <a:t>traveller</a:t>
-            </a:r>
-            <a:r>
-              <a:rPr lang="en-US" sz="1250" dirty="0">
-                <a:solidFill>
-                  <a:srgbClr val="1E293B"/>
-                </a:solidFill>
-                <a:ea typeface="+mn-lt"/>
-                <a:cs typeface="+mn-lt"/>
-              </a:rPr>
-              <a:t> first observes conditions, then decides. SMG enforces this naturally.</a:t>
-            </a:r>
-            <a:endParaRPr lang="en-US">
-              <a:ea typeface="+mn-lt"/>
-              <a:cs typeface="+mn-lt"/>
-            </a:endParaRPr>
+              <a:rPr lang="en-US" sz="1150" dirty="0">
+                <a:solidFill>
+                  <a:srgbClr val="9A3B2E"/>
+                </a:solidFill>
+                <a:latin typeface="Calibri" pitchFamily="34" charset="0"/>
+                <a:ea typeface="Calibri" pitchFamily="34" charset="-122"/>
+                <a:cs typeface="Calibri" pitchFamily="34" charset="-120"/>
+              </a:rPr>
+              <a:t>Unrealistic simultaneity — in a CSG, environment and persona act at once. In reality a traveller first observes conditions, then decides. SMG enforces this naturally.</a:t>
+            </a:r>
+            <a:endParaRPr lang="en-US" sz="1150" dirty="0"/>
           </a:p>
         </p:txBody>
       </p:sp>
@@ -4484,7 +5678,7 @@
 </p:sld>
 </file>
 
-<file path=ppt/slides/slide5.xml><?xml version="1.0" encoding="utf-8"?>
+<file path=ppt/slides/slide6.xml><?xml version="1.0" encoding="utf-8"?>
 <p:sld xmlns:a="http://schemas.openxmlformats.org/drawingml/2006/main" xmlns:r="http://schemas.openxmlformats.org/officeDocument/2006/relationships" xmlns:p="http://schemas.openxmlformats.org/presentationml/2006/main">
   <p:cSld name="Slide 5">
     <p:bg>
@@ -4517,8 +5711,8 @@
         </p:nvSpPr>
         <p:spPr>
           <a:xfrm>
-            <a:off x="548640" y="228600"/>
-            <a:ext cx="8046720" cy="594360"/>
+            <a:off x="411480" y="292608"/>
+            <a:ext cx="8321040" cy="502920"/>
           </a:xfrm>
           <a:prstGeom prst="rect">
             <a:avLst/>
@@ -4530,66 +5724,261 @@
           <a:bodyPr wrap="square" rtlCol="0" anchor="ctr"/>
           <a:lstStyle/>
           <a:p>
+            <a:pPr marL="0" indent="0" algn="l">
+              <a:buNone/>
+            </a:pPr>
+            <a:r>
+              <a:rPr lang="en-US" sz="2400" b="1" dirty="0">
+                <a:solidFill>
+                  <a:srgbClr val="1B2B4B"/>
+                </a:solidFill>
+                <a:latin typeface="Calibri" pitchFamily="34" charset="0"/>
+                <a:ea typeface="Calibri" pitchFamily="34" charset="-122"/>
+                <a:cs typeface="Calibri" pitchFamily="34" charset="-120"/>
+              </a:rPr>
+              <a:t>Transition to Turn-Based SMG</a:t>
+            </a:r>
+            <a:endParaRPr lang="en-US" sz="2400" dirty="0"/>
+          </a:p>
+        </p:txBody>
+      </p:sp>
+      <p:sp>
+        <p:nvSpPr>
+          <p:cNvPr id="3" name="Shape 1"/>
+          <p:cNvSpPr/>
+          <p:nvPr/>
+        </p:nvSpPr>
+        <p:spPr>
+          <a:xfrm>
+            <a:off x="411480" y="960120"/>
+            <a:ext cx="4023360" cy="1828800"/>
+          </a:xfrm>
+          <a:prstGeom prst="roundRect">
+            <a:avLst>
+              <a:gd name="adj" fmla="val 4000"/>
+            </a:avLst>
+          </a:prstGeom>
+          <a:solidFill>
+            <a:srgbClr val="065A82"/>
+          </a:solidFill>
+          <a:ln w="12700">
+            <a:solidFill>
+              <a:srgbClr val="065A82"/>
+            </a:solidFill>
+            <a:prstDash val="solid"/>
+          </a:ln>
+          <a:effectLst>
+            <a:outerShdw blurRad="76200" dist="25400" dir="5400000" algn="bl" rotWithShape="0">
+              <a:srgbClr val="000000">
+                <a:alpha val="12000"/>
+              </a:srgbClr>
+            </a:outerShdw>
+          </a:effectLst>
+        </p:spPr>
+        <p:txBody>
+          <a:bodyPr/>
+          <a:lstStyle/>
+          <a:p>
+            <a:endParaRPr lang="fr-FR"/>
+          </a:p>
+        </p:txBody>
+      </p:sp>
+      <p:sp>
+        <p:nvSpPr>
+          <p:cNvPr id="4" name="Text 2"/>
+          <p:cNvSpPr/>
+          <p:nvPr/>
+        </p:nvSpPr>
+        <p:spPr>
+          <a:xfrm>
+            <a:off x="594360" y="1051560"/>
+            <a:ext cx="3657600" cy="292608"/>
+          </a:xfrm>
+          <a:prstGeom prst="rect">
+            <a:avLst/>
+          </a:prstGeom>
+          <a:noFill/>
+          <a:ln/>
+        </p:spPr>
+        <p:txBody>
+          <a:bodyPr wrap="square" lIns="0" tIns="0" rIns="0" bIns="0" rtlCol="0" anchor="ctr"/>
+          <a:lstStyle/>
+          <a:p>
             <a:pPr marL="0" indent="0">
               <a:buNone/>
             </a:pPr>
             <a:r>
-              <a:rPr lang="en-US" sz="3000" b="1" dirty="0">
-                <a:solidFill>
-                  <a:srgbClr val="1E293B"/>
-                </a:solidFill>
-                <a:latin typeface="Calibri" pitchFamily="34" charset="0"/>
-                <a:ea typeface="Calibri" pitchFamily="34" charset="-122"/>
-                <a:cs typeface="Calibri" pitchFamily="34" charset="-120"/>
-              </a:rPr>
-              <a:t>Transition to Turn-Based SMG</a:t>
-            </a:r>
-            <a:endParaRPr lang="en-US" sz="3000" dirty="0"/>
-          </a:p>
-        </p:txBody>
-      </p:sp>
-      <p:sp>
-        <p:nvSpPr>
-          <p:cNvPr id="3" name="Shape 1"/>
-          <p:cNvSpPr/>
-          <p:nvPr/>
-        </p:nvSpPr>
-        <p:spPr>
-          <a:xfrm>
-            <a:off x="457200" y="1005840"/>
-            <a:ext cx="3840480" cy="2286000"/>
-          </a:xfrm>
-          <a:prstGeom prst="rect">
-            <a:avLst/>
+              <a:rPr lang="en-US" sz="1400" b="1" dirty="0">
+                <a:solidFill>
+                  <a:srgbClr val="FFFFFF"/>
+                </a:solidFill>
+                <a:latin typeface="Calibri" pitchFamily="34" charset="0"/>
+                <a:ea typeface="Calibri" pitchFamily="34" charset="-122"/>
+                <a:cs typeface="Calibri" pitchFamily="34" charset="-120"/>
+              </a:rPr>
+              <a:t>Phase 0 — Manager</a:t>
+            </a:r>
+            <a:endParaRPr lang="en-US" sz="1400" dirty="0"/>
+          </a:p>
+        </p:txBody>
+      </p:sp>
+      <p:sp>
+        <p:nvSpPr>
+          <p:cNvPr id="5" name="Text 3"/>
+          <p:cNvSpPr/>
+          <p:nvPr/>
+        </p:nvSpPr>
+        <p:spPr>
+          <a:xfrm>
+            <a:off x="594360" y="1371600"/>
+            <a:ext cx="3657600" cy="1371600"/>
+          </a:xfrm>
+          <a:prstGeom prst="rect">
+            <a:avLst/>
+          </a:prstGeom>
+          <a:noFill/>
+          <a:ln/>
+        </p:spPr>
+        <p:txBody>
+          <a:bodyPr wrap="square" lIns="0" tIns="0" rIns="0" bIns="0" rtlCol="0" anchor="t"/>
+          <a:lstStyle/>
+          <a:p>
+            <a:pPr marL="177800" indent="-177800">
+              <a:spcAft>
+                <a:spcPts val="800"/>
+              </a:spcAft>
+              <a:buSzPct val="100000"/>
+              <a:buChar char="•"/>
+            </a:pPr>
+            <a:r>
+              <a:rPr lang="en-US" sz="1050" dirty="0">
+                <a:solidFill>
+                  <a:srgbClr val="E8ECF5"/>
+                </a:solidFill>
+                <a:latin typeface="Calibri" pitchFamily="34" charset="0"/>
+                <a:ea typeface="Calibri" pitchFamily="34" charset="-122"/>
+                <a:cs typeface="Calibri" pitchFamily="34" charset="-120"/>
+              </a:rPr>
+              <a:t>Acts exactly once at the start</a:t>
+            </a:r>
+            <a:endParaRPr lang="en-US" sz="1050" dirty="0"/>
+          </a:p>
+          <a:p>
+            <a:pPr marL="177800" indent="-177800">
+              <a:spcAft>
+                <a:spcPts val="800"/>
+              </a:spcAft>
+              <a:buSzPct val="100000"/>
+              <a:buChar char="•"/>
+            </a:pPr>
+            <a:r>
+              <a:rPr lang="en-US" sz="1050" dirty="0">
+                <a:solidFill>
+                  <a:srgbClr val="E8ECF5"/>
+                </a:solidFill>
+                <a:latin typeface="Calibri" pitchFamily="34" charset="0"/>
+                <a:ea typeface="Calibri" pitchFamily="34" charset="-122"/>
+                <a:cs typeface="Calibri" pitchFamily="34" charset="-120"/>
+              </a:rPr>
+              <a:t>Chooses a transport policy (0–4)</a:t>
+            </a:r>
+            <a:endParaRPr lang="en-US" sz="1050" dirty="0"/>
+          </a:p>
+          <a:p>
+            <a:pPr marL="177800" indent="-177800">
+              <a:spcAft>
+                <a:spcPts val="800"/>
+              </a:spcAft>
+              <a:buSzPct val="100000"/>
+              <a:buChar char="•"/>
+            </a:pPr>
+            <a:r>
+              <a:rPr lang="en-US" sz="1050" dirty="0">
+                <a:solidFill>
+                  <a:srgbClr val="E8ECF5"/>
+                </a:solidFill>
+                <a:latin typeface="Calibri" pitchFamily="34" charset="0"/>
+                <a:ea typeface="Calibri" pitchFamily="34" charset="-122"/>
+                <a:cs typeface="Calibri" pitchFamily="34" charset="-120"/>
+              </a:rPr>
+              <a:t>Probabilistically samples: weather, lift availability, accessible bus</a:t>
+            </a:r>
+            <a:endParaRPr lang="en-US" sz="1050" dirty="0"/>
+          </a:p>
+          <a:p>
+            <a:pPr marL="177800" indent="-177800">
+              <a:spcAft>
+                <a:spcPts val="800"/>
+              </a:spcAft>
+              <a:buSzPct val="100000"/>
+              <a:buChar char="•"/>
+            </a:pPr>
+            <a:r>
+              <a:rPr lang="en-US" sz="1050" dirty="0">
+                <a:solidFill>
+                  <a:srgbClr val="E8ECF5"/>
+                </a:solidFill>
+                <a:latin typeface="Calibri" pitchFamily="34" charset="0"/>
+                <a:ea typeface="Calibri" pitchFamily="34" charset="-122"/>
+                <a:cs typeface="Calibri" pitchFamily="34" charset="-120"/>
+              </a:rPr>
+              <a:t>Hands control to the persona</a:t>
+            </a:r>
+            <a:endParaRPr lang="en-US" sz="1050" dirty="0"/>
+          </a:p>
+        </p:txBody>
+      </p:sp>
+      <p:sp>
+        <p:nvSpPr>
+          <p:cNvPr id="6" name="Shape 4"/>
+          <p:cNvSpPr/>
+          <p:nvPr/>
+        </p:nvSpPr>
+        <p:spPr>
+          <a:xfrm>
+            <a:off x="4526280" y="960120"/>
+            <a:ext cx="4206240" cy="1828800"/>
+          </a:xfrm>
+          <a:prstGeom prst="roundRect">
+            <a:avLst>
+              <a:gd name="adj" fmla="val 4000"/>
+            </a:avLst>
           </a:prstGeom>
           <a:solidFill>
-            <a:srgbClr val="E8F4FF"/>
+            <a:srgbClr val="1C7293"/>
           </a:solidFill>
-          <a:ln w="25400">
+          <a:ln w="12700">
             <a:solidFill>
               <a:srgbClr val="1C7293"/>
             </a:solidFill>
             <a:prstDash val="solid"/>
           </a:ln>
           <a:effectLst>
-            <a:outerShdw blurRad="101600" dist="25400" dir="8100000" algn="bl" rotWithShape="0">
+            <a:outerShdw blurRad="76200" dist="25400" dir="5400000" algn="bl" rotWithShape="0">
               <a:srgbClr val="000000">
-                <a:alpha val="10000"/>
+                <a:alpha val="12000"/>
               </a:srgbClr>
             </a:outerShdw>
           </a:effectLst>
         </p:spPr>
-      </p:sp>
-      <p:sp>
-        <p:nvSpPr>
-          <p:cNvPr id="4" name="Text 2"/>
-          <p:cNvSpPr/>
-          <p:nvPr/>
-        </p:nvSpPr>
-        <p:spPr>
-          <a:xfrm>
-            <a:off x="640080" y="1097280"/>
-            <a:ext cx="3474720" cy="411480"/>
+        <p:txBody>
+          <a:bodyPr/>
+          <a:lstStyle/>
+          <a:p>
+            <a:endParaRPr lang="fr-FR"/>
+          </a:p>
+        </p:txBody>
+      </p:sp>
+      <p:sp>
+        <p:nvSpPr>
+          <p:cNvPr id="7" name="Text 5"/>
+          <p:cNvSpPr/>
+          <p:nvPr/>
+        </p:nvSpPr>
+        <p:spPr>
+          <a:xfrm>
+            <a:off x="4709160" y="1051560"/>
+            <a:ext cx="3840480" cy="292608"/>
           </a:xfrm>
           <a:prstGeom prst="rect">
             <a:avLst/>
@@ -4598,37 +5987,37 @@
           <a:ln/>
         </p:spPr>
         <p:txBody>
-          <a:bodyPr wrap="square" rtlCol="0" anchor="ctr"/>
+          <a:bodyPr wrap="square" lIns="0" tIns="0" rIns="0" bIns="0" rtlCol="0" anchor="ctr"/>
           <a:lstStyle/>
           <a:p>
             <a:pPr marL="0" indent="0">
               <a:buNone/>
             </a:pPr>
             <a:r>
-              <a:rPr lang="en-US" sz="1600" b="1" dirty="0">
-                <a:solidFill>
-                  <a:srgbClr val="065A82"/>
-                </a:solidFill>
-                <a:latin typeface="Calibri" pitchFamily="34" charset="0"/>
-                <a:ea typeface="Calibri" pitchFamily="34" charset="-122"/>
-                <a:cs typeface="Calibri" pitchFamily="34" charset="-120"/>
-              </a:rPr>
-              <a:t>Phase 0 — Manager</a:t>
-            </a:r>
-            <a:endParaRPr lang="en-US" sz="1600" dirty="0"/>
-          </a:p>
-        </p:txBody>
-      </p:sp>
-      <p:sp>
-        <p:nvSpPr>
-          <p:cNvPr id="5" name="Text 3"/>
-          <p:cNvSpPr/>
-          <p:nvPr/>
-        </p:nvSpPr>
-        <p:spPr>
-          <a:xfrm>
-            <a:off x="640080" y="1600200"/>
-            <a:ext cx="3474720" cy="1554480"/>
+              <a:rPr lang="en-US" sz="1400" b="1" dirty="0">
+                <a:solidFill>
+                  <a:srgbClr val="FFFFFF"/>
+                </a:solidFill>
+                <a:latin typeface="Calibri" pitchFamily="34" charset="0"/>
+                <a:ea typeface="Calibri" pitchFamily="34" charset="-122"/>
+                <a:cs typeface="Calibri" pitchFamily="34" charset="-120"/>
+              </a:rPr>
+              <a:t>Phase 1 — Persona</a:t>
+            </a:r>
+            <a:endParaRPr lang="en-US" sz="1400" dirty="0"/>
+          </a:p>
+        </p:txBody>
+      </p:sp>
+      <p:sp>
+        <p:nvSpPr>
+          <p:cNvPr id="8" name="Text 6"/>
+          <p:cNvSpPr/>
+          <p:nvPr/>
+        </p:nvSpPr>
+        <p:spPr>
+          <a:xfrm>
+            <a:off x="4709160" y="1371600"/>
+            <a:ext cx="3840480" cy="1371600"/>
           </a:xfrm>
           <a:prstGeom prst="rect">
             <a:avLst/>
@@ -4637,147 +6026,145 @@
           <a:ln/>
         </p:spPr>
         <p:txBody>
-          <a:bodyPr wrap="square" rtlCol="0" anchor="t"/>
-          <a:lstStyle/>
-          <a:p>
-            <a:pPr marL="342900" indent="-342900">
+          <a:bodyPr wrap="square" lIns="0" tIns="0" rIns="0" bIns="0" rtlCol="0" anchor="t"/>
+          <a:lstStyle/>
+          <a:p>
+            <a:pPr marL="177800" indent="-177800">
+              <a:spcAft>
+                <a:spcPts val="800"/>
+              </a:spcAft>
               <a:buSzPct val="100000"/>
               <a:buChar char="•"/>
             </a:pPr>
             <a:r>
-              <a:rPr lang="en-US" sz="1250" dirty="0">
-                <a:solidFill>
-                  <a:srgbClr val="1E293B"/>
-                </a:solidFill>
-                <a:latin typeface="Calibri" pitchFamily="34" charset="0"/>
-                <a:ea typeface="Calibri" pitchFamily="34" charset="-122"/>
-                <a:cs typeface="Calibri" pitchFamily="34" charset="-120"/>
-              </a:rPr>
-              <a:t>Acts exactly once at the start</a:t>
-            </a:r>
-            <a:endParaRPr lang="en-US" sz="1250" dirty="0"/>
-          </a:p>
-          <a:p>
-            <a:pPr marL="342900" indent="-342900">
+              <a:rPr lang="en-US" sz="1050" dirty="0">
+                <a:solidFill>
+                  <a:srgbClr val="E8ECF5"/>
+                </a:solidFill>
+                <a:latin typeface="Calibri" pitchFamily="34" charset="0"/>
+                <a:ea typeface="Calibri" pitchFamily="34" charset="-122"/>
+                <a:cs typeface="Calibri" pitchFamily="34" charset="-120"/>
+              </a:rPr>
+              <a:t>Navigates the journey step by step</a:t>
+            </a:r>
+            <a:endParaRPr lang="en-US" sz="1050" dirty="0"/>
+          </a:p>
+          <a:p>
+            <a:pPr marL="177800" indent="-177800">
+              <a:spcAft>
+                <a:spcPts val="800"/>
+              </a:spcAft>
               <a:buSzPct val="100000"/>
               <a:buChar char="•"/>
             </a:pPr>
             <a:r>
-              <a:rPr lang="en-US" sz="1250" dirty="0">
-                <a:solidFill>
-                  <a:srgbClr val="1E293B"/>
-                </a:solidFill>
-                <a:latin typeface="Calibri" pitchFamily="34" charset="0"/>
-                <a:ea typeface="Calibri" pitchFamily="34" charset="-122"/>
-                <a:cs typeface="Calibri" pitchFamily="34" charset="-120"/>
-              </a:rPr>
-              <a:t>Chooses a transport policy (0–4)</a:t>
-            </a:r>
-            <a:endParaRPr lang="en-US" sz="1250" dirty="0"/>
-          </a:p>
-          <a:p>
-            <a:pPr marL="342900" indent="-342900">
+              <a:rPr lang="en-US" sz="1050" dirty="0">
+                <a:solidFill>
+                  <a:srgbClr val="E8ECF5"/>
+                </a:solidFill>
+                <a:latin typeface="Calibri" pitchFamily="34" charset="0"/>
+                <a:ea typeface="Calibri" pitchFamily="34" charset="-122"/>
+                <a:cs typeface="Calibri" pitchFamily="34" charset="-120"/>
+              </a:rPr>
+              <a:t>Chooses mode at each location (bus, rail, taxi, walk…)</a:t>
+            </a:r>
+            <a:endParaRPr lang="en-US" sz="1050" dirty="0"/>
+          </a:p>
+          <a:p>
+            <a:pPr marL="177800" indent="-177800">
+              <a:spcAft>
+                <a:spcPts val="800"/>
+              </a:spcAft>
               <a:buSzPct val="100000"/>
               <a:buChar char="•"/>
             </a:pPr>
             <a:r>
-              <a:rPr lang="en-US" sz="1250" dirty="0">
-                <a:solidFill>
-                  <a:srgbClr val="1E293B"/>
-                </a:solidFill>
-                <a:latin typeface="Calibri" pitchFamily="34" charset="0"/>
-                <a:ea typeface="Calibri" pitchFamily="34" charset="-122"/>
-                <a:cs typeface="Calibri" pitchFamily="34" charset="-120"/>
-              </a:rPr>
-              <a:t>Probabilistically samples: weather, lift availability, accessible bus</a:t>
-            </a:r>
-            <a:endParaRPr lang="en-US" sz="1250" dirty="0"/>
-          </a:p>
-          <a:p>
-            <a:pPr marL="342900" indent="-342900">
+              <a:rPr lang="en-US" sz="1050" dirty="0">
+                <a:solidFill>
+                  <a:srgbClr val="E8ECF5"/>
+                </a:solidFill>
+                <a:latin typeface="Calibri" pitchFamily="34" charset="0"/>
+                <a:ea typeface="Calibri" pitchFamily="34" charset="-122"/>
+                <a:cs typeface="Calibri" pitchFamily="34" charset="-120"/>
+              </a:rPr>
+              <a:t>Faces probabilistic disruptions (delay / cancel)</a:t>
+            </a:r>
+            <a:endParaRPr lang="en-US" sz="1050" dirty="0"/>
+          </a:p>
+          <a:p>
+            <a:pPr marL="177800" indent="-177800">
+              <a:spcAft>
+                <a:spcPts val="800"/>
+              </a:spcAft>
               <a:buSzPct val="100000"/>
               <a:buChar char="•"/>
             </a:pPr>
             <a:r>
-              <a:rPr lang="en-US" sz="1250" dirty="0">
-                <a:solidFill>
-                  <a:srgbClr val="1E293B"/>
-                </a:solidFill>
-                <a:latin typeface="Calibri" pitchFamily="34" charset="0"/>
-                <a:ea typeface="Calibri" pitchFamily="34" charset="-122"/>
-                <a:cs typeface="Calibri" pitchFamily="34" charset="-120"/>
-              </a:rPr>
-              <a:t>Hands control to the persona</a:t>
-            </a:r>
-            <a:endParaRPr lang="en-US" sz="1250" dirty="0"/>
-          </a:p>
-        </p:txBody>
-      </p:sp>
-      <p:sp>
-        <p:nvSpPr>
-          <p:cNvPr id="6" name="Shape 4"/>
-          <p:cNvSpPr/>
-          <p:nvPr/>
-        </p:nvSpPr>
-        <p:spPr>
-          <a:xfrm>
-            <a:off x="4343400" y="2148840"/>
-            <a:ext cx="365760" cy="0"/>
-          </a:xfrm>
-          <a:prstGeom prst="line">
-            <a:avLst/>
-          </a:prstGeom>
-          <a:noFill/>
-          <a:ln w="31750">
+              <a:rPr lang="en-US" sz="1050" dirty="0">
+                <a:solidFill>
+                  <a:srgbClr val="E8ECF5"/>
+                </a:solidFill>
+                <a:latin typeface="Calibri" pitchFamily="34" charset="0"/>
+                <a:ea typeface="Calibri" pitchFamily="34" charset="-122"/>
+                <a:cs typeface="Calibri" pitchFamily="34" charset="-120"/>
+              </a:rPr>
+              <a:t>Loops until arrived at destination or gives up</a:t>
+            </a:r>
+            <a:endParaRPr lang="en-US" sz="1050" dirty="0"/>
+          </a:p>
+        </p:txBody>
+      </p:sp>
+      <p:sp>
+        <p:nvSpPr>
+          <p:cNvPr id="9" name="Shape 7"/>
+          <p:cNvSpPr/>
+          <p:nvPr/>
+        </p:nvSpPr>
+        <p:spPr>
+          <a:xfrm>
+            <a:off x="411480" y="2971800"/>
+            <a:ext cx="8321040" cy="1691640"/>
+          </a:xfrm>
+          <a:prstGeom prst="roundRect">
+            <a:avLst>
+              <a:gd name="adj" fmla="val 4324"/>
+            </a:avLst>
+          </a:prstGeom>
+          <a:solidFill>
+            <a:srgbClr val="FDEDEA"/>
+          </a:solidFill>
+          <a:ln w="12700">
             <a:solidFill>
-              <a:srgbClr val="02C39A"/>
-            </a:solidFill>
-            <a:prstDash val="solid"/>
-          </a:ln>
-        </p:spPr>
-      </p:sp>
-      <p:sp>
-        <p:nvSpPr>
-          <p:cNvPr id="7" name="Shape 5"/>
-          <p:cNvSpPr/>
-          <p:nvPr/>
-        </p:nvSpPr>
-        <p:spPr>
-          <a:xfrm>
-            <a:off x="4846320" y="1005840"/>
-            <a:ext cx="3840480" cy="2286000"/>
-          </a:xfrm>
-          <a:prstGeom prst="rect">
-            <a:avLst/>
-          </a:prstGeom>
-          <a:solidFill>
-            <a:srgbClr val="EEF5FA"/>
-          </a:solidFill>
-          <a:ln w="25400">
-            <a:solidFill>
-              <a:srgbClr val="065A82"/>
+              <a:srgbClr val="FDEDEA"/>
             </a:solidFill>
             <a:prstDash val="solid"/>
           </a:ln>
           <a:effectLst>
-            <a:outerShdw blurRad="101600" dist="25400" dir="8100000" algn="bl" rotWithShape="0">
+            <a:outerShdw blurRad="76200" dist="25400" dir="5400000" algn="bl" rotWithShape="0">
               <a:srgbClr val="000000">
-                <a:alpha val="10000"/>
+                <a:alpha val="12000"/>
               </a:srgbClr>
             </a:outerShdw>
           </a:effectLst>
         </p:spPr>
-      </p:sp>
-      <p:sp>
-        <p:nvSpPr>
-          <p:cNvPr id="8" name="Text 6"/>
-          <p:cNvSpPr/>
-          <p:nvPr/>
-        </p:nvSpPr>
-        <p:spPr>
-          <a:xfrm>
-            <a:off x="5029200" y="1097280"/>
-            <a:ext cx="3474720" cy="411480"/>
+        <p:txBody>
+          <a:bodyPr/>
+          <a:lstStyle/>
+          <a:p>
+            <a:endParaRPr lang="fr-FR"/>
+          </a:p>
+        </p:txBody>
+      </p:sp>
+      <p:sp>
+        <p:nvSpPr>
+          <p:cNvPr id="10" name="Text 8"/>
+          <p:cNvSpPr/>
+          <p:nvPr/>
+        </p:nvSpPr>
+        <p:spPr>
+          <a:xfrm>
+            <a:off x="594360" y="3090672"/>
+            <a:ext cx="7955280" cy="292608"/>
           </a:xfrm>
           <a:prstGeom prst="rect">
             <a:avLst/>
@@ -4786,37 +6173,37 @@
           <a:ln/>
         </p:spPr>
         <p:txBody>
-          <a:bodyPr wrap="square" rtlCol="0" anchor="ctr"/>
+          <a:bodyPr wrap="square" lIns="0" tIns="0" rIns="0" bIns="0" rtlCol="0" anchor="ctr"/>
           <a:lstStyle/>
           <a:p>
             <a:pPr marL="0" indent="0">
               <a:buNone/>
             </a:pPr>
             <a:r>
-              <a:rPr lang="en-US" sz="1600" b="1" dirty="0">
-                <a:solidFill>
-                  <a:srgbClr val="065A82"/>
-                </a:solidFill>
-                <a:latin typeface="Calibri" pitchFamily="34" charset="0"/>
-                <a:ea typeface="Calibri" pitchFamily="34" charset="-122"/>
-                <a:cs typeface="Calibri" pitchFamily="34" charset="-120"/>
-              </a:rPr>
-              <a:t>Phase 1 — Persona</a:t>
-            </a:r>
-            <a:endParaRPr lang="en-US" sz="1600" dirty="0"/>
-          </a:p>
-        </p:txBody>
-      </p:sp>
-      <p:sp>
-        <p:nvSpPr>
-          <p:cNvPr id="9" name="Text 7"/>
-          <p:cNvSpPr/>
-          <p:nvPr/>
-        </p:nvSpPr>
-        <p:spPr>
-          <a:xfrm>
-            <a:off x="5029200" y="1600200"/>
-            <a:ext cx="3474720" cy="1554480"/>
+              <a:rPr lang="en-US" sz="1300" b="1" dirty="0">
+                <a:solidFill>
+                  <a:srgbClr val="9A3B2E"/>
+                </a:solidFill>
+                <a:latin typeface="Calibri" pitchFamily="34" charset="0"/>
+                <a:ea typeface="Calibri" pitchFamily="34" charset="-122"/>
+                <a:cs typeface="Calibri" pitchFamily="34" charset="-120"/>
+              </a:rPr>
+              <a:t>Why disruptions aren't a third player</a:t>
+            </a:r>
+            <a:endParaRPr lang="en-US" sz="1300" dirty="0"/>
+          </a:p>
+        </p:txBody>
+      </p:sp>
+      <p:sp>
+        <p:nvSpPr>
+          <p:cNvPr id="11" name="Text 9"/>
+          <p:cNvSpPr/>
+          <p:nvPr/>
+        </p:nvSpPr>
+        <p:spPr>
+          <a:xfrm>
+            <a:off x="594360" y="3401568"/>
+            <a:ext cx="7955280" cy="1188720"/>
           </a:xfrm>
           <a:prstGeom prst="rect">
             <a:avLst/>
@@ -4825,273 +6212,49 @@
           <a:ln/>
         </p:spPr>
         <p:txBody>
-          <a:bodyPr wrap="square" rtlCol="0" anchor="t"/>
-          <a:lstStyle/>
-          <a:p>
-            <a:pPr marL="342900" indent="-342900">
+          <a:bodyPr wrap="square" lIns="0" tIns="0" rIns="0" bIns="0" rtlCol="0" anchor="t"/>
+          <a:lstStyle/>
+          <a:p>
+            <a:pPr marL="177800" indent="-177800">
+              <a:spcAft>
+                <a:spcPts val="800"/>
+              </a:spcAft>
               <a:buSzPct val="100000"/>
               <a:buChar char="•"/>
             </a:pPr>
             <a:r>
-              <a:rPr lang="en-US" sz="1250" dirty="0">
-                <a:solidFill>
-                  <a:srgbClr val="1E293B"/>
-                </a:solidFill>
-                <a:latin typeface="Calibri" pitchFamily="34" charset="0"/>
-                <a:ea typeface="Calibri" pitchFamily="34" charset="-122"/>
-                <a:cs typeface="Calibri" pitchFamily="34" charset="-120"/>
-              </a:rPr>
-              <a:t>Navigates the journey step by step</a:t>
-            </a:r>
-            <a:endParaRPr lang="en-US" sz="1250" dirty="0"/>
-          </a:p>
-          <a:p>
-            <a:pPr marL="342900" indent="-342900">
+              <a:rPr lang="en-US" sz="1150" dirty="0">
+                <a:solidFill>
+                  <a:srgbClr val="9A3B2E"/>
+                </a:solidFill>
+                <a:latin typeface="Calibri" pitchFamily="34" charset="0"/>
+                <a:ea typeface="Calibri" pitchFamily="34" charset="-122"/>
+                <a:cs typeface="Calibri" pitchFamily="34" charset="-120"/>
+              </a:rPr>
+              <a:t>A fully adversarial environment player would force worst-case-only analysis — too pessimistic for comparing realistic policies.</a:t>
+            </a:r>
+            <a:endParaRPr lang="en-US" sz="1150" dirty="0"/>
+          </a:p>
+          <a:p>
+            <a:pPr marL="177800" indent="-177800">
+              <a:spcAft>
+                <a:spcPts val="800"/>
+              </a:spcAft>
               <a:buSzPct val="100000"/>
               <a:buChar char="•"/>
             </a:pPr>
             <a:r>
-              <a:rPr lang="en-US" sz="1250" dirty="0">
-                <a:solidFill>
-                  <a:srgbClr val="1E293B"/>
-                </a:solidFill>
-                <a:latin typeface="Calibri" pitchFamily="34" charset="0"/>
-                <a:ea typeface="Calibri" pitchFamily="34" charset="-122"/>
-                <a:cs typeface="Calibri" pitchFamily="34" charset="-120"/>
-              </a:rPr>
-              <a:t>Chooses mode at each location (bus, rail, taxi, walk…)</a:t>
-            </a:r>
-            <a:endParaRPr lang="en-US" sz="1250" dirty="0"/>
-          </a:p>
-          <a:p>
-            <a:pPr marL="342900" indent="-342900">
-              <a:buSzPct val="100000"/>
-              <a:buChar char="•"/>
-            </a:pPr>
-            <a:r>
-              <a:rPr lang="en-US" sz="1250" dirty="0">
-                <a:solidFill>
-                  <a:srgbClr val="1E293B"/>
-                </a:solidFill>
-                <a:latin typeface="Calibri" pitchFamily="34" charset="0"/>
-                <a:ea typeface="Calibri" pitchFamily="34" charset="-122"/>
-                <a:cs typeface="Calibri" pitchFamily="34" charset="-120"/>
-              </a:rPr>
-              <a:t>Faces probabilistic disruptions (delay / cancel)</a:t>
-            </a:r>
-            <a:endParaRPr lang="en-US" sz="1250" dirty="0"/>
-          </a:p>
-          <a:p>
-            <a:pPr marL="342900" indent="-342900">
-              <a:buSzPct val="100000"/>
-              <a:buChar char="•"/>
-            </a:pPr>
-            <a:r>
-              <a:rPr lang="en-US" sz="1250" dirty="0">
-                <a:solidFill>
-                  <a:srgbClr val="1E293B"/>
-                </a:solidFill>
-                <a:latin typeface="Calibri" pitchFamily="34" charset="0"/>
-                <a:ea typeface="Calibri" pitchFamily="34" charset="-122"/>
-                <a:cs typeface="Calibri" pitchFamily="34" charset="-120"/>
-              </a:rPr>
-              <a:t>Loops until arrived at destination or gives up</a:t>
-            </a:r>
-            <a:endParaRPr lang="en-US" sz="1250" dirty="0"/>
-          </a:p>
-        </p:txBody>
-      </p:sp>
-      <p:sp>
-        <p:nvSpPr>
-          <p:cNvPr id="11" name="Shape 13">
-            <a:extLst>
-              <a:ext uri="{FF2B5EF4-FFF2-40B4-BE49-F238E27FC236}">
-                <a16:creationId xmlns:a16="http://schemas.microsoft.com/office/drawing/2014/main" id="{625777D9-C395-ED7B-FA10-B70B57B9704A}"/>
-              </a:ext>
-            </a:extLst>
-          </p:cNvPr>
-          <p:cNvSpPr/>
-          <p:nvPr/>
-        </p:nvSpPr>
-        <p:spPr>
-          <a:xfrm>
-            <a:off x="464435" y="3566537"/>
-            <a:ext cx="8265770" cy="1352125"/>
-          </a:xfrm>
-          <a:prstGeom prst="rect">
-            <a:avLst/>
-          </a:prstGeom>
-          <a:solidFill>
-            <a:srgbClr val="FFF0EE"/>
-          </a:solidFill>
-          <a:ln w="12700">
-            <a:solidFill>
-              <a:srgbClr val="E8B0A8"/>
-            </a:solidFill>
-            <a:prstDash val="solid"/>
-          </a:ln>
-        </p:spPr>
-      </p:sp>
-      <p:sp>
-        <p:nvSpPr>
-          <p:cNvPr id="13" name="Text 14">
-            <a:extLst>
-              <a:ext uri="{FF2B5EF4-FFF2-40B4-BE49-F238E27FC236}">
-                <a16:creationId xmlns:a16="http://schemas.microsoft.com/office/drawing/2014/main" id="{66640949-6E17-A30F-6B82-A138D0CB6182}"/>
-              </a:ext>
-            </a:extLst>
-          </p:cNvPr>
-          <p:cNvSpPr/>
-          <p:nvPr/>
-        </p:nvSpPr>
-        <p:spPr>
-          <a:xfrm>
-            <a:off x="461541" y="3455967"/>
-            <a:ext cx="7772400" cy="502058"/>
-          </a:xfrm>
-          <a:prstGeom prst="rect">
-            <a:avLst/>
-          </a:prstGeom>
-          <a:noFill/>
-          <a:ln/>
-        </p:spPr>
-        <p:txBody>
-          <a:bodyPr wrap="square" lIns="91440" tIns="45720" rIns="91440" bIns="45720" rtlCol="0" anchor="ctr"/>
-          <a:lstStyle/>
-          <a:p>
-            <a:endParaRPr lang="en-US" sz="1400" b="1" dirty="0">
-              <a:solidFill>
-                <a:srgbClr val="1E293B"/>
-              </a:solidFill>
-              <a:ea typeface="+mn-lt"/>
-              <a:cs typeface="+mn-lt"/>
-            </a:endParaRPr>
-          </a:p>
-          <a:p>
-            <a:endParaRPr lang="en-US" sz="1400" b="1" dirty="0">
-              <a:solidFill>
-                <a:srgbClr val="1E293B"/>
-              </a:solidFill>
-              <a:ea typeface="+mn-lt"/>
-              <a:cs typeface="+mn-lt"/>
-            </a:endParaRPr>
-          </a:p>
-          <a:p>
-            <a:endParaRPr lang="en-US" sz="1400" b="1" dirty="0">
-              <a:solidFill>
-                <a:srgbClr val="1E293B"/>
-              </a:solidFill>
-              <a:ea typeface="+mn-lt"/>
-              <a:cs typeface="+mn-lt"/>
-            </a:endParaRPr>
-          </a:p>
-          <a:p>
-            <a:endParaRPr lang="en-US" sz="1400" b="1" dirty="0">
-              <a:solidFill>
-                <a:srgbClr val="1E293B"/>
-              </a:solidFill>
-              <a:ea typeface="+mn-lt"/>
-              <a:cs typeface="+mn-lt"/>
-            </a:endParaRPr>
-          </a:p>
-          <a:p>
-            <a:endParaRPr lang="en-US" sz="1400" b="1" dirty="0">
-              <a:solidFill>
-                <a:srgbClr val="1E293B"/>
-              </a:solidFill>
-              <a:ea typeface="+mn-lt"/>
-              <a:cs typeface="+mn-lt"/>
-            </a:endParaRPr>
-          </a:p>
-          <a:p>
-            <a:r>
-              <a:rPr lang="en-US" sz="1400" b="1">
-                <a:solidFill>
-                  <a:srgbClr val="1E293B"/>
-                </a:solidFill>
-                <a:ea typeface="+mn-lt"/>
-                <a:cs typeface="+mn-lt"/>
-              </a:rPr>
-              <a:t>The environment</a:t>
-            </a:r>
-            <a:r>
-              <a:rPr lang="en-US" sz="1400" b="1" dirty="0">
-                <a:solidFill>
-                  <a:srgbClr val="1E293B"/>
-                </a:solidFill>
-                <a:ea typeface="+mn-lt"/>
-                <a:cs typeface="+mn-lt"/>
-              </a:rPr>
-              <a:t> ?</a:t>
-            </a:r>
-            <a:endParaRPr lang="en-US" sz="1400" b="1">
-              <a:solidFill>
-                <a:srgbClr val="1E293B"/>
-              </a:solidFill>
-              <a:ea typeface="Calibri"/>
-              <a:cs typeface="Calibri"/>
-            </a:endParaRPr>
-          </a:p>
-          <a:p>
-            <a:endParaRPr lang="en-US" sz="1400" b="1" dirty="0">
-              <a:solidFill>
-                <a:srgbClr val="1E293B"/>
-              </a:solidFill>
-              <a:ea typeface="+mn-lt"/>
-              <a:cs typeface="+mn-lt"/>
-            </a:endParaRPr>
-          </a:p>
-          <a:p>
-            <a:pPr marL="285750" indent="-285750">
-              <a:buFont typeface="Arial"/>
-              <a:buChar char="•"/>
-            </a:pPr>
-            <a:r>
-              <a:rPr lang="en-US" sz="1250">
-                <a:solidFill>
-                  <a:srgbClr val="1E293B"/>
-                </a:solidFill>
-                <a:ea typeface="+mn-lt"/>
-                <a:cs typeface="+mn-lt"/>
-              </a:rPr>
-              <a:t>Player -&gt; adversarial -&gt; worst case scenario : not what we want</a:t>
-            </a:r>
-          </a:p>
-          <a:p>
-            <a:pPr marL="285750" indent="-285750">
-              <a:buFont typeface="Arial"/>
-              <a:buChar char="•"/>
-            </a:pPr>
-            <a:endParaRPr lang="en-US" sz="1250" dirty="0">
-              <a:solidFill>
-                <a:srgbClr val="1E293B"/>
-              </a:solidFill>
-              <a:ea typeface="+mn-lt"/>
-              <a:cs typeface="+mn-lt"/>
-            </a:endParaRPr>
-          </a:p>
-          <a:p>
-            <a:pPr marL="285750" indent="-285750">
-              <a:buFont typeface="Arial"/>
-              <a:buChar char="•"/>
-            </a:pPr>
-            <a:r>
-              <a:rPr lang="en-US" sz="1250">
-                <a:solidFill>
-                  <a:srgbClr val="1E293B"/>
-                </a:solidFill>
-                <a:ea typeface="+mn-lt"/>
-                <a:cs typeface="+mn-lt"/>
-              </a:rPr>
-              <a:t>Stochastic -&gt; more realistic</a:t>
-            </a:r>
-            <a:endParaRPr lang="en-US" sz="1250" dirty="0">
-              <a:solidFill>
-                <a:srgbClr val="1E293B"/>
-              </a:solidFill>
-              <a:ea typeface="+mn-lt"/>
-              <a:cs typeface="+mn-lt"/>
-            </a:endParaRPr>
+              <a:rPr lang="en-US" sz="1150" dirty="0">
+                <a:solidFill>
+                  <a:srgbClr val="9A3B2E"/>
+                </a:solidFill>
+                <a:latin typeface="Calibri" pitchFamily="34" charset="0"/>
+                <a:ea typeface="Calibri" pitchFamily="34" charset="-122"/>
+                <a:cs typeface="Calibri" pitchFamily="34" charset="-120"/>
+              </a:rPr>
+              <a:t>Disruptions (delay, cancellation, lift failure) are instead embedded as fixed probabilities inside the persona's own actions: more realistic, and still fully quantitative.</a:t>
+            </a:r>
+            <a:endParaRPr lang="en-US" sz="1150" dirty="0"/>
           </a:p>
         </p:txBody>
       </p:sp>
@@ -5103,7 +6266,7 @@
 </p:sld>
 </file>
 
-<file path=ppt/slides/slide6.xml><?xml version="1.0" encoding="utf-8"?>
+<file path=ppt/slides/slide7.xml><?xml version="1.0" encoding="utf-8"?>
 <p:sld xmlns:a="http://schemas.openxmlformats.org/drawingml/2006/main" xmlns:r="http://schemas.openxmlformats.org/officeDocument/2006/relationships" xmlns:p="http://schemas.openxmlformats.org/presentationml/2006/main">
   <p:cSld name="Slide 6">
     <p:bg>
@@ -5136,8 +6299,8 @@
         </p:nvSpPr>
         <p:spPr>
           <a:xfrm>
-            <a:off x="457200" y="201168"/>
-            <a:ext cx="8229600" cy="548640"/>
+            <a:off x="411480" y="292608"/>
+            <a:ext cx="8321040" cy="502920"/>
           </a:xfrm>
           <a:prstGeom prst="rect">
             <a:avLst/>
@@ -5149,91 +6312,34 @@
           <a:bodyPr wrap="square" rtlCol="0" anchor="ctr"/>
           <a:lstStyle/>
           <a:p>
-            <a:pPr marL="0" indent="0">
+            <a:pPr marL="0" indent="0" algn="l">
               <a:buNone/>
             </a:pPr>
             <a:r>
               <a:rPr lang="en-US" sz="2400" b="1" dirty="0">
                 <a:solidFill>
-                  <a:srgbClr val="1E293B"/>
-                </a:solidFill>
-                <a:latin typeface="Calibri" pitchFamily="34" charset="0"/>
-                <a:ea typeface="Calibri" pitchFamily="34" charset="-122"/>
-                <a:cs typeface="Calibri" pitchFamily="34" charset="-120"/>
-              </a:rPr>
-              <a:t>Key Results  —  Giffnock → UofG, Low Disruption Scenario</a:t>
+                  <a:srgbClr val="1B2B4B"/>
+                </a:solidFill>
+                <a:latin typeface="Calibri" pitchFamily="34" charset="0"/>
+                <a:ea typeface="Calibri" pitchFamily="34" charset="-122"/>
+                <a:cs typeface="Calibri" pitchFamily="34" charset="-120"/>
+              </a:rPr>
+              <a:t>Giving the Manager a Real Objective</a:t>
             </a:r>
             <a:endParaRPr lang="en-US" sz="2400" dirty="0"/>
           </a:p>
         </p:txBody>
       </p:sp>
-      <p:graphicFrame>
-        <p:nvGraphicFramePr>
-          <p:cNvPr id="3" name="Chart 0"/>
-          <p:cNvGraphicFramePr/>
-          <p:nvPr/>
-        </p:nvGraphicFramePr>
-        <p:xfrm>
-          <a:off x="365760" y="868680"/>
-          <a:ext cx="4114800" cy="3383280"/>
-        </p:xfrm>
-        <a:graphic>
-          <a:graphicData uri="http://schemas.openxmlformats.org/drawingml/2006/chart">
-            <c:chart xmlns:c="http://schemas.openxmlformats.org/drawingml/2006/chart" xmlns:r="http://schemas.openxmlformats.org/officeDocument/2006/relationships" r:id="rId3"/>
-          </a:graphicData>
-        </a:graphic>
-      </p:graphicFrame>
-      <p:graphicFrame>
-        <p:nvGraphicFramePr>
-          <p:cNvPr id="4" name="Chart 1"/>
-          <p:cNvGraphicFramePr/>
-          <p:nvPr/>
-        </p:nvGraphicFramePr>
-        <p:xfrm>
-          <a:off x="4663440" y="868680"/>
-          <a:ext cx="4114800" cy="3383280"/>
-        </p:xfrm>
-        <a:graphic>
-          <a:graphicData uri="http://schemas.openxmlformats.org/drawingml/2006/chart">
-            <c:chart xmlns:c="http://schemas.openxmlformats.org/drawingml/2006/chart" xmlns:r="http://schemas.openxmlformats.org/officeDocument/2006/relationships" r:id="rId4"/>
-          </a:graphicData>
-        </a:graphic>
-      </p:graphicFrame>
-      <p:sp>
-        <p:nvSpPr>
-          <p:cNvPr id="5" name="Shape 1"/>
-          <p:cNvSpPr/>
-          <p:nvPr/>
-        </p:nvSpPr>
-        <p:spPr>
-          <a:xfrm>
-            <a:off x="365760" y="4434840"/>
-            <a:ext cx="8412480" cy="502920"/>
-          </a:xfrm>
-          <a:prstGeom prst="rect">
-            <a:avLst/>
-          </a:prstGeom>
-          <a:solidFill>
-            <a:srgbClr val="065A82"/>
-          </a:solidFill>
-          <a:ln w="12700">
-            <a:solidFill>
-              <a:srgbClr val="065A82"/>
-            </a:solidFill>
-            <a:prstDash val="solid"/>
-          </a:ln>
-        </p:spPr>
-      </p:sp>
-      <p:sp>
-        <p:nvSpPr>
-          <p:cNvPr id="6" name="Text 2"/>
-          <p:cNvSpPr/>
-          <p:nvPr/>
-        </p:nvSpPr>
-        <p:spPr>
-          <a:xfrm>
-            <a:off x="502920" y="4453128"/>
-            <a:ext cx="8229600" cy="457200"/>
+      <p:sp>
+        <p:nvSpPr>
+          <p:cNvPr id="3" name="Text 1"/>
+          <p:cNvSpPr/>
+          <p:nvPr/>
+        </p:nvSpPr>
+        <p:spPr>
+          <a:xfrm>
+            <a:off x="411480" y="914400"/>
+            <a:ext cx="8321040" cy="1737360"/>
           </a:xfrm>
           <a:prstGeom prst="rect">
             <a:avLst/>
@@ -5242,51 +6348,118 @@
           <a:ln/>
         </p:spPr>
         <p:txBody>
-          <a:bodyPr wrap="square" lIns="0" tIns="0" rIns="0" bIns="0" rtlCol="0" anchor="ctr"/>
-          <a:lstStyle/>
-          <a:p>
-            <a:pPr algn="ctr"/>
-            <a:r>
-              <a:rPr lang="en-US" sz="1150" dirty="0">
-                <a:solidFill>
-                  <a:srgbClr val="FFFFFF"/>
-                </a:solidFill>
-                <a:latin typeface="Calibri"/>
-                <a:ea typeface="Calibri"/>
-                <a:cs typeface="Calibri"/>
-              </a:rPr>
-              <a:t>All 9 personas reach destination with probability 1.0 under low disruption with the </a:t>
-            </a:r>
-            <a:r>
-              <a:rPr lang="en-US" sz="1150">
-                <a:solidFill>
-                  <a:srgbClr val="FFFFFF"/>
-                </a:solidFill>
-                <a:latin typeface="Calibri"/>
-                <a:ea typeface="Calibri"/>
-                <a:cs typeface="Calibri"/>
-              </a:rPr>
-              <a:t>operator cooperation  ·  Under high disruption: elderly (no </a:t>
-            </a:r>
-            <a:r>
-              <a:rPr lang="en-US" sz="1150" dirty="0">
-                <a:solidFill>
-                  <a:srgbClr val="FFFFFF"/>
-                </a:solidFill>
-                <a:latin typeface="Calibri"/>
-                <a:ea typeface="Calibri"/>
-                <a:cs typeface="Calibri"/>
-              </a:rPr>
-              <a:t>car) has 20% chance of abandoning</a:t>
-            </a:r>
-            <a:endParaRPr lang="en-US" sz="1150" dirty="0">
-              <a:latin typeface="Calibri"/>
-              <a:ea typeface="Calibri"/>
-              <a:cs typeface="Calibri"/>
-            </a:endParaRPr>
-          </a:p>
-        </p:txBody>
-      </p:sp>
+          <a:bodyPr wrap="square" lIns="0" tIns="0" rIns="0" bIns="0" rtlCol="0" anchor="t"/>
+          <a:lstStyle/>
+          <a:p>
+            <a:pPr marL="177800" indent="-177800">
+              <a:spcAft>
+                <a:spcPts val="800"/>
+              </a:spcAft>
+              <a:buSzPct val="100000"/>
+              <a:buChar char="•"/>
+            </a:pPr>
+            <a:r>
+              <a:rPr lang="en-US" sz="1250" dirty="0">
+                <a:solidFill>
+                  <a:srgbClr val="1B2B4B"/>
+                </a:solidFill>
+                <a:latin typeface="Calibri" pitchFamily="34" charset="0"/>
+                <a:ea typeface="Calibri" pitchFamily="34" charset="-122"/>
+                <a:cs typeface="Calibri" pitchFamily="34" charset="-120"/>
+              </a:rPr>
+              <a:t>generalized_cost: the persona's true objective — time, fare and walking distance combined via per-persona weights (value of time, fare sensitivity, walking aversion).</a:t>
+            </a:r>
+            <a:endParaRPr lang="en-US" sz="1250" dirty="0"/>
+          </a:p>
+          <a:p>
+            <a:pPr marL="177800" indent="-177800">
+              <a:spcAft>
+                <a:spcPts val="800"/>
+              </a:spcAft>
+              <a:buSzPct val="100000"/>
+              <a:buChar char="•"/>
+            </a:pPr>
+            <a:r>
+              <a:rPr lang="en-US" sz="1250" dirty="0">
+                <a:solidFill>
+                  <a:srgbClr val="1B2B4B"/>
+                </a:solidFill>
+                <a:latin typeface="Calibri" pitchFamily="34" charset="0"/>
+                <a:ea typeface="Calibri" pitchFamily="34" charset="-122"/>
+                <a:cs typeface="Calibri" pitchFamily="34" charset="-120"/>
+              </a:rPr>
+              <a:t>revenue: fares actually paid, plus road-charge income — the operator's income side.</a:t>
+            </a:r>
+            <a:endParaRPr lang="en-US" sz="1250" dirty="0"/>
+          </a:p>
+          <a:p>
+            <a:pPr marL="177800" indent="-177800">
+              <a:spcAft>
+                <a:spcPts val="800"/>
+              </a:spcAft>
+              <a:buSzPct val="100000"/>
+              <a:buChar char="•"/>
+            </a:pPr>
+            <a:r>
+              <a:rPr lang="en-US" sz="1250" dirty="0">
+                <a:solidFill>
+                  <a:srgbClr val="1B2B4B"/>
+                </a:solidFill>
+                <a:latin typeface="Calibri" pitchFamily="34" charset="0"/>
+                <a:ea typeface="Calibri" pitchFamily="34" charset="-122"/>
+                <a:cs typeface="Calibri" pitchFamily="34" charset="-120"/>
+              </a:rPr>
+              <a:t>policy_cost: subsidies (low fare) and amortised fixed costs (high frequency, accessible service) — the operator's spending side.</a:t>
+            </a:r>
+            <a:endParaRPr lang="en-US" sz="1250" dirty="0"/>
+          </a:p>
+          <a:p>
+            <a:pPr marL="177800" indent="-177800">
+              <a:spcAft>
+                <a:spcPts val="800"/>
+              </a:spcAft>
+              <a:buSzPct val="100000"/>
+              <a:buChar char="•"/>
+            </a:pPr>
+            <a:r>
+              <a:rPr lang="en-US" sz="1250" dirty="0">
+                <a:solidFill>
+                  <a:srgbClr val="1B2B4B"/>
+                </a:solidFill>
+                <a:latin typeface="Calibri" pitchFamily="34" charset="0"/>
+                <a:ea typeface="Calibri" pitchFamily="34" charset="-122"/>
+                <a:cs typeface="Calibri" pitchFamily="34" charset="-120"/>
+              </a:rPr>
+              <a:t>Framed as a Stackelberg game: the manager commits to one policy, the persona then reacts optimally — we compute that best response exactly for each of the 5 policies.</a:t>
+            </a:r>
+            <a:endParaRPr lang="en-US" sz="1250" dirty="0"/>
+          </a:p>
+        </p:txBody>
+      </p:sp>
+      <p:pic>
+        <p:nvPicPr>
+          <p:cNvPr id="4" name="Image 0" descr="fig8_low.png"/>
+          <p:cNvPicPr>
+            <a:picLocks noChangeAspect="1"/>
+          </p:cNvPicPr>
+          <p:nvPr/>
+        </p:nvPicPr>
+        <p:blipFill>
+          <a:blip r:embed="rId3"/>
+          <a:stretch>
+            <a:fillRect/>
+          </a:stretch>
+        </p:blipFill>
+        <p:spPr>
+          <a:xfrm>
+            <a:off x="914400" y="2606040"/>
+            <a:ext cx="7315200" cy="2403043"/>
+          </a:xfrm>
+          <a:prstGeom prst="rect">
+            <a:avLst/>
+          </a:prstGeom>
+        </p:spPr>
+      </p:pic>
     </p:spTree>
   </p:cSld>
   <p:clrMapOvr>
@@ -5295,7 +6468,7 @@
 </p:sld>
 </file>
 
-<file path=ppt/slides/slide7.xml><?xml version="1.0" encoding="utf-8"?>
+<file path=ppt/slides/slide8.xml><?xml version="1.0" encoding="utf-8"?>
 <p:sld xmlns:a="http://schemas.openxmlformats.org/drawingml/2006/main" xmlns:r="http://schemas.openxmlformats.org/officeDocument/2006/relationships" xmlns:p="http://schemas.openxmlformats.org/presentationml/2006/main">
   <p:cSld name="Slide 7">
     <p:bg>
@@ -5328,8 +6501,8 @@
         </p:nvSpPr>
         <p:spPr>
           <a:xfrm>
-            <a:off x="548640" y="228600"/>
-            <a:ext cx="8046720" cy="594360"/>
+            <a:off x="411480" y="292608"/>
+            <a:ext cx="8321040" cy="502920"/>
           </a:xfrm>
           <a:prstGeom prst="rect">
             <a:avLst/>
@@ -5341,66 +6514,121 @@
           <a:bodyPr wrap="square" rtlCol="0" anchor="ctr"/>
           <a:lstStyle/>
           <a:p>
+            <a:pPr marL="0" indent="0" algn="l">
+              <a:buNone/>
+            </a:pPr>
+            <a:r>
+              <a:rPr lang="en-US" sz="2400" b="1" dirty="0">
+                <a:solidFill>
+                  <a:srgbClr val="1B2B4B"/>
+                </a:solidFill>
+                <a:latin typeface="Calibri" pitchFamily="34" charset="0"/>
+                <a:ea typeface="Calibri" pitchFamily="34" charset="-122"/>
+                <a:cs typeface="Calibri" pitchFamily="34" charset="-120"/>
+              </a:rPr>
+              <a:t>Key Results — Reliability &amp; Time, High Disruption</a:t>
+            </a:r>
+            <a:endParaRPr lang="en-US" sz="2400" dirty="0"/>
+          </a:p>
+        </p:txBody>
+      </p:sp>
+      <p:sp>
+        <p:nvSpPr>
+          <p:cNvPr id="3" name="Text 1"/>
+          <p:cNvSpPr/>
+          <p:nvPr/>
+        </p:nvSpPr>
+        <p:spPr>
+          <a:xfrm>
+            <a:off x="411480" y="868680"/>
+            <a:ext cx="8321040" cy="365760"/>
+          </a:xfrm>
+          <a:prstGeom prst="rect">
+            <a:avLst/>
+          </a:prstGeom>
+          <a:noFill/>
+          <a:ln/>
+        </p:spPr>
+        <p:txBody>
+          <a:bodyPr wrap="square" lIns="0" tIns="0" rIns="0" bIns="0" rtlCol="0" anchor="ctr"/>
+          <a:lstStyle/>
+          <a:p>
             <a:pPr marL="0" indent="0">
               <a:buNone/>
             </a:pPr>
             <a:r>
-              <a:rPr lang="en-US" sz="3000" b="1" dirty="0">
-                <a:solidFill>
-                  <a:srgbClr val="1E293B"/>
-                </a:solidFill>
-                <a:latin typeface="Calibri" pitchFamily="34" charset="0"/>
-                <a:ea typeface="Calibri" pitchFamily="34" charset="-122"/>
-                <a:cs typeface="Calibri" pitchFamily="34" charset="-120"/>
-              </a:rPr>
-              <a:t>Optimal Strategy Visualisation</a:t>
-            </a:r>
-            <a:endParaRPr lang="en-US" sz="3000" dirty="0"/>
-          </a:p>
-        </p:txBody>
-      </p:sp>
-      <p:sp>
-        <p:nvSpPr>
-          <p:cNvPr id="3" name="Shape 1"/>
-          <p:cNvSpPr/>
-          <p:nvPr/>
-        </p:nvSpPr>
-        <p:spPr>
-          <a:xfrm>
-            <a:off x="457200" y="1005840"/>
-            <a:ext cx="3657600" cy="3794760"/>
-          </a:xfrm>
-          <a:prstGeom prst="rect">
-            <a:avLst/>
-          </a:prstGeom>
-          <a:solidFill>
-            <a:srgbClr val="EEF5FA"/>
-          </a:solidFill>
-          <a:ln w="12700">
-            <a:solidFill>
-              <a:srgbClr val="C8DFF0"/>
-            </a:solidFill>
-            <a:prstDash val="solid"/>
-          </a:ln>
-          <a:effectLst>
-            <a:outerShdw blurRad="101600" dist="25400" dir="8100000" algn="bl" rotWithShape="0">
-              <a:srgbClr val="000000">
-                <a:alpha val="10000"/>
-              </a:srgbClr>
-            </a:outerShdw>
-          </a:effectLst>
-        </p:spPr>
-      </p:sp>
-      <p:sp>
-        <p:nvSpPr>
-          <p:cNvPr id="4" name="Text 2"/>
-          <p:cNvSpPr/>
-          <p:nvPr/>
-        </p:nvSpPr>
-        <p:spPr>
-          <a:xfrm>
-            <a:off x="640080" y="1097280"/>
-            <a:ext cx="3291840" cy="384048"/>
+              <a:rPr lang="en-US" sz="1150" i="1" dirty="0">
+                <a:solidFill>
+                  <a:srgbClr val="7098B8"/>
+                </a:solidFill>
+                <a:latin typeface="Calibri" pitchFamily="34" charset="0"/>
+                <a:ea typeface="Calibri" pitchFamily="34" charset="-122"/>
+                <a:cs typeface="Calibri" pitchFamily="34" charset="-120"/>
+              </a:rPr>
+              <a:t>All 9 personas, all 5 policies, high-disruption scenario (current model — attempt/ride split, corrected fares, audited persona parameters).</a:t>
+            </a:r>
+            <a:endParaRPr lang="en-US" sz="1150" dirty="0"/>
+          </a:p>
+        </p:txBody>
+      </p:sp>
+      <p:pic>
+        <p:nvPicPr>
+          <p:cNvPr id="4" name="Image 0" descr="fig1_high.png"/>
+          <p:cNvPicPr>
+            <a:picLocks noChangeAspect="1"/>
+          </p:cNvPicPr>
+          <p:nvPr/>
+        </p:nvPicPr>
+        <p:blipFill>
+          <a:blip r:embed="rId3"/>
+          <a:stretch>
+            <a:fillRect/>
+          </a:stretch>
+        </p:blipFill>
+        <p:spPr>
+          <a:xfrm>
+            <a:off x="320040" y="1325880"/>
+            <a:ext cx="4160520" cy="2455164"/>
+          </a:xfrm>
+          <a:prstGeom prst="rect">
+            <a:avLst/>
+          </a:prstGeom>
+        </p:spPr>
+      </p:pic>
+      <p:pic>
+        <p:nvPicPr>
+          <p:cNvPr id="5" name="Image 1" descr="figtime_high.png"/>
+          <p:cNvPicPr>
+            <a:picLocks noChangeAspect="1"/>
+          </p:cNvPicPr>
+          <p:nvPr/>
+        </p:nvPicPr>
+        <p:blipFill>
+          <a:blip r:embed="rId4"/>
+          <a:stretch>
+            <a:fillRect/>
+          </a:stretch>
+        </p:blipFill>
+        <p:spPr>
+          <a:xfrm>
+            <a:off x="4617720" y="1325880"/>
+            <a:ext cx="4160520" cy="2465222"/>
+          </a:xfrm>
+          <a:prstGeom prst="rect">
+            <a:avLst/>
+          </a:prstGeom>
+        </p:spPr>
+      </p:pic>
+      <p:sp>
+        <p:nvSpPr>
+          <p:cNvPr id="6" name="Text 2"/>
+          <p:cNvSpPr/>
+          <p:nvPr/>
+        </p:nvSpPr>
+        <p:spPr>
+          <a:xfrm>
+            <a:off x="411480" y="3886200"/>
+            <a:ext cx="8321040" cy="457200"/>
           </a:xfrm>
           <a:prstGeom prst="rect">
             <a:avLst/>
@@ -5409,387 +6637,24 @@
           <a:ln/>
         </p:spPr>
         <p:txBody>
-          <a:bodyPr wrap="square" rtlCol="0" anchor="ctr"/>
+          <a:bodyPr wrap="square" lIns="0" tIns="0" rIns="0" bIns="0" rtlCol="0" anchor="ctr"/>
           <a:lstStyle/>
           <a:p>
             <a:pPr marL="0" indent="0">
               <a:buNone/>
             </a:pPr>
             <a:r>
-              <a:rPr lang="en-US" sz="1500" b="1" dirty="0">
-                <a:solidFill>
-                  <a:srgbClr val="065A82"/>
-                </a:solidFill>
-                <a:latin typeface="Calibri" pitchFamily="34" charset="0"/>
-                <a:ea typeface="Calibri" pitchFamily="34" charset="-122"/>
-                <a:cs typeface="Calibri" pitchFamily="34" charset="-120"/>
-              </a:rPr>
-              <a:t>How it works</a:t>
-            </a:r>
-            <a:endParaRPr lang="en-US" sz="1500" dirty="0"/>
-          </a:p>
-        </p:txBody>
-      </p:sp>
-      <p:sp>
-        <p:nvSpPr>
-          <p:cNvPr id="5" name="Text 3"/>
-          <p:cNvSpPr/>
-          <p:nvPr/>
-        </p:nvSpPr>
-        <p:spPr>
-          <a:xfrm>
-            <a:off x="640080" y="1572768"/>
-            <a:ext cx="3291840" cy="3017520"/>
-          </a:xfrm>
-          <a:prstGeom prst="rect">
-            <a:avLst/>
-          </a:prstGeom>
-          <a:noFill/>
-          <a:ln/>
-        </p:spPr>
-        <p:txBody>
-          <a:bodyPr wrap="square" rtlCol="0" anchor="t"/>
-          <a:lstStyle/>
-          <a:p>
-            <a:pPr marL="342900" indent="-342900">
-              <a:buSzPct val="100000"/>
-              <a:buChar char="•"/>
-            </a:pPr>
-            <a:r>
-              <a:rPr lang="en-US" sz="1200" dirty="0">
-                <a:solidFill>
-                  <a:srgbClr val="1E293B"/>
-                </a:solidFill>
-                <a:latin typeface="Calibri" pitchFamily="34" charset="0"/>
-                <a:ea typeface="Calibri" pitchFamily="34" charset="-122"/>
-                <a:cs typeface="Calibri" pitchFamily="34" charset="-120"/>
-              </a:rPr>
-              <a:t>PRISM-games exports the optimal strategy as a .dot graph</a:t>
-            </a:r>
-            <a:endParaRPr lang="en-US" sz="1200" dirty="0"/>
-          </a:p>
-          <a:p>
-            <a:pPr marL="342900" indent="-342900">
-              <a:buSzPct val="100000"/>
-              <a:buChar char="•"/>
-            </a:pPr>
-            <a:r>
-              <a:rPr lang="en-US" sz="1200" dirty="0">
-                <a:solidFill>
-                  <a:srgbClr val="1E293B"/>
-                </a:solidFill>
-                <a:latin typeface="Calibri" pitchFamily="34" charset="0"/>
-                <a:ea typeface="Calibri" pitchFamily="34" charset="-122"/>
-                <a:cs typeface="Calibri" pitchFamily="34" charset="-120"/>
-              </a:rPr>
-              <a:t>Each node = a game state (location, policy, weather, mode...)</a:t>
-            </a:r>
-            <a:endParaRPr lang="en-US" sz="1200" dirty="0"/>
-          </a:p>
-          <a:p>
-            <a:pPr marL="342900" indent="-342900">
-              <a:buSzPct val="100000"/>
-              <a:buChar char="•"/>
-            </a:pPr>
-            <a:r>
-              <a:rPr lang="en-US" sz="1200" dirty="0">
-                <a:solidFill>
-                  <a:srgbClr val="1E293B"/>
-                </a:solidFill>
-                <a:latin typeface="Calibri" pitchFamily="34" charset="0"/>
-                <a:ea typeface="Calibri" pitchFamily="34" charset="-122"/>
-                <a:cs typeface="Calibri" pitchFamily="34" charset="-120"/>
-              </a:rPr>
-              <a:t>Each edge = optimal action to take at that state</a:t>
-            </a:r>
-            <a:endParaRPr lang="en-US" sz="1200" dirty="0"/>
-          </a:p>
-          <a:p>
-            <a:pPr marL="342900" indent="-342900">
-              <a:buSzPct val="100000"/>
-              <a:buChar char="•"/>
-            </a:pPr>
-            <a:r>
-              <a:rPr lang="en-US" sz="1200" dirty="0">
-                <a:solidFill>
-                  <a:srgbClr val="1E293B"/>
-                </a:solidFill>
-                <a:latin typeface="Calibri" pitchFamily="34" charset="0"/>
-                <a:ea typeface="Calibri" pitchFamily="34" charset="-122"/>
-                <a:cs typeface="Calibri" pitchFamily="34" charset="-120"/>
-              </a:rPr>
-              <a:t>Colour-coded: green = arrived, red = abandoned, blue border = initial state</a:t>
-            </a:r>
-            <a:endParaRPr lang="en-US" sz="1200" dirty="0"/>
-          </a:p>
-        </p:txBody>
-      </p:sp>
-      <p:sp>
-        <p:nvSpPr>
-          <p:cNvPr id="6" name="Shape 4"/>
-          <p:cNvSpPr/>
-          <p:nvPr/>
-        </p:nvSpPr>
-        <p:spPr>
-          <a:xfrm>
-            <a:off x="4389120" y="1005840"/>
-            <a:ext cx="4297680" cy="1828800"/>
-          </a:xfrm>
-          <a:prstGeom prst="rect">
-            <a:avLst/>
-          </a:prstGeom>
-          <a:solidFill>
-            <a:srgbClr val="065A82"/>
-          </a:solidFill>
-          <a:ln w="12700">
-            <a:solidFill>
-              <a:srgbClr val="065A82"/>
-            </a:solidFill>
-            <a:prstDash val="solid"/>
-          </a:ln>
-          <a:effectLst>
-            <a:outerShdw blurRad="101600" dist="25400" dir="8100000" algn="bl" rotWithShape="0">
-              <a:srgbClr val="000000">
-                <a:alpha val="10000"/>
-              </a:srgbClr>
-            </a:outerShdw>
-          </a:effectLst>
-        </p:spPr>
-      </p:sp>
-      <p:sp>
-        <p:nvSpPr>
-          <p:cNvPr id="7" name="Text 5"/>
-          <p:cNvSpPr/>
-          <p:nvPr/>
-        </p:nvSpPr>
-        <p:spPr>
-          <a:xfrm>
-            <a:off x="4572000" y="1097280"/>
-            <a:ext cx="3931920" cy="347472"/>
-          </a:xfrm>
-          <a:prstGeom prst="rect">
-            <a:avLst/>
-          </a:prstGeom>
-          <a:noFill/>
-          <a:ln/>
-        </p:spPr>
-        <p:txBody>
-          <a:bodyPr wrap="square" rtlCol="0" anchor="ctr"/>
-          <a:lstStyle/>
-          <a:p>
-            <a:pPr marL="0" indent="0">
-              <a:buNone/>
-            </a:pPr>
-            <a:r>
-              <a:rPr lang="en-US" sz="1400" b="1" dirty="0">
-                <a:solidFill>
-                  <a:srgbClr val="02C39A"/>
-                </a:solidFill>
-                <a:latin typeface="Calibri" pitchFamily="34" charset="0"/>
-                <a:ea typeface="Calibri" pitchFamily="34" charset="-122"/>
-                <a:cs typeface="Calibri" pitchFamily="34" charset="-120"/>
-              </a:rPr>
-              <a:t>Key Insight</a:t>
-            </a:r>
-            <a:endParaRPr lang="en-US" sz="1400" dirty="0"/>
-          </a:p>
-        </p:txBody>
-      </p:sp>
-      <p:sp>
-        <p:nvSpPr>
-          <p:cNvPr id="8" name="Text 6"/>
-          <p:cNvSpPr/>
-          <p:nvPr/>
-        </p:nvSpPr>
-        <p:spPr>
-          <a:xfrm>
-            <a:off x="4572000" y="1481328"/>
-            <a:ext cx="3931920" cy="1188720"/>
-          </a:xfrm>
-          <a:prstGeom prst="rect">
-            <a:avLst/>
-          </a:prstGeom>
-          <a:noFill/>
-          <a:ln/>
-        </p:spPr>
-        <p:txBody>
-          <a:bodyPr wrap="square" rtlCol="0" anchor="t"/>
-          <a:lstStyle/>
-          <a:p>
-            <a:pPr marL="0" indent="0">
-              <a:buNone/>
-            </a:pPr>
-            <a:r>
-              <a:rPr lang="en-US" sz="1250" dirty="0">
-                <a:solidFill>
-                  <a:srgbClr val="FFFFFF"/>
-                </a:solidFill>
-                <a:latin typeface="Calibri" pitchFamily="34" charset="0"/>
-                <a:ea typeface="Calibri" pitchFamily="34" charset="-122"/>
-                <a:cs typeface="Calibri" pitchFamily="34" charset="-120"/>
-              </a:rPr>
-              <a:t>Under road charge policy, elderly_no_car always takes bus — even though rail is faster.</a:t>
-            </a:r>
-            <a:endParaRPr lang="en-US" sz="1250" dirty="0"/>
-          </a:p>
-          <a:p>
-            <a:pPr marL="0" indent="0">
-              <a:buNone/>
-            </a:pPr>
-            <a:r>
-              <a:rPr lang="en-US" sz="1250" dirty="0">
-                <a:solidFill>
-                  <a:srgbClr val="FFFFFF"/>
-                </a:solidFill>
-                <a:latin typeface="Calibri" pitchFamily="34" charset="0"/>
-                <a:ea typeface="Calibri" pitchFamily="34" charset="-122"/>
-                <a:cs typeface="Calibri" pitchFamily="34" charset="-120"/>
-              </a:rPr>
-              <a:t>Reason: rail fare + taxi final leg &gt; fare budget. Bus is free (bus pass).</a:t>
-            </a:r>
-            <a:endParaRPr lang="en-US" sz="1250" dirty="0"/>
-          </a:p>
-        </p:txBody>
-      </p:sp>
-      <p:sp>
-        <p:nvSpPr>
-          <p:cNvPr id="9" name="Shape 7"/>
-          <p:cNvSpPr/>
-          <p:nvPr/>
-        </p:nvSpPr>
-        <p:spPr>
-          <a:xfrm>
-            <a:off x="4389120" y="3017520"/>
-            <a:ext cx="4297680" cy="1828800"/>
-          </a:xfrm>
-          <a:prstGeom prst="rect">
-            <a:avLst/>
-          </a:prstGeom>
-          <a:solidFill>
-            <a:srgbClr val="EEF5FA"/>
-          </a:solidFill>
-          <a:ln w="12700">
-            <a:solidFill>
-              <a:srgbClr val="C8DFF0"/>
-            </a:solidFill>
-            <a:prstDash val="solid"/>
-          </a:ln>
-        </p:spPr>
-      </p:sp>
-      <p:sp>
-        <p:nvSpPr>
-          <p:cNvPr id="10" name="Text 8"/>
-          <p:cNvSpPr/>
-          <p:nvPr/>
-        </p:nvSpPr>
-        <p:spPr>
-          <a:xfrm>
-            <a:off x="4572000" y="3108960"/>
-            <a:ext cx="3931920" cy="347472"/>
-          </a:xfrm>
-          <a:prstGeom prst="rect">
-            <a:avLst/>
-          </a:prstGeom>
-          <a:noFill/>
-          <a:ln/>
-        </p:spPr>
-        <p:txBody>
-          <a:bodyPr wrap="square" rtlCol="0" anchor="ctr"/>
-          <a:lstStyle/>
-          <a:p>
-            <a:pPr marL="0" indent="0">
-              <a:buNone/>
-            </a:pPr>
-            <a:r>
-              <a:rPr lang="en-US" sz="1150" b="1" dirty="0">
-                <a:solidFill>
-                  <a:srgbClr val="1E293B"/>
-                </a:solidFill>
-                <a:latin typeface="Calibri" pitchFamily="34" charset="0"/>
-                <a:ea typeface="Calibri" pitchFamily="34" charset="-122"/>
-                <a:cs typeface="Calibri" pitchFamily="34" charset="-120"/>
-              </a:rPr>
-              <a:t>Simplified optimal path (elderly_no_car · road_charge policy):</a:t>
+              <a:rPr lang="en-US" sz="1150" dirty="0">
+                <a:solidFill>
+                  <a:srgbClr val="1B2B4B"/>
+                </a:solidFill>
+                <a:latin typeface="Calibri" pitchFamily="34" charset="0"/>
+                <a:ea typeface="Calibri" pitchFamily="34" charset="-122"/>
+                <a:cs typeface="Calibri" pitchFamily="34" charset="-120"/>
+              </a:rPr>
+              <a:t>Under low disruption, all 9 personas reach the destination with probability 1.0 regardless of policy — the gap only opens up once disruption is severe.</a:t>
             </a:r>
             <a:endParaRPr lang="en-US" sz="1150" dirty="0"/>
-          </a:p>
-        </p:txBody>
-      </p:sp>
-      <p:sp>
-        <p:nvSpPr>
-          <p:cNvPr id="11" name="Text 9"/>
-          <p:cNvSpPr/>
-          <p:nvPr/>
-        </p:nvSpPr>
-        <p:spPr>
-          <a:xfrm>
-            <a:off x="4572000" y="3502152"/>
-            <a:ext cx="3931920" cy="384048"/>
-          </a:xfrm>
-          <a:prstGeom prst="rect">
-            <a:avLst/>
-          </a:prstGeom>
-          <a:noFill/>
-          <a:ln/>
-        </p:spPr>
-        <p:txBody>
-          <a:bodyPr wrap="square" rtlCol="0" anchor="ctr"/>
-          <a:lstStyle/>
-          <a:p>
-            <a:pPr marL="0" indent="0">
-              <a:buNone/>
-            </a:pPr>
-            <a:r>
-              <a:rPr lang="en-US" sz="1150" b="1" dirty="0">
-                <a:solidFill>
-                  <a:srgbClr val="065A82"/>
-                </a:solidFill>
-                <a:latin typeface="Courier New" pitchFamily="34" charset="0"/>
-                <a:ea typeface="Courier New" pitchFamily="34" charset="-122"/>
-                <a:cs typeface="Courier New" pitchFamily="34" charset="-120"/>
-              </a:rPr>
-              <a:t>Home  →  walk_to_stop  →  board_bus  →  final_leg_bus  →  Arrived</a:t>
-            </a:r>
-            <a:endParaRPr lang="en-US" sz="1150" dirty="0"/>
-          </a:p>
-        </p:txBody>
-      </p:sp>
-      <p:sp>
-        <p:nvSpPr>
-          <p:cNvPr id="12" name="Text 10"/>
-          <p:cNvSpPr/>
-          <p:nvPr/>
-        </p:nvSpPr>
-        <p:spPr>
-          <a:xfrm>
-            <a:off x="4572000" y="3931920"/>
-            <a:ext cx="3931920" cy="685800"/>
-          </a:xfrm>
-          <a:prstGeom prst="rect">
-            <a:avLst/>
-          </a:prstGeom>
-          <a:noFill/>
-          <a:ln/>
-        </p:spPr>
-        <p:txBody>
-          <a:bodyPr wrap="square" rtlCol="0" anchor="ctr"/>
-          <a:lstStyle/>
-          <a:p>
-            <a:pPr marL="0" indent="0">
-              <a:buNone/>
-            </a:pPr>
-            <a:r>
-              <a:rPr lang="en-US" sz="1100" i="1" dirty="0">
-                <a:solidFill>
-                  <a:srgbClr val="64748B"/>
-                </a:solidFill>
-                <a:latin typeface="Calibri" pitchFamily="34" charset="0"/>
-                <a:ea typeface="Calibri" pitchFamily="34" charset="-122"/>
-                <a:cs typeface="Calibri" pitchFamily="34" charset="-120"/>
-              </a:rPr>
-              <a:t>If delayed: wait → retry.   If cancelled: walk home → retry.</a:t>
-            </a:r>
-            <a:endParaRPr lang="en-US" sz="1100" dirty="0"/>
           </a:p>
         </p:txBody>
       </p:sp>
@@ -5801,13 +6666,13 @@
 </p:sld>
 </file>
 
-<file path=ppt/slides/slide8.xml><?xml version="1.0" encoding="utf-8"?>
+<file path=ppt/slides/slide9.xml><?xml version="1.0" encoding="utf-8"?>
 <p:sld xmlns:a="http://schemas.openxmlformats.org/drawingml/2006/main" xmlns:r="http://schemas.openxmlformats.org/officeDocument/2006/relationships" xmlns:p="http://schemas.openxmlformats.org/presentationml/2006/main">
   <p:cSld name="Slide 8">
     <p:bg>
       <p:bgPr>
         <a:solidFill>
-          <a:srgbClr val="F4F8FC"/>
+          <a:srgbClr val="FFFFFF"/>
         </a:solidFill>
         <a:effectLst/>
       </p:bgPr>
@@ -5828,46 +6693,94 @@
       </p:grpSpPr>
       <p:sp>
         <p:nvSpPr>
-          <p:cNvPr id="2" name="Shape 0"/>
-          <p:cNvSpPr/>
-          <p:nvPr/>
-        </p:nvSpPr>
-        <p:spPr>
-          <a:xfrm>
-            <a:off x="2286000" y="1463040"/>
-            <a:ext cx="4572000" cy="2194560"/>
-          </a:xfrm>
-          <a:prstGeom prst="rect">
-            <a:avLst/>
+          <p:cNvPr id="2" name="Text 0"/>
+          <p:cNvSpPr/>
+          <p:nvPr/>
+        </p:nvSpPr>
+        <p:spPr>
+          <a:xfrm>
+            <a:off x="411480" y="292608"/>
+            <a:ext cx="8321040" cy="502920"/>
+          </a:xfrm>
+          <a:prstGeom prst="rect">
+            <a:avLst/>
+          </a:prstGeom>
+          <a:noFill/>
+          <a:ln/>
+        </p:spPr>
+        <p:txBody>
+          <a:bodyPr wrap="square" rtlCol="0" anchor="ctr"/>
+          <a:lstStyle/>
+          <a:p>
+            <a:pPr marL="0" indent="0" algn="l">
+              <a:buNone/>
+            </a:pPr>
+            <a:r>
+              <a:rPr lang="en-US" sz="2400" b="1" dirty="0">
+                <a:solidFill>
+                  <a:srgbClr val="1B2B4B"/>
+                </a:solidFill>
+                <a:latin typeface="Calibri" pitchFamily="34" charset="0"/>
+                <a:ea typeface="Calibri" pitchFamily="34" charset="-122"/>
+                <a:cs typeface="Calibri" pitchFamily="34" charset="-120"/>
+              </a:rPr>
+              <a:t>Car-Lock-In: When Cost Can't Be Escaped</a:t>
+            </a:r>
+            <a:endParaRPr lang="en-US" sz="2400" dirty="0"/>
+          </a:p>
+        </p:txBody>
+      </p:sp>
+      <p:sp>
+        <p:nvSpPr>
+          <p:cNvPr id="3" name="Shape 1"/>
+          <p:cNvSpPr/>
+          <p:nvPr/>
+        </p:nvSpPr>
+        <p:spPr>
+          <a:xfrm>
+            <a:off x="411480" y="896112"/>
+            <a:ext cx="8321040" cy="777240"/>
+          </a:xfrm>
+          <a:prstGeom prst="roundRect">
+            <a:avLst>
+              <a:gd name="adj" fmla="val 9412"/>
+            </a:avLst>
           </a:prstGeom>
           <a:solidFill>
-            <a:srgbClr val="FFFFFF"/>
+            <a:srgbClr val="FDEDEA"/>
           </a:solidFill>
-          <a:ln w="25400">
+          <a:ln w="12700">
             <a:solidFill>
-              <a:srgbClr val="C8DFF0"/>
+              <a:srgbClr val="FDEDEA"/>
             </a:solidFill>
             <a:prstDash val="solid"/>
           </a:ln>
           <a:effectLst>
-            <a:outerShdw blurRad="101600" dist="25400" dir="8100000" algn="bl" rotWithShape="0">
+            <a:outerShdw blurRad="76200" dist="25400" dir="5400000" algn="bl" rotWithShape="0">
               <a:srgbClr val="000000">
-                <a:alpha val="10000"/>
+                <a:alpha val="12000"/>
               </a:srgbClr>
             </a:outerShdw>
           </a:effectLst>
         </p:spPr>
-      </p:sp>
-      <p:sp>
-        <p:nvSpPr>
-          <p:cNvPr id="3" name="Text 1"/>
-          <p:cNvSpPr/>
-          <p:nvPr/>
-        </p:nvSpPr>
-        <p:spPr>
-          <a:xfrm>
-            <a:off x="2286000" y="1463040"/>
-            <a:ext cx="4572000" cy="2194560"/>
+        <p:txBody>
+          <a:bodyPr/>
+          <a:lstStyle/>
+          <a:p>
+            <a:endParaRPr lang="fr-FR"/>
+          </a:p>
+        </p:txBody>
+      </p:sp>
+      <p:sp>
+        <p:nvSpPr>
+          <p:cNvPr id="4" name="Text 2"/>
+          <p:cNvSpPr/>
+          <p:nvPr/>
+        </p:nvSpPr>
+        <p:spPr>
+          <a:xfrm>
+            <a:off x="594360" y="987552"/>
+            <a:ext cx="7955280" cy="594360"/>
           </a:xfrm>
           <a:prstGeom prst="rect">
             <a:avLst/>
@@ -5879,19 +6792,70 @@
           <a:bodyPr wrap="square" lIns="0" tIns="0" rIns="0" bIns="0" rtlCol="0" anchor="ctr"/>
           <a:lstStyle/>
           <a:p>
-            <a:pPr marL="0" indent="0" algn="ctr">
+            <a:pPr marL="0" indent="0">
               <a:buNone/>
             </a:pPr>
-            <a:endParaRPr lang="en-US" sz="2400" i="1" dirty="0">
-              <a:solidFill>
-                <a:srgbClr val="64748B"/>
-              </a:solidFill>
-              <a:ea typeface="Calibri"/>
-              <a:cs typeface="Calibri"/>
-            </a:endParaRPr>
-          </a:p>
-        </p:txBody>
-      </p:sp>
+            <a:r>
+              <a:rPr lang="en-US" sz="1250" b="1" dirty="0">
+                <a:solidFill>
+                  <a:srgbClr val="9A3B2E"/>
+                </a:solidFill>
+                <a:latin typeface="Calibri" pitchFamily="34" charset="0"/>
+                <a:ea typeface="Calibri" pitchFamily="34" charset="-122"/>
+                <a:cs typeface="Calibri" pitchFamily="34" charset="-120"/>
+              </a:rPr>
+              <a:t>less_mobile: generalized cost 396 → 896 equivalent pence under Road Charge (a flat +500p pass-through) — in </a:t>
+            </a:r>
+            <a:r>
+              <a:rPr lang="en-US" sz="1250" b="1" i="1" dirty="0">
+                <a:solidFill>
+                  <a:srgbClr val="9A3B2E"/>
+                </a:solidFill>
+                <a:latin typeface="Calibri" pitchFamily="34" charset="0"/>
+                <a:ea typeface="Calibri" pitchFamily="34" charset="-122"/>
+                <a:cs typeface="Calibri" pitchFamily="34" charset="-120"/>
+              </a:rPr>
+              <a:t>every</a:t>
+            </a:r>
+            <a:r>
+              <a:rPr lang="en-US" sz="1250" b="1" dirty="0">
+                <a:solidFill>
+                  <a:srgbClr val="9A3B2E"/>
+                </a:solidFill>
+                <a:latin typeface="Calibri" pitchFamily="34" charset="0"/>
+                <a:ea typeface="Calibri" pitchFamily="34" charset="-122"/>
+                <a:cs typeface="Calibri" pitchFamily="34" charset="-120"/>
+              </a:rPr>
+              <a:t> policy, arrival probability stays exactly 1.0. No behavioural escape route exists.</a:t>
+            </a:r>
+            <a:endParaRPr lang="en-US" sz="1250" dirty="0"/>
+          </a:p>
+        </p:txBody>
+      </p:sp>
+      <p:pic>
+        <p:nvPicPr>
+          <p:cNvPr id="5" name="Image 0" descr="fig5_low.png"/>
+          <p:cNvPicPr>
+            <a:picLocks noChangeAspect="1"/>
+          </p:cNvPicPr>
+          <p:nvPr/>
+        </p:nvPicPr>
+        <p:blipFill>
+          <a:blip r:embed="rId3"/>
+          <a:stretch>
+            <a:fillRect/>
+          </a:stretch>
+        </p:blipFill>
+        <p:spPr>
+          <a:xfrm>
+            <a:off x="1975104" y="1828800"/>
+            <a:ext cx="5193792" cy="3017520"/>
+          </a:xfrm>
+          <a:prstGeom prst="rect">
+            <a:avLst/>
+          </a:prstGeom>
+        </p:spPr>
+      </p:pic>
     </p:spTree>
   </p:cSld>
   <p:clrMapOvr>
@@ -6206,39 +7170,39 @@
         <a:sysClr val="window" lastClr="FFFFFF"/>
       </a:lt1>
       <a:dk2>
-        <a:srgbClr val="44546A"/>
+        <a:srgbClr val="0E2841"/>
       </a:dk2>
       <a:lt2>
-        <a:srgbClr val="E7E6E6"/>
+        <a:srgbClr val="E8E8E8"/>
       </a:lt2>
       <a:accent1>
-        <a:srgbClr val="4472C4"/>
+        <a:srgbClr val="156082"/>
       </a:accent1>
       <a:accent2>
-        <a:srgbClr val="ED7D31"/>
+        <a:srgbClr val="E97132"/>
       </a:accent2>
       <a:accent3>
-        <a:srgbClr val="A5A5A5"/>
+        <a:srgbClr val="196B24"/>
       </a:accent3>
       <a:accent4>
-        <a:srgbClr val="FFC000"/>
+        <a:srgbClr val="0F9ED5"/>
       </a:accent4>
       <a:accent5>
-        <a:srgbClr val="5B9BD5"/>
+        <a:srgbClr val="A02B93"/>
       </a:accent5>
       <a:accent6>
-        <a:srgbClr val="70AD47"/>
+        <a:srgbClr val="4EA72E"/>
       </a:accent6>
       <a:hlink>
-        <a:srgbClr val="0563C1"/>
+        <a:srgbClr val="467886"/>
       </a:hlink>
       <a:folHlink>
-        <a:srgbClr val="954F72"/>
+        <a:srgbClr val="96607D"/>
       </a:folHlink>
     </a:clrScheme>
     <a:fontScheme name="Office">
       <a:majorFont>
-        <a:latin typeface="Calibri Light" panose="020F0302020204030204"/>
+        <a:latin typeface="Aptos Display" panose="02110004020202020204"/>
         <a:ea typeface=""/>
         <a:cs typeface=""/>
         <a:font script="Jpan" typeface="游ゴシック Light"/>
@@ -6290,7 +7254,7 @@
         <a:font script="Tfng" typeface="Ebrima"/>
       </a:majorFont>
       <a:minorFont>
-        <a:latin typeface="Calibri" panose="020F0502020204030204"/>
+        <a:latin typeface="Aptos" panose="02110004020202020204"/>
         <a:ea typeface=""/>
         <a:cs typeface=""/>
         <a:font script="Jpan" typeface="游ゴシック"/>
@@ -6401,13 +7365,6 @@
         </a:gradFill>
       </a:fillStyleLst>
       <a:lnStyleLst>
-        <a:ln w="6350" cap="flat" cmpd="sng" algn="ctr">
-          <a:solidFill>
-            <a:schemeClr val="phClr"/>
-          </a:solidFill>
-          <a:prstDash val="solid"/>
-          <a:miter lim="800000"/>
-        </a:ln>
         <a:ln w="12700" cap="flat" cmpd="sng" algn="ctr">
           <a:solidFill>
             <a:schemeClr val="phClr"/>
@@ -6416,6 +7373,13 @@
           <a:miter lim="800000"/>
         </a:ln>
         <a:ln w="19050" cap="flat" cmpd="sng" algn="ctr">
+          <a:solidFill>
+            <a:schemeClr val="phClr"/>
+          </a:solidFill>
+          <a:prstDash val="solid"/>
+          <a:miter lim="800000"/>
+        </a:ln>
+        <a:ln w="25400" cap="flat" cmpd="sng" algn="ctr">
           <a:solidFill>
             <a:schemeClr val="phClr"/>
           </a:solidFill>
@@ -6480,11 +7444,31 @@
       </a:bgFillStyleLst>
     </a:fmtScheme>
   </a:themeElements>
-  <a:objectDefaults/>
+  <a:objectDefaults>
+    <a:lnDef>
+      <a:spPr/>
+      <a:bodyPr/>
+      <a:lstStyle/>
+      <a:style>
+        <a:lnRef idx="2">
+          <a:schemeClr val="accent1"/>
+        </a:lnRef>
+        <a:fillRef idx="0">
+          <a:schemeClr val="accent1"/>
+        </a:fillRef>
+        <a:effectRef idx="1">
+          <a:schemeClr val="accent1"/>
+        </a:effectRef>
+        <a:fontRef idx="minor">
+          <a:schemeClr val="tx1"/>
+        </a:fontRef>
+      </a:style>
+    </a:lnDef>
+  </a:objectDefaults>
   <a:extraClrSchemeLst/>
   <a:extLst>
     <a:ext uri="{05A4C25C-085E-4340-85A3-A5531E510DB2}">
-      <thm15:themeFamily xmlns:thm15="http://schemas.microsoft.com/office/thememl/2012/main" name="Office Theme" id="{62F939B6-93AF-4DB8-9C6B-D6C7DFDC589F}" vid="{4A3C46E8-61CC-4603-A589-7422A47A8E4A}"/>
+      <thm15:themeFamily xmlns:thm15="http://schemas.microsoft.com/office/thememl/2012/main" name="Office Theme" id="{2E142A2C-CD16-42D6-873A-C26D2A0506FA}" vid="{1BDDFF52-6CD6-40A5-AB3C-68EB2F1E4D0A}"/>
     </a:ext>
   </a:extLst>
 </a:theme>
